--- a/figures/conceptual/conceptual.pptx
+++ b/figures/conceptual/conceptual.pptx
@@ -5,7 +5,7 @@
     <p:sldMasterId id="2147483648" r:id="rId1"/>
   </p:sldMasterIdLst>
   <p:notesMasterIdLst>
-    <p:notesMasterId r:id="rId9"/>
+    <p:notesMasterId r:id="rId11"/>
   </p:notesMasterIdLst>
   <p:sldIdLst>
     <p:sldId id="260" r:id="rId2"/>
@@ -13,8 +13,10 @@
     <p:sldId id="258" r:id="rId4"/>
     <p:sldId id="259" r:id="rId5"/>
     <p:sldId id="263" r:id="rId6"/>
-    <p:sldId id="261" r:id="rId7"/>
-    <p:sldId id="264" r:id="rId8"/>
+    <p:sldId id="265" r:id="rId7"/>
+    <p:sldId id="261" r:id="rId8"/>
+    <p:sldId id="264" r:id="rId9"/>
+    <p:sldId id="266" r:id="rId10"/>
   </p:sldIdLst>
   <p:sldSz cx="12192000" cy="6858000"/>
   <p:notesSz cx="6858000" cy="9144000"/>
@@ -203,7 +205,7 @@
           <a:p>
             <a:fld id="{5F0BAA97-B2B8-EA40-A7C9-10EAB2FFF9B3}" type="datetimeFigureOut">
               <a:rPr lang="en-US" smtClean="0"/>
-              <a:t>10/2/25</a:t>
+              <a:t>2/3/26</a:t>
             </a:fld>
             <a:endParaRPr lang="en-US"/>
           </a:p>
@@ -554,6 +556,114 @@
 </p:notes>
 </file>
 
+<file path=ppt/notesSlides/notesSlide2.xml><?xml version="1.0" encoding="utf-8"?>
+<p:notes xmlns:a="http://schemas.openxmlformats.org/drawingml/2006/main" xmlns:r="http://schemas.openxmlformats.org/officeDocument/2006/relationships" xmlns:p="http://schemas.openxmlformats.org/presentationml/2006/main">
+  <p:cSld>
+    <p:spTree>
+      <p:nvGrpSpPr>
+        <p:cNvPr id="1" name="">
+          <a:extLst>
+            <a:ext uri="{FF2B5EF4-FFF2-40B4-BE49-F238E27FC236}">
+              <a16:creationId xmlns:a16="http://schemas.microsoft.com/office/drawing/2014/main" id="{6357208F-B72A-BE5E-60AA-23DE2BC50CDB}"/>
+            </a:ext>
+          </a:extLst>
+        </p:cNvPr>
+        <p:cNvGrpSpPr/>
+        <p:nvPr/>
+      </p:nvGrpSpPr>
+      <p:grpSpPr>
+        <a:xfrm>
+          <a:off x="0" y="0"/>
+          <a:ext cx="0" cy="0"/>
+          <a:chOff x="0" y="0"/>
+          <a:chExt cx="0" cy="0"/>
+        </a:xfrm>
+      </p:grpSpPr>
+      <p:sp>
+        <p:nvSpPr>
+          <p:cNvPr id="2" name="Slide Image Placeholder 1">
+            <a:extLst>
+              <a:ext uri="{FF2B5EF4-FFF2-40B4-BE49-F238E27FC236}">
+                <a16:creationId xmlns:a16="http://schemas.microsoft.com/office/drawing/2014/main" id="{82D4D133-81C9-C344-A841-0F0F9E2B7591}"/>
+              </a:ext>
+            </a:extLst>
+          </p:cNvPr>
+          <p:cNvSpPr>
+            <a:spLocks noGrp="1" noRot="1" noChangeAspect="1"/>
+          </p:cNvSpPr>
+          <p:nvPr>
+            <p:ph type="sldImg"/>
+          </p:nvPr>
+        </p:nvSpPr>
+        <p:spPr/>
+      </p:sp>
+      <p:sp>
+        <p:nvSpPr>
+          <p:cNvPr id="3" name="Notes Placeholder 2">
+            <a:extLst>
+              <a:ext uri="{FF2B5EF4-FFF2-40B4-BE49-F238E27FC236}">
+                <a16:creationId xmlns:a16="http://schemas.microsoft.com/office/drawing/2014/main" id="{9644D571-83E0-98EC-E230-CF0518FC2EA0}"/>
+              </a:ext>
+            </a:extLst>
+          </p:cNvPr>
+          <p:cNvSpPr>
+            <a:spLocks noGrp="1"/>
+          </p:cNvSpPr>
+          <p:nvPr>
+            <p:ph type="body" idx="1"/>
+          </p:nvPr>
+        </p:nvSpPr>
+        <p:spPr/>
+        <p:txBody>
+          <a:bodyPr/>
+          <a:lstStyle/>
+          <a:p>
+            <a:endParaRPr lang="en-US" dirty="0"/>
+          </a:p>
+        </p:txBody>
+      </p:sp>
+      <p:sp>
+        <p:nvSpPr>
+          <p:cNvPr id="4" name="Slide Number Placeholder 3">
+            <a:extLst>
+              <a:ext uri="{FF2B5EF4-FFF2-40B4-BE49-F238E27FC236}">
+                <a16:creationId xmlns:a16="http://schemas.microsoft.com/office/drawing/2014/main" id="{0D2AECA3-8DB4-0AEF-905D-6176D44AAFEA}"/>
+              </a:ext>
+            </a:extLst>
+          </p:cNvPr>
+          <p:cNvSpPr>
+            <a:spLocks noGrp="1"/>
+          </p:cNvSpPr>
+          <p:nvPr>
+            <p:ph type="sldNum" sz="quarter" idx="5"/>
+          </p:nvPr>
+        </p:nvSpPr>
+        <p:spPr/>
+        <p:txBody>
+          <a:bodyPr/>
+          <a:lstStyle/>
+          <a:p>
+            <a:fld id="{E95791F3-F2F4-604C-9893-A30F4EB37339}" type="slidenum">
+              <a:rPr lang="en-US" smtClean="0"/>
+              <a:t>6</a:t>
+            </a:fld>
+            <a:endParaRPr lang="en-US"/>
+          </a:p>
+        </p:txBody>
+      </p:sp>
+    </p:spTree>
+    <p:extLst>
+      <p:ext uri="{BB962C8B-B14F-4D97-AF65-F5344CB8AC3E}">
+        <p14:creationId xmlns:p14="http://schemas.microsoft.com/office/powerpoint/2010/main" val="3434756748"/>
+      </p:ext>
+    </p:extLst>
+  </p:cSld>
+  <p:clrMapOvr>
+    <a:masterClrMapping/>
+  </p:clrMapOvr>
+</p:notes>
+</file>
+
 <file path=ppt/slideLayouts/slideLayout1.xml><?xml version="1.0" encoding="utf-8"?>
 <p:sldLayout xmlns:a="http://schemas.openxmlformats.org/drawingml/2006/main" xmlns:r="http://schemas.openxmlformats.org/officeDocument/2006/relationships" xmlns:p="http://schemas.openxmlformats.org/presentationml/2006/main" type="title" preserve="1">
   <p:cSld name="Title Slide">
@@ -701,7 +811,7 @@
           <a:p>
             <a:fld id="{DF4DC901-9D7D-5040-9AC4-ED1AFACCCDE5}" type="datetimeFigureOut">
               <a:rPr lang="en-US" smtClean="0"/>
-              <a:t>10/2/25</a:t>
+              <a:t>2/3/26</a:t>
             </a:fld>
             <a:endParaRPr lang="en-US"/>
           </a:p>
@@ -899,7 +1009,7 @@
           <a:p>
             <a:fld id="{DF4DC901-9D7D-5040-9AC4-ED1AFACCCDE5}" type="datetimeFigureOut">
               <a:rPr lang="en-US" smtClean="0"/>
-              <a:t>10/2/25</a:t>
+              <a:t>2/3/26</a:t>
             </a:fld>
             <a:endParaRPr lang="en-US"/>
           </a:p>
@@ -1107,7 +1217,7 @@
           <a:p>
             <a:fld id="{DF4DC901-9D7D-5040-9AC4-ED1AFACCCDE5}" type="datetimeFigureOut">
               <a:rPr lang="en-US" smtClean="0"/>
-              <a:t>10/2/25</a:t>
+              <a:t>2/3/26</a:t>
             </a:fld>
             <a:endParaRPr lang="en-US"/>
           </a:p>
@@ -1305,7 +1415,7 @@
           <a:p>
             <a:fld id="{DF4DC901-9D7D-5040-9AC4-ED1AFACCCDE5}" type="datetimeFigureOut">
               <a:rPr lang="en-US" smtClean="0"/>
-              <a:t>10/2/25</a:t>
+              <a:t>2/3/26</a:t>
             </a:fld>
             <a:endParaRPr lang="en-US"/>
           </a:p>
@@ -1580,7 +1690,7 @@
           <a:p>
             <a:fld id="{DF4DC901-9D7D-5040-9AC4-ED1AFACCCDE5}" type="datetimeFigureOut">
               <a:rPr lang="en-US" smtClean="0"/>
-              <a:t>10/2/25</a:t>
+              <a:t>2/3/26</a:t>
             </a:fld>
             <a:endParaRPr lang="en-US"/>
           </a:p>
@@ -1845,7 +1955,7 @@
           <a:p>
             <a:fld id="{DF4DC901-9D7D-5040-9AC4-ED1AFACCCDE5}" type="datetimeFigureOut">
               <a:rPr lang="en-US" smtClean="0"/>
-              <a:t>10/2/25</a:t>
+              <a:t>2/3/26</a:t>
             </a:fld>
             <a:endParaRPr lang="en-US"/>
           </a:p>
@@ -2257,7 +2367,7 @@
           <a:p>
             <a:fld id="{DF4DC901-9D7D-5040-9AC4-ED1AFACCCDE5}" type="datetimeFigureOut">
               <a:rPr lang="en-US" smtClean="0"/>
-              <a:t>10/2/25</a:t>
+              <a:t>2/3/26</a:t>
             </a:fld>
             <a:endParaRPr lang="en-US"/>
           </a:p>
@@ -2398,7 +2508,7 @@
           <a:p>
             <a:fld id="{DF4DC901-9D7D-5040-9AC4-ED1AFACCCDE5}" type="datetimeFigureOut">
               <a:rPr lang="en-US" smtClean="0"/>
-              <a:t>10/2/25</a:t>
+              <a:t>2/3/26</a:t>
             </a:fld>
             <a:endParaRPr lang="en-US"/>
           </a:p>
@@ -2511,7 +2621,7 @@
           <a:p>
             <a:fld id="{DF4DC901-9D7D-5040-9AC4-ED1AFACCCDE5}" type="datetimeFigureOut">
               <a:rPr lang="en-US" smtClean="0"/>
-              <a:t>10/2/25</a:t>
+              <a:t>2/3/26</a:t>
             </a:fld>
             <a:endParaRPr lang="en-US"/>
           </a:p>
@@ -2822,7 +2932,7 @@
           <a:p>
             <a:fld id="{DF4DC901-9D7D-5040-9AC4-ED1AFACCCDE5}" type="datetimeFigureOut">
               <a:rPr lang="en-US" smtClean="0"/>
-              <a:t>10/2/25</a:t>
+              <a:t>2/3/26</a:t>
             </a:fld>
             <a:endParaRPr lang="en-US"/>
           </a:p>
@@ -3110,7 +3220,7 @@
           <a:p>
             <a:fld id="{DF4DC901-9D7D-5040-9AC4-ED1AFACCCDE5}" type="datetimeFigureOut">
               <a:rPr lang="en-US" smtClean="0"/>
-              <a:t>10/2/25</a:t>
+              <a:t>2/3/26</a:t>
             </a:fld>
             <a:endParaRPr lang="en-US"/>
           </a:p>
@@ -3351,7 +3461,7 @@
           <a:p>
             <a:fld id="{DF4DC901-9D7D-5040-9AC4-ED1AFACCCDE5}" type="datetimeFigureOut">
               <a:rPr lang="en-US" smtClean="0"/>
-              <a:t>10/2/25</a:t>
+              <a:t>2/3/26</a:t>
             </a:fld>
             <a:endParaRPr lang="en-US"/>
           </a:p>
@@ -6934,8 +7044,8 @@
           </a:p>
         </p:txBody>
       </p:sp>
-      <mc:AlternateContent xmlns:mc="http://schemas.openxmlformats.org/markup-compatibility/2006">
-        <mc:Choice xmlns:a14="http://schemas.microsoft.com/office/drawing/2010/main" Requires="a14">
+      <mc:AlternateContent xmlns:mc="http://schemas.openxmlformats.org/markup-compatibility/2006" xmlns:a14="http://schemas.microsoft.com/office/drawing/2010/main">
+        <mc:Choice Requires="a14">
           <p:sp>
             <p:nvSpPr>
               <p:cNvPr id="14" name="TextBox 13">
@@ -6964,6 +7074,7 @@
               </a:bodyPr>
               <a:lstStyle/>
               <a:p>
+                <a:pPr/>
                 <a14:m>
                   <m:oMathPara xmlns:m="http://schemas.openxmlformats.org/officeDocument/2006/math">
                     <m:oMathParaPr>
@@ -6973,7 +7084,7 @@
                       <m:sSub>
                         <m:sSubPr>
                           <m:ctrlPr>
-                            <a:rPr lang="en-US" sz="2000" smtClean="0">
+                            <a:rPr lang="en-US" sz="2000" i="1" smtClean="0">
                               <a:latin typeface="Cambria Math" panose="02040503050406030204" pitchFamily="18" charset="0"/>
                             </a:rPr>
                           </m:ctrlPr>
@@ -6993,7 +7104,7 @@
                           <m:sSub>
                             <m:sSubPr>
                               <m:ctrlPr>
-                                <a:rPr lang="en-US" sz="2000" smtClean="0">
+                                <a:rPr lang="en-US" sz="2000" i="1" smtClean="0">
                                   <a:latin typeface="Cambria Math" panose="02040503050406030204" pitchFamily="18" charset="0"/>
                                 </a:rPr>
                               </m:ctrlPr>
@@ -7031,7 +7142,7 @@
             </p:txBody>
           </p:sp>
         </mc:Choice>
-        <mc:Fallback>
+        <mc:Fallback xmlns="">
           <p:sp>
             <p:nvSpPr>
               <p:cNvPr id="14" name="TextBox 13">
@@ -7076,8 +7187,8 @@
           </p:sp>
         </mc:Fallback>
       </mc:AlternateContent>
-      <mc:AlternateContent xmlns:mc="http://schemas.openxmlformats.org/markup-compatibility/2006">
-        <mc:Choice xmlns:a14="http://schemas.microsoft.com/office/drawing/2010/main" Requires="a14">
+      <mc:AlternateContent xmlns:mc="http://schemas.openxmlformats.org/markup-compatibility/2006" xmlns:a14="http://schemas.microsoft.com/office/drawing/2010/main">
+        <mc:Choice Requires="a14">
           <p:sp>
             <p:nvSpPr>
               <p:cNvPr id="22" name="TextBox 21">
@@ -7106,6 +7217,7 @@
               </a:bodyPr>
               <a:lstStyle/>
               <a:p>
+                <a:pPr/>
                 <a14:m>
                   <m:oMathPara xmlns:m="http://schemas.openxmlformats.org/officeDocument/2006/math">
                     <m:oMathParaPr>
@@ -7115,7 +7227,7 @@
                       <m:sSub>
                         <m:sSubPr>
                           <m:ctrlPr>
-                            <a:rPr lang="en-US" sz="2000" smtClean="0">
+                            <a:rPr lang="en-US" sz="2000" i="1" smtClean="0">
                               <a:latin typeface="Cambria Math" panose="02040503050406030204" pitchFamily="18" charset="0"/>
                             </a:rPr>
                           </m:ctrlPr>
@@ -7135,7 +7247,7 @@
                           <m:sSub>
                             <m:sSubPr>
                               <m:ctrlPr>
-                                <a:rPr lang="en-US" sz="2000" smtClean="0">
+                                <a:rPr lang="en-US" sz="2000" i="1" smtClean="0">
                                   <a:latin typeface="Cambria Math" panose="02040503050406030204" pitchFamily="18" charset="0"/>
                                 </a:rPr>
                               </m:ctrlPr>
@@ -7179,7 +7291,7 @@
             </p:txBody>
           </p:sp>
         </mc:Choice>
-        <mc:Fallback>
+        <mc:Fallback xmlns="">
           <p:sp>
             <p:nvSpPr>
               <p:cNvPr id="22" name="TextBox 21">
@@ -7638,8 +7750,8 @@
           </a:p>
         </p:txBody>
       </p:sp>
-      <mc:AlternateContent xmlns:mc="http://schemas.openxmlformats.org/markup-compatibility/2006">
-        <mc:Choice xmlns:a14="http://schemas.microsoft.com/office/drawing/2010/main" Requires="a14">
+      <mc:AlternateContent xmlns:mc="http://schemas.openxmlformats.org/markup-compatibility/2006" xmlns:a14="http://schemas.microsoft.com/office/drawing/2010/main">
+        <mc:Choice Requires="a14">
           <p:sp>
             <p:nvSpPr>
               <p:cNvPr id="2" name="TextBox 1">
@@ -7668,2388 +7780,7 @@
               </a:bodyPr>
               <a:lstStyle/>
               <a:p>
-                <a14:m>
-                  <m:oMathPara xmlns:m="http://schemas.openxmlformats.org/officeDocument/2006/math">
-                    <m:oMathParaPr>
-                      <m:jc m:val="centerGroup"/>
-                    </m:oMathParaPr>
-                    <m:oMath xmlns:m="http://schemas.openxmlformats.org/officeDocument/2006/math">
-                      <m:sSub>
-                        <m:sSubPr>
-                          <m:ctrlPr>
-                            <a:rPr lang="en-US" sz="1200" smtClean="0">
-                              <a:latin typeface="Cambria Math" panose="02040503050406030204" pitchFamily="18" charset="0"/>
-                            </a:rPr>
-                          </m:ctrlPr>
-                        </m:sSubPr>
-                        <m:e>
-                          <m:r>
-                            <m:rPr>
-                              <m:sty m:val="p"/>
-                            </m:rPr>
-                            <a:rPr lang="en-CA" sz="1200" b="0" i="0" smtClean="0">
-                              <a:latin typeface="Cambria Math" panose="02040503050406030204" pitchFamily="18" charset="0"/>
-                            </a:rPr>
-                            <m:t>E</m:t>
-                          </m:r>
-                        </m:e>
-                        <m:sub>
-                          <m:sSub>
-                            <m:sSubPr>
-                              <m:ctrlPr>
-                                <a:rPr lang="en-US" sz="1200" smtClean="0">
-                                  <a:latin typeface="Cambria Math" panose="02040503050406030204" pitchFamily="18" charset="0"/>
-                                </a:rPr>
-                              </m:ctrlPr>
-                            </m:sSubPr>
-                            <m:e>
-                              <m:r>
-                                <m:rPr>
-                                  <m:sty m:val="p"/>
-                                </m:rPr>
-                                <a:rPr lang="en-CA" sz="1200" b="0" i="0" smtClean="0">
-                                  <a:latin typeface="Cambria Math" panose="02040503050406030204" pitchFamily="18" charset="0"/>
-                                </a:rPr>
-                                <m:t>r</m:t>
-                              </m:r>
-                            </m:e>
-                            <m:sub>
-                              <m:r>
-                                <m:rPr>
-                                  <m:sty m:val="p"/>
-                                </m:rPr>
-                                <a:rPr lang="en-CA" sz="1200" b="0" i="0" smtClean="0">
-                                  <a:latin typeface="Cambria Math" panose="02040503050406030204" pitchFamily="18" charset="0"/>
-                                </a:rPr>
-                                <m:t>b</m:t>
-                              </m:r>
-                            </m:sub>
-                          </m:sSub>
-                        </m:sub>
-                      </m:sSub>
-                    </m:oMath>
-                  </m:oMathPara>
-                </a14:m>
-                <a:endParaRPr lang="en-US" sz="1200" dirty="0"/>
-              </a:p>
-            </p:txBody>
-          </p:sp>
-        </mc:Choice>
-        <mc:Fallback>
-          <p:sp>
-            <p:nvSpPr>
-              <p:cNvPr id="2" name="TextBox 1">
-                <a:extLst>
-                  <a:ext uri="{FF2B5EF4-FFF2-40B4-BE49-F238E27FC236}">
-                    <a16:creationId xmlns:a16="http://schemas.microsoft.com/office/drawing/2014/main" id="{5A06FF18-EDCF-E4BB-F020-03B39CE6EFB1}"/>
-                  </a:ext>
-                </a:extLst>
-              </p:cNvPr>
-              <p:cNvSpPr txBox="1">
-                <a:spLocks noRot="1" noChangeAspect="1" noMove="1" noResize="1" noEditPoints="1" noAdjustHandles="1" noChangeArrowheads="1" noChangeShapeType="1" noTextEdit="1"/>
-              </p:cNvSpPr>
-              <p:nvPr/>
-            </p:nvSpPr>
-            <p:spPr>
-              <a:xfrm>
-                <a:off x="5344224" y="2944027"/>
-                <a:ext cx="545534" cy="294376"/>
-              </a:xfrm>
-              <a:prstGeom prst="rect">
-                <a:avLst/>
-              </a:prstGeom>
-              <a:blipFill>
-                <a:blip r:embed="rId8"/>
-                <a:stretch>
-                  <a:fillRect/>
-                </a:stretch>
-              </a:blipFill>
-            </p:spPr>
-            <p:txBody>
-              <a:bodyPr/>
-              <a:lstStyle/>
-              <a:p>
-                <a:r>
-                  <a:rPr lang="en-US">
-                    <a:noFill/>
-                  </a:rPr>
-                  <a:t> </a:t>
-                </a:r>
-              </a:p>
-            </p:txBody>
-          </p:sp>
-        </mc:Fallback>
-      </mc:AlternateContent>
-      <mc:AlternateContent xmlns:mc="http://schemas.openxmlformats.org/markup-compatibility/2006">
-        <mc:Choice xmlns:a14="http://schemas.microsoft.com/office/drawing/2010/main" Requires="a14">
-          <p:sp>
-            <p:nvSpPr>
-              <p:cNvPr id="4" name="TextBox 3">
-                <a:extLst>
-                  <a:ext uri="{FF2B5EF4-FFF2-40B4-BE49-F238E27FC236}">
-                    <a16:creationId xmlns:a16="http://schemas.microsoft.com/office/drawing/2014/main" id="{CB42D2F0-1B73-44A8-75F8-1EE4D7468F68}"/>
-                  </a:ext>
-                </a:extLst>
-              </p:cNvPr>
-              <p:cNvSpPr txBox="1"/>
-              <p:nvPr/>
-            </p:nvSpPr>
-            <p:spPr>
-              <a:xfrm>
-                <a:off x="5719224" y="3618821"/>
-                <a:ext cx="545534" cy="294376"/>
-              </a:xfrm>
-              <a:prstGeom prst="rect">
-                <a:avLst/>
-              </a:prstGeom>
-              <a:noFill/>
-            </p:spPr>
-            <p:txBody>
-              <a:bodyPr wrap="square" rtlCol="0">
-                <a:spAutoFit/>
-              </a:bodyPr>
-              <a:lstStyle/>
-              <a:p>
-                <a14:m>
-                  <m:oMathPara xmlns:m="http://schemas.openxmlformats.org/officeDocument/2006/math">
-                    <m:oMathParaPr>
-                      <m:jc m:val="centerGroup"/>
-                    </m:oMathParaPr>
-                    <m:oMath xmlns:m="http://schemas.openxmlformats.org/officeDocument/2006/math">
-                      <m:sSub>
-                        <m:sSubPr>
-                          <m:ctrlPr>
-                            <a:rPr lang="en-US" sz="1200" smtClean="0">
-                              <a:latin typeface="Cambria Math" panose="02040503050406030204" pitchFamily="18" charset="0"/>
-                            </a:rPr>
-                          </m:ctrlPr>
-                        </m:sSubPr>
-                        <m:e>
-                          <m:r>
-                            <m:rPr>
-                              <m:sty m:val="p"/>
-                            </m:rPr>
-                            <a:rPr lang="en-CA" sz="1200" b="0" i="0" smtClean="0">
-                              <a:latin typeface="Cambria Math" panose="02040503050406030204" pitchFamily="18" charset="0"/>
-                            </a:rPr>
-                            <m:t>E</m:t>
-                          </m:r>
-                        </m:e>
-                        <m:sub>
-                          <m:sSub>
-                            <m:sSubPr>
-                              <m:ctrlPr>
-                                <a:rPr lang="en-US" sz="1200" smtClean="0">
-                                  <a:latin typeface="Cambria Math" panose="02040503050406030204" pitchFamily="18" charset="0"/>
-                                </a:rPr>
-                              </m:ctrlPr>
-                            </m:sSubPr>
-                            <m:e>
-                              <m:r>
-                                <m:rPr>
-                                  <m:sty m:val="p"/>
-                                </m:rPr>
-                                <a:rPr lang="en-CA" sz="1200" b="0" i="0" smtClean="0">
-                                  <a:latin typeface="Cambria Math" panose="02040503050406030204" pitchFamily="18" charset="0"/>
-                                </a:rPr>
-                                <m:t>c</m:t>
-                              </m:r>
-                              <m:r>
-                                <a:rPr lang="en-CA" sz="1200" b="0" i="0" smtClean="0">
-                                  <a:latin typeface="Cambria Math" panose="02040503050406030204" pitchFamily="18" charset="0"/>
-                                </a:rPr>
-                                <m:t>2</m:t>
-                              </m:r>
-                            </m:e>
-                            <m:sub>
-                              <m:r>
-                                <m:rPr>
-                                  <m:sty m:val="p"/>
-                                </m:rPr>
-                                <a:rPr lang="en-CA" sz="1200" b="0" i="0" smtClean="0">
-                                  <a:latin typeface="Cambria Math" panose="02040503050406030204" pitchFamily="18" charset="0"/>
-                                </a:rPr>
-                                <m:t>b</m:t>
-                              </m:r>
-                            </m:sub>
-                          </m:sSub>
-                        </m:sub>
-                      </m:sSub>
-                    </m:oMath>
-                  </m:oMathPara>
-                </a14:m>
-                <a:endParaRPr lang="en-US" sz="1200" dirty="0"/>
-              </a:p>
-            </p:txBody>
-          </p:sp>
-        </mc:Choice>
-        <mc:Fallback>
-          <p:sp>
-            <p:nvSpPr>
-              <p:cNvPr id="4" name="TextBox 3">
-                <a:extLst>
-                  <a:ext uri="{FF2B5EF4-FFF2-40B4-BE49-F238E27FC236}">
-                    <a16:creationId xmlns:a16="http://schemas.microsoft.com/office/drawing/2014/main" id="{CB42D2F0-1B73-44A8-75F8-1EE4D7468F68}"/>
-                  </a:ext>
-                </a:extLst>
-              </p:cNvPr>
-              <p:cNvSpPr txBox="1">
-                <a:spLocks noRot="1" noChangeAspect="1" noMove="1" noResize="1" noEditPoints="1" noAdjustHandles="1" noChangeArrowheads="1" noChangeShapeType="1" noTextEdit="1"/>
-              </p:cNvSpPr>
-              <p:nvPr/>
-            </p:nvSpPr>
-            <p:spPr>
-              <a:xfrm>
-                <a:off x="5719224" y="3618821"/>
-                <a:ext cx="545534" cy="294376"/>
-              </a:xfrm>
-              <a:prstGeom prst="rect">
-                <a:avLst/>
-              </a:prstGeom>
-              <a:blipFill>
-                <a:blip r:embed="rId9"/>
-                <a:stretch>
-                  <a:fillRect/>
-                </a:stretch>
-              </a:blipFill>
-            </p:spPr>
-            <p:txBody>
-              <a:bodyPr/>
-              <a:lstStyle/>
-              <a:p>
-                <a:r>
-                  <a:rPr lang="en-US">
-                    <a:noFill/>
-                  </a:rPr>
-                  <a:t> </a:t>
-                </a:r>
-              </a:p>
-            </p:txBody>
-          </p:sp>
-        </mc:Fallback>
-      </mc:AlternateContent>
-    </p:spTree>
-    <p:extLst>
-      <p:ext uri="{BB962C8B-B14F-4D97-AF65-F5344CB8AC3E}">
-        <p14:creationId xmlns:p14="http://schemas.microsoft.com/office/powerpoint/2010/main" val="3965078389"/>
-      </p:ext>
-    </p:extLst>
-  </p:cSld>
-  <p:clrMapOvr>
-    <a:masterClrMapping/>
-  </p:clrMapOvr>
-</p:sld>
-</file>
-
-<file path=ppt/slides/slide6.xml><?xml version="1.0" encoding="utf-8"?>
-<p:sld xmlns:a="http://schemas.openxmlformats.org/drawingml/2006/main" xmlns:r="http://schemas.openxmlformats.org/officeDocument/2006/relationships" xmlns:p="http://schemas.openxmlformats.org/presentationml/2006/main">
-  <p:cSld>
-    <p:spTree>
-      <p:nvGrpSpPr>
-        <p:cNvPr id="1" name="">
-          <a:extLst>
-            <a:ext uri="{FF2B5EF4-FFF2-40B4-BE49-F238E27FC236}">
-              <a16:creationId xmlns:a16="http://schemas.microsoft.com/office/drawing/2014/main" id="{D478DB4D-06EF-B8DF-79E9-70283EE4660A}"/>
-            </a:ext>
-          </a:extLst>
-        </p:cNvPr>
-        <p:cNvGrpSpPr/>
-        <p:nvPr/>
-      </p:nvGrpSpPr>
-      <p:grpSpPr>
-        <a:xfrm>
-          <a:off x="0" y="0"/>
-          <a:ext cx="0" cy="0"/>
-          <a:chOff x="0" y="0"/>
-          <a:chExt cx="0" cy="0"/>
-        </a:xfrm>
-      </p:grpSpPr>
-      <p:sp>
-        <p:nvSpPr>
-          <p:cNvPr id="4" name="Rounded Rectangle 3">
-            <a:extLst>
-              <a:ext uri="{FF2B5EF4-FFF2-40B4-BE49-F238E27FC236}">
-                <a16:creationId xmlns:a16="http://schemas.microsoft.com/office/drawing/2014/main" id="{AF1107AF-C7D0-4958-344D-FDA11F8CAC4B}"/>
-              </a:ext>
-            </a:extLst>
-          </p:cNvPr>
-          <p:cNvSpPr/>
-          <p:nvPr/>
-        </p:nvSpPr>
-        <p:spPr>
-          <a:xfrm>
-            <a:off x="2005148" y="1567542"/>
-            <a:ext cx="803366" cy="783767"/>
-          </a:xfrm>
-          <a:prstGeom prst="roundRect">
-            <a:avLst/>
-          </a:prstGeom>
-          <a:solidFill>
-            <a:schemeClr val="bg2"/>
-          </a:solidFill>
-          <a:ln>
-            <a:solidFill>
-              <a:schemeClr val="bg2">
-                <a:lumMod val="75000"/>
-              </a:schemeClr>
-            </a:solidFill>
-          </a:ln>
-        </p:spPr>
-        <p:style>
-          <a:lnRef idx="2">
-            <a:schemeClr val="accent1">
-              <a:shade val="15000"/>
-            </a:schemeClr>
-          </a:lnRef>
-          <a:fillRef idx="1">
-            <a:schemeClr val="accent1"/>
-          </a:fillRef>
-          <a:effectRef idx="0">
-            <a:schemeClr val="accent1"/>
-          </a:effectRef>
-          <a:fontRef idx="minor">
-            <a:schemeClr val="lt1"/>
-          </a:fontRef>
-        </p:style>
-        <p:txBody>
-          <a:bodyPr rtlCol="0" anchor="ctr"/>
-          <a:lstStyle/>
-          <a:p>
-            <a:pPr algn="ctr"/>
-            <a:r>
-              <a:rPr lang="en-US" sz="2400" dirty="0">
-                <a:solidFill>
-                  <a:schemeClr val="bg2">
-                    <a:lumMod val="75000"/>
-                  </a:schemeClr>
-                </a:solidFill>
-              </a:rPr>
-              <a:t>N</a:t>
-            </a:r>
-            <a:r>
-              <a:rPr lang="en-US" sz="2400" baseline="-25000" dirty="0">
-                <a:solidFill>
-                  <a:schemeClr val="bg2">
-                    <a:lumMod val="75000"/>
-                  </a:schemeClr>
-                </a:solidFill>
-              </a:rPr>
-              <a:t>1</a:t>
-            </a:r>
-          </a:p>
-        </p:txBody>
-      </p:sp>
-      <p:sp>
-        <p:nvSpPr>
-          <p:cNvPr id="6" name="Oval 5">
-            <a:extLst>
-              <a:ext uri="{FF2B5EF4-FFF2-40B4-BE49-F238E27FC236}">
-                <a16:creationId xmlns:a16="http://schemas.microsoft.com/office/drawing/2014/main" id="{3D8AA8BC-9F82-9DFD-BA1B-52C370D4A161}"/>
-              </a:ext>
-            </a:extLst>
-          </p:cNvPr>
-          <p:cNvSpPr/>
-          <p:nvPr/>
-        </p:nvSpPr>
-        <p:spPr>
-          <a:xfrm>
-            <a:off x="2005148" y="3944982"/>
-            <a:ext cx="875212" cy="862149"/>
-          </a:xfrm>
-          <a:prstGeom prst="ellipse">
-            <a:avLst/>
-          </a:prstGeom>
-          <a:solidFill>
-            <a:schemeClr val="bg2"/>
-          </a:solidFill>
-          <a:ln>
-            <a:solidFill>
-              <a:schemeClr val="bg2">
-                <a:lumMod val="75000"/>
-              </a:schemeClr>
-            </a:solidFill>
-          </a:ln>
-        </p:spPr>
-        <p:style>
-          <a:lnRef idx="2">
-            <a:schemeClr val="accent1">
-              <a:shade val="15000"/>
-            </a:schemeClr>
-          </a:lnRef>
-          <a:fillRef idx="1">
-            <a:schemeClr val="accent1"/>
-          </a:fillRef>
-          <a:effectRef idx="0">
-            <a:schemeClr val="accent1"/>
-          </a:effectRef>
-          <a:fontRef idx="minor">
-            <a:schemeClr val="lt1"/>
-          </a:fontRef>
-        </p:style>
-        <p:txBody>
-          <a:bodyPr rtlCol="0" anchor="ctr"/>
-          <a:lstStyle/>
-          <a:p>
-            <a:pPr algn="ctr"/>
-            <a:r>
-              <a:rPr lang="en-US" sz="2000" dirty="0">
-                <a:solidFill>
-                  <a:schemeClr val="bg2">
-                    <a:lumMod val="75000"/>
-                  </a:schemeClr>
-                </a:solidFill>
-              </a:rPr>
-              <a:t>R</a:t>
-            </a:r>
-            <a:r>
-              <a:rPr lang="en-US" sz="2000" baseline="-25000" dirty="0">
-                <a:solidFill>
-                  <a:schemeClr val="bg2">
-                    <a:lumMod val="75000"/>
-                  </a:schemeClr>
-                </a:solidFill>
-              </a:rPr>
-              <a:t>a</a:t>
-            </a:r>
-          </a:p>
-        </p:txBody>
-      </p:sp>
-      <p:sp>
-        <p:nvSpPr>
-          <p:cNvPr id="7" name="Oval 6">
-            <a:extLst>
-              <a:ext uri="{FF2B5EF4-FFF2-40B4-BE49-F238E27FC236}">
-                <a16:creationId xmlns:a16="http://schemas.microsoft.com/office/drawing/2014/main" id="{D7A4BEA1-1C7C-8E5C-3EF3-4CB5B1EBA1F8}"/>
-              </a:ext>
-            </a:extLst>
-          </p:cNvPr>
-          <p:cNvSpPr/>
-          <p:nvPr/>
-        </p:nvSpPr>
-        <p:spPr>
-          <a:xfrm>
-            <a:off x="4299857" y="3944982"/>
-            <a:ext cx="875212" cy="862149"/>
-          </a:xfrm>
-          <a:prstGeom prst="ellipse">
-            <a:avLst/>
-          </a:prstGeom>
-          <a:solidFill>
-            <a:schemeClr val="bg2"/>
-          </a:solidFill>
-          <a:ln>
-            <a:solidFill>
-              <a:schemeClr val="bg2">
-                <a:lumMod val="75000"/>
-              </a:schemeClr>
-            </a:solidFill>
-          </a:ln>
-        </p:spPr>
-        <p:style>
-          <a:lnRef idx="2">
-            <a:schemeClr val="accent1">
-              <a:shade val="15000"/>
-            </a:schemeClr>
-          </a:lnRef>
-          <a:fillRef idx="1">
-            <a:schemeClr val="accent1"/>
-          </a:fillRef>
-          <a:effectRef idx="0">
-            <a:schemeClr val="accent1"/>
-          </a:effectRef>
-          <a:fontRef idx="minor">
-            <a:schemeClr val="lt1"/>
-          </a:fontRef>
-        </p:style>
-        <p:txBody>
-          <a:bodyPr rtlCol="0" anchor="ctr"/>
-          <a:lstStyle/>
-          <a:p>
-            <a:pPr algn="ctr"/>
-            <a:r>
-              <a:rPr lang="en-US" sz="2400" dirty="0">
-                <a:solidFill>
-                  <a:schemeClr val="bg2">
-                    <a:lumMod val="75000"/>
-                  </a:schemeClr>
-                </a:solidFill>
-              </a:rPr>
-              <a:t>R</a:t>
-            </a:r>
-            <a:r>
-              <a:rPr lang="en-US" sz="2400" baseline="-25000" dirty="0">
-                <a:solidFill>
-                  <a:schemeClr val="bg2">
-                    <a:lumMod val="75000"/>
-                  </a:schemeClr>
-                </a:solidFill>
-              </a:rPr>
-              <a:t>b</a:t>
-            </a:r>
-            <a:endParaRPr lang="en-US" baseline="-25000" dirty="0">
-              <a:solidFill>
-                <a:schemeClr val="bg2">
-                  <a:lumMod val="75000"/>
-                </a:schemeClr>
-              </a:solidFill>
-            </a:endParaRPr>
-          </a:p>
-        </p:txBody>
-      </p:sp>
-      <p:sp>
-        <p:nvSpPr>
-          <p:cNvPr id="24" name="TextBox 23">
-            <a:extLst>
-              <a:ext uri="{FF2B5EF4-FFF2-40B4-BE49-F238E27FC236}">
-                <a16:creationId xmlns:a16="http://schemas.microsoft.com/office/drawing/2014/main" id="{6DA00BF8-F4B2-C7B5-66E2-7096EB778268}"/>
-              </a:ext>
-            </a:extLst>
-          </p:cNvPr>
-          <p:cNvSpPr txBox="1"/>
-          <p:nvPr/>
-        </p:nvSpPr>
-        <p:spPr>
-          <a:xfrm>
-            <a:off x="1538911" y="4905096"/>
-            <a:ext cx="945756" cy="400110"/>
-          </a:xfrm>
-          <a:prstGeom prst="rect">
-            <a:avLst/>
-          </a:prstGeom>
-          <a:noFill/>
-        </p:spPr>
-        <p:txBody>
-          <a:bodyPr wrap="square" rtlCol="0">
-            <a:spAutoFit/>
-          </a:bodyPr>
-          <a:lstStyle/>
-          <a:p>
-            <a:r>
-              <a:rPr lang="en-US" sz="2000" dirty="0"/>
-              <a:t>r</a:t>
-            </a:r>
-            <a:r>
-              <a:rPr lang="en-US" sz="2000" baseline="-25000" dirty="0"/>
-              <a:t>a</a:t>
-            </a:r>
-          </a:p>
-        </p:txBody>
-      </p:sp>
-      <p:sp>
-        <p:nvSpPr>
-          <p:cNvPr id="25" name="TextBox 24">
-            <a:extLst>
-              <a:ext uri="{FF2B5EF4-FFF2-40B4-BE49-F238E27FC236}">
-                <a16:creationId xmlns:a16="http://schemas.microsoft.com/office/drawing/2014/main" id="{104DB52E-9259-C3C1-626A-B9E806B59CC6}"/>
-              </a:ext>
-            </a:extLst>
-          </p:cNvPr>
-          <p:cNvSpPr txBox="1"/>
-          <p:nvPr/>
-        </p:nvSpPr>
-        <p:spPr>
-          <a:xfrm>
-            <a:off x="3749867" y="2086311"/>
-            <a:ext cx="1019608" cy="400110"/>
-          </a:xfrm>
-          <a:prstGeom prst="rect">
-            <a:avLst/>
-          </a:prstGeom>
-          <a:noFill/>
-        </p:spPr>
-        <p:txBody>
-          <a:bodyPr wrap="square" rtlCol="0">
-            <a:spAutoFit/>
-          </a:bodyPr>
-          <a:lstStyle/>
-          <a:p>
-            <a:r>
-              <a:rPr lang="en-US" sz="2000" dirty="0">
-                <a:solidFill>
-                  <a:schemeClr val="bg2">
-                    <a:lumMod val="75000"/>
-                  </a:schemeClr>
-                </a:solidFill>
-              </a:rPr>
-              <a:t>c</a:t>
-            </a:r>
-            <a:r>
-              <a:rPr lang="en-US" sz="2000" baseline="-25000" dirty="0">
-                <a:solidFill>
-                  <a:schemeClr val="bg2">
-                    <a:lumMod val="75000"/>
-                  </a:schemeClr>
-                </a:solidFill>
-              </a:rPr>
-              <a:t>2a</a:t>
-            </a:r>
-          </a:p>
-        </p:txBody>
-      </p:sp>
-      <p:sp>
-        <p:nvSpPr>
-          <p:cNvPr id="26" name="TextBox 25">
-            <a:extLst>
-              <a:ext uri="{FF2B5EF4-FFF2-40B4-BE49-F238E27FC236}">
-                <a16:creationId xmlns:a16="http://schemas.microsoft.com/office/drawing/2014/main" id="{B9B4B76B-72F8-E849-AE8F-EAEA23160241}"/>
-              </a:ext>
-            </a:extLst>
-          </p:cNvPr>
-          <p:cNvSpPr txBox="1"/>
-          <p:nvPr/>
-        </p:nvSpPr>
-        <p:spPr>
-          <a:xfrm>
-            <a:off x="2894648" y="2103294"/>
-            <a:ext cx="896732" cy="400110"/>
-          </a:xfrm>
-          <a:prstGeom prst="rect">
-            <a:avLst/>
-          </a:prstGeom>
-          <a:noFill/>
-        </p:spPr>
-        <p:txBody>
-          <a:bodyPr wrap="square" rtlCol="0">
-            <a:spAutoFit/>
-          </a:bodyPr>
-          <a:lstStyle/>
-          <a:p>
-            <a:r>
-              <a:rPr lang="en-US" sz="2000" dirty="0">
-                <a:solidFill>
-                  <a:schemeClr val="bg2">
-                    <a:lumMod val="75000"/>
-                  </a:schemeClr>
-                </a:solidFill>
-              </a:rPr>
-              <a:t>c</a:t>
-            </a:r>
-            <a:r>
-              <a:rPr lang="en-US" sz="2000" baseline="-25000" dirty="0">
-                <a:solidFill>
-                  <a:schemeClr val="bg2">
-                    <a:lumMod val="75000"/>
-                  </a:schemeClr>
-                </a:solidFill>
-              </a:rPr>
-              <a:t>1b</a:t>
-            </a:r>
-          </a:p>
-        </p:txBody>
-      </p:sp>
-      <p:sp>
-        <p:nvSpPr>
-          <p:cNvPr id="27" name="TextBox 26">
-            <a:extLst>
-              <a:ext uri="{FF2B5EF4-FFF2-40B4-BE49-F238E27FC236}">
-                <a16:creationId xmlns:a16="http://schemas.microsoft.com/office/drawing/2014/main" id="{857E7AC5-02DE-0023-8072-1608CB8D64FE}"/>
-              </a:ext>
-            </a:extLst>
-          </p:cNvPr>
-          <p:cNvSpPr txBox="1"/>
-          <p:nvPr/>
-        </p:nvSpPr>
-        <p:spPr>
-          <a:xfrm>
-            <a:off x="4741818" y="2954774"/>
-            <a:ext cx="1080248" cy="400110"/>
-          </a:xfrm>
-          <a:prstGeom prst="rect">
-            <a:avLst/>
-          </a:prstGeom>
-          <a:noFill/>
-        </p:spPr>
-        <p:txBody>
-          <a:bodyPr wrap="square" rtlCol="0">
-            <a:spAutoFit/>
-          </a:bodyPr>
-          <a:lstStyle/>
-          <a:p>
-            <a:r>
-              <a:rPr lang="en-US" sz="2000" dirty="0">
-                <a:solidFill>
-                  <a:schemeClr val="bg2">
-                    <a:lumMod val="75000"/>
-                  </a:schemeClr>
-                </a:solidFill>
-              </a:rPr>
-              <a:t>c</a:t>
-            </a:r>
-            <a:r>
-              <a:rPr lang="en-US" sz="2000" baseline="-25000" dirty="0">
-                <a:solidFill>
-                  <a:schemeClr val="bg2">
-                    <a:lumMod val="75000"/>
-                  </a:schemeClr>
-                </a:solidFill>
-              </a:rPr>
-              <a:t>2b</a:t>
-            </a:r>
-            <a:endParaRPr lang="en-US" sz="2000" dirty="0">
-              <a:solidFill>
-                <a:schemeClr val="bg2">
-                  <a:lumMod val="75000"/>
-                </a:schemeClr>
-              </a:solidFill>
-            </a:endParaRPr>
-          </a:p>
-        </p:txBody>
-      </p:sp>
-      <p:sp>
-        <p:nvSpPr>
-          <p:cNvPr id="28" name="TextBox 27">
-            <a:extLst>
-              <a:ext uri="{FF2B5EF4-FFF2-40B4-BE49-F238E27FC236}">
-                <a16:creationId xmlns:a16="http://schemas.microsoft.com/office/drawing/2014/main" id="{C0F6BFCC-D0B9-B135-4362-A062F9C3D730}"/>
-              </a:ext>
-            </a:extLst>
-          </p:cNvPr>
-          <p:cNvSpPr txBox="1"/>
-          <p:nvPr/>
-        </p:nvSpPr>
-        <p:spPr>
-          <a:xfrm>
-            <a:off x="1970030" y="2849686"/>
-            <a:ext cx="1175756" cy="400110"/>
-          </a:xfrm>
-          <a:prstGeom prst="rect">
-            <a:avLst/>
-          </a:prstGeom>
-          <a:noFill/>
-        </p:spPr>
-        <p:txBody>
-          <a:bodyPr wrap="square" rtlCol="0">
-            <a:spAutoFit/>
-          </a:bodyPr>
-          <a:lstStyle/>
-          <a:p>
-            <a:r>
-              <a:rPr lang="en-US" sz="2000" dirty="0">
-                <a:solidFill>
-                  <a:schemeClr val="bg2">
-                    <a:lumMod val="75000"/>
-                  </a:schemeClr>
-                </a:solidFill>
-              </a:rPr>
-              <a:t>c</a:t>
-            </a:r>
-            <a:r>
-              <a:rPr lang="en-US" sz="2000" baseline="-25000" dirty="0">
-                <a:solidFill>
-                  <a:schemeClr val="bg2">
-                    <a:lumMod val="75000"/>
-                  </a:schemeClr>
-                </a:solidFill>
-              </a:rPr>
-              <a:t>1a</a:t>
-            </a:r>
-          </a:p>
-        </p:txBody>
-      </p:sp>
-      <p:sp>
-        <p:nvSpPr>
-          <p:cNvPr id="35" name="TextBox 34">
-            <a:extLst>
-              <a:ext uri="{FF2B5EF4-FFF2-40B4-BE49-F238E27FC236}">
-                <a16:creationId xmlns:a16="http://schemas.microsoft.com/office/drawing/2014/main" id="{8DBD0FA7-74A0-F60F-5B22-92745E29F29E}"/>
-              </a:ext>
-            </a:extLst>
-          </p:cNvPr>
-          <p:cNvSpPr txBox="1"/>
-          <p:nvPr/>
-        </p:nvSpPr>
-        <p:spPr>
-          <a:xfrm>
-            <a:off x="631172" y="1780641"/>
-            <a:ext cx="494046" cy="400110"/>
-          </a:xfrm>
-          <a:prstGeom prst="rect">
-            <a:avLst/>
-          </a:prstGeom>
-          <a:noFill/>
-        </p:spPr>
-        <p:txBody>
-          <a:bodyPr wrap="none" rtlCol="0">
-            <a:spAutoFit/>
-          </a:bodyPr>
-          <a:lstStyle/>
-          <a:p>
-            <a:r>
-              <a:rPr lang="en-US" sz="2000" dirty="0">
-                <a:solidFill>
-                  <a:schemeClr val="bg2">
-                    <a:lumMod val="75000"/>
-                  </a:schemeClr>
-                </a:solidFill>
-              </a:rPr>
-              <a:t>m</a:t>
-            </a:r>
-            <a:r>
-              <a:rPr lang="en-US" sz="2000" baseline="-25000" dirty="0">
-                <a:solidFill>
-                  <a:schemeClr val="bg2">
-                    <a:lumMod val="75000"/>
-                  </a:schemeClr>
-                </a:solidFill>
-              </a:rPr>
-              <a:t>1</a:t>
-            </a:r>
-          </a:p>
-        </p:txBody>
-      </p:sp>
-      <p:sp>
-        <p:nvSpPr>
-          <p:cNvPr id="37" name="TextBox 36">
-            <a:extLst>
-              <a:ext uri="{FF2B5EF4-FFF2-40B4-BE49-F238E27FC236}">
-                <a16:creationId xmlns:a16="http://schemas.microsoft.com/office/drawing/2014/main" id="{B7B5F1A6-52BF-85CF-DEB8-96BA3E5C1330}"/>
-              </a:ext>
-            </a:extLst>
-          </p:cNvPr>
-          <p:cNvSpPr txBox="1"/>
-          <p:nvPr/>
-        </p:nvSpPr>
-        <p:spPr>
-          <a:xfrm>
-            <a:off x="6077726" y="1780641"/>
-            <a:ext cx="494046" cy="400110"/>
-          </a:xfrm>
-          <a:prstGeom prst="rect">
-            <a:avLst/>
-          </a:prstGeom>
-          <a:noFill/>
-        </p:spPr>
-        <p:txBody>
-          <a:bodyPr wrap="none" rtlCol="0">
-            <a:spAutoFit/>
-          </a:bodyPr>
-          <a:lstStyle/>
-          <a:p>
-            <a:r>
-              <a:rPr lang="en-US" sz="2000" dirty="0">
-                <a:solidFill>
-                  <a:schemeClr val="bg2">
-                    <a:lumMod val="75000"/>
-                  </a:schemeClr>
-                </a:solidFill>
-              </a:rPr>
-              <a:t>m</a:t>
-            </a:r>
-            <a:r>
-              <a:rPr lang="en-US" sz="2000" baseline="-25000" dirty="0">
-                <a:solidFill>
-                  <a:schemeClr val="bg2">
-                    <a:lumMod val="75000"/>
-                  </a:schemeClr>
-                </a:solidFill>
-              </a:rPr>
-              <a:t>2</a:t>
-            </a:r>
-          </a:p>
-        </p:txBody>
-      </p:sp>
-      <p:sp>
-        <p:nvSpPr>
-          <p:cNvPr id="2" name="Rounded Rectangle 1">
-            <a:extLst>
-              <a:ext uri="{FF2B5EF4-FFF2-40B4-BE49-F238E27FC236}">
-                <a16:creationId xmlns:a16="http://schemas.microsoft.com/office/drawing/2014/main" id="{9932BECC-99D4-A952-CA5D-C970154320A2}"/>
-              </a:ext>
-            </a:extLst>
-          </p:cNvPr>
-          <p:cNvSpPr/>
-          <p:nvPr/>
-        </p:nvSpPr>
-        <p:spPr>
-          <a:xfrm>
-            <a:off x="4335780" y="1561854"/>
-            <a:ext cx="803366" cy="783767"/>
-          </a:xfrm>
-          <a:prstGeom prst="roundRect">
-            <a:avLst/>
-          </a:prstGeom>
-          <a:solidFill>
-            <a:schemeClr val="bg2"/>
-          </a:solidFill>
-          <a:ln>
-            <a:solidFill>
-              <a:schemeClr val="bg2">
-                <a:lumMod val="75000"/>
-              </a:schemeClr>
-            </a:solidFill>
-          </a:ln>
-        </p:spPr>
-        <p:style>
-          <a:lnRef idx="2">
-            <a:schemeClr val="accent1">
-              <a:shade val="15000"/>
-            </a:schemeClr>
-          </a:lnRef>
-          <a:fillRef idx="1">
-            <a:schemeClr val="accent1"/>
-          </a:fillRef>
-          <a:effectRef idx="0">
-            <a:schemeClr val="accent1"/>
-          </a:effectRef>
-          <a:fontRef idx="minor">
-            <a:schemeClr val="lt1"/>
-          </a:fontRef>
-        </p:style>
-        <p:txBody>
-          <a:bodyPr rtlCol="0" anchor="ctr"/>
-          <a:lstStyle/>
-          <a:p>
-            <a:pPr algn="ctr"/>
-            <a:r>
-              <a:rPr lang="en-US" sz="2400" dirty="0">
-                <a:solidFill>
-                  <a:schemeClr val="bg2">
-                    <a:lumMod val="75000"/>
-                  </a:schemeClr>
-                </a:solidFill>
-              </a:rPr>
-              <a:t>N</a:t>
-            </a:r>
-            <a:r>
-              <a:rPr lang="en-US" sz="2400" baseline="-25000" dirty="0">
-                <a:solidFill>
-                  <a:schemeClr val="bg2">
-                    <a:lumMod val="75000"/>
-                  </a:schemeClr>
-                </a:solidFill>
-              </a:rPr>
-              <a:t>2</a:t>
-            </a:r>
-            <a:endParaRPr lang="en-US" baseline="-25000" dirty="0">
-              <a:solidFill>
-                <a:schemeClr val="bg2">
-                  <a:lumMod val="75000"/>
-                </a:schemeClr>
-              </a:solidFill>
-            </a:endParaRPr>
-          </a:p>
-        </p:txBody>
-      </p:sp>
-      <p:pic>
-        <p:nvPicPr>
-          <p:cNvPr id="8" name="Graphic 7" descr="Line arrow: Rotate right with solid fill">
-            <a:extLst>
-              <a:ext uri="{FF2B5EF4-FFF2-40B4-BE49-F238E27FC236}">
-                <a16:creationId xmlns:a16="http://schemas.microsoft.com/office/drawing/2014/main" id="{6C14A8FC-8756-F4B0-E40F-11C1E83E5305}"/>
-              </a:ext>
-            </a:extLst>
-          </p:cNvPr>
-          <p:cNvPicPr>
-            <a:picLocks noChangeAspect="1"/>
-          </p:cNvPicPr>
-          <p:nvPr/>
-        </p:nvPicPr>
-        <p:blipFill>
-          <a:blip r:embed="rId2">
-            <a:extLst>
-              <a:ext uri="{96DAC541-7B7A-43D3-8B79-37D633B846F1}">
-                <asvg:svgBlip xmlns:asvg="http://schemas.microsoft.com/office/drawing/2016/SVG/main" r:embed="rId3"/>
-              </a:ext>
-            </a:extLst>
-          </a:blip>
-          <a:stretch>
-            <a:fillRect/>
-          </a:stretch>
-        </p:blipFill>
-        <p:spPr>
-          <a:xfrm rot="9532772">
-            <a:off x="4655052" y="4425622"/>
-            <a:ext cx="914400" cy="914400"/>
-          </a:xfrm>
-          <a:prstGeom prst="rect">
-            <a:avLst/>
-          </a:prstGeom>
-        </p:spPr>
-      </p:pic>
-      <p:pic>
-        <p:nvPicPr>
-          <p:cNvPr id="9" name="Graphic 8" descr="Line arrow: Rotate right with solid fill">
-            <a:extLst>
-              <a:ext uri="{FF2B5EF4-FFF2-40B4-BE49-F238E27FC236}">
-                <a16:creationId xmlns:a16="http://schemas.microsoft.com/office/drawing/2014/main" id="{1D48737D-3ADD-35A5-37F7-921A9E001E3D}"/>
-              </a:ext>
-            </a:extLst>
-          </p:cNvPr>
-          <p:cNvPicPr>
-            <a:picLocks noChangeAspect="1"/>
-          </p:cNvPicPr>
-          <p:nvPr/>
-        </p:nvPicPr>
-        <p:blipFill>
-          <a:blip r:embed="rId4">
-            <a:extLst>
-              <a:ext uri="{96DAC541-7B7A-43D3-8B79-37D633B846F1}">
-                <asvg:svgBlip xmlns:asvg="http://schemas.microsoft.com/office/drawing/2016/SVG/main" r:embed="rId5"/>
-              </a:ext>
-            </a:extLst>
-          </a:blip>
-          <a:stretch>
-            <a:fillRect/>
-          </a:stretch>
-        </p:blipFill>
-        <p:spPr>
-          <a:xfrm rot="13588340">
-            <a:off x="1639005" y="4458046"/>
-            <a:ext cx="914400" cy="914400"/>
-          </a:xfrm>
-          <a:prstGeom prst="rect">
-            <a:avLst/>
-          </a:prstGeom>
-        </p:spPr>
-      </p:pic>
-      <p:sp>
-        <p:nvSpPr>
-          <p:cNvPr id="13" name="TextBox 12">
-            <a:extLst>
-              <a:ext uri="{FF2B5EF4-FFF2-40B4-BE49-F238E27FC236}">
-                <a16:creationId xmlns:a16="http://schemas.microsoft.com/office/drawing/2014/main" id="{807E8711-1E91-CCD3-B021-CDF797AEA1B3}"/>
-              </a:ext>
-            </a:extLst>
-          </p:cNvPr>
-          <p:cNvSpPr txBox="1"/>
-          <p:nvPr/>
-        </p:nvSpPr>
-        <p:spPr>
-          <a:xfrm>
-            <a:off x="5399134" y="4962351"/>
-            <a:ext cx="914399" cy="400110"/>
-          </a:xfrm>
-          <a:prstGeom prst="rect">
-            <a:avLst/>
-          </a:prstGeom>
-          <a:noFill/>
-        </p:spPr>
-        <p:txBody>
-          <a:bodyPr wrap="square" rtlCol="0">
-            <a:spAutoFit/>
-          </a:bodyPr>
-          <a:lstStyle/>
-          <a:p>
-            <a:r>
-              <a:rPr lang="en-US" sz="2000" dirty="0"/>
-              <a:t>r</a:t>
-            </a:r>
-            <a:r>
-              <a:rPr lang="en-US" sz="2000" baseline="-25000" dirty="0"/>
-              <a:t>b</a:t>
-            </a:r>
-          </a:p>
-        </p:txBody>
-      </p:sp>
-      <p:pic>
-        <p:nvPicPr>
-          <p:cNvPr id="16" name="Graphic 15" descr="Line arrow: Straight with solid fill">
-            <a:extLst>
-              <a:ext uri="{FF2B5EF4-FFF2-40B4-BE49-F238E27FC236}">
-                <a16:creationId xmlns:a16="http://schemas.microsoft.com/office/drawing/2014/main" id="{8D9FB6EA-3895-E4EF-8952-3ABEEA81E3E0}"/>
-              </a:ext>
-            </a:extLst>
-          </p:cNvPr>
-          <p:cNvPicPr>
-            <a:picLocks noChangeAspect="1"/>
-          </p:cNvPicPr>
-          <p:nvPr/>
-        </p:nvPicPr>
-        <p:blipFill>
-          <a:blip r:embed="rId6">
-            <a:extLst>
-              <a:ext uri="{96DAC541-7B7A-43D3-8B79-37D633B846F1}">
-                <asvg:svgBlip xmlns:asvg="http://schemas.microsoft.com/office/drawing/2016/SVG/main" r:embed="rId7"/>
-              </a:ext>
-            </a:extLst>
-          </a:blip>
-          <a:stretch>
-            <a:fillRect/>
-          </a:stretch>
-        </p:blipFill>
-        <p:spPr>
-          <a:xfrm>
-            <a:off x="1054825" y="1508107"/>
-            <a:ext cx="914400" cy="914400"/>
-          </a:xfrm>
-          <a:prstGeom prst="rect">
-            <a:avLst/>
-          </a:prstGeom>
-        </p:spPr>
-      </p:pic>
-      <p:pic>
-        <p:nvPicPr>
-          <p:cNvPr id="19" name="Graphic 18" descr="Line arrow: Straight with solid fill">
-            <a:extLst>
-              <a:ext uri="{FF2B5EF4-FFF2-40B4-BE49-F238E27FC236}">
-                <a16:creationId xmlns:a16="http://schemas.microsoft.com/office/drawing/2014/main" id="{B2235172-F21D-4A73-94AE-01FA8D70FA35}"/>
-              </a:ext>
-            </a:extLst>
-          </p:cNvPr>
-          <p:cNvPicPr>
-            <a:picLocks noChangeAspect="1"/>
-          </p:cNvPicPr>
-          <p:nvPr/>
-        </p:nvPicPr>
-        <p:blipFill>
-          <a:blip r:embed="rId6">
-            <a:extLst>
-              <a:ext uri="{96DAC541-7B7A-43D3-8B79-37D633B846F1}">
-                <asvg:svgBlip xmlns:asvg="http://schemas.microsoft.com/office/drawing/2016/SVG/main" r:embed="rId7"/>
-              </a:ext>
-            </a:extLst>
-          </a:blip>
-          <a:stretch>
-            <a:fillRect/>
-          </a:stretch>
-        </p:blipFill>
-        <p:spPr>
-          <a:xfrm rot="10800000">
-            <a:off x="5175069" y="1496537"/>
-            <a:ext cx="914400" cy="914400"/>
-          </a:xfrm>
-          <a:prstGeom prst="rect">
-            <a:avLst/>
-          </a:prstGeom>
-        </p:spPr>
-      </p:pic>
-      <p:pic>
-        <p:nvPicPr>
-          <p:cNvPr id="20" name="Graphic 19" descr="Arrow Up with solid fill">
-            <a:extLst>
-              <a:ext uri="{FF2B5EF4-FFF2-40B4-BE49-F238E27FC236}">
-                <a16:creationId xmlns:a16="http://schemas.microsoft.com/office/drawing/2014/main" id="{AD0398B1-DEA5-5CE3-5D9E-160F61A2DB19}"/>
-              </a:ext>
-            </a:extLst>
-          </p:cNvPr>
-          <p:cNvPicPr>
-            <a:picLocks noChangeAspect="1"/>
-          </p:cNvPicPr>
-          <p:nvPr/>
-        </p:nvPicPr>
-        <p:blipFill>
-          <a:blip r:embed="rId8">
-            <a:extLst>
-              <a:ext uri="{96DAC541-7B7A-43D3-8B79-37D633B846F1}">
-                <asvg:svgBlip xmlns:asvg="http://schemas.microsoft.com/office/drawing/2016/SVG/main" r:embed="rId9"/>
-              </a:ext>
-            </a:extLst>
-          </a:blip>
-          <a:stretch>
-            <a:fillRect/>
-          </a:stretch>
-        </p:blipFill>
-        <p:spPr>
-          <a:xfrm>
-            <a:off x="1976128" y="2358739"/>
-            <a:ext cx="914400" cy="1561401"/>
-          </a:xfrm>
-          <a:prstGeom prst="rect">
-            <a:avLst/>
-          </a:prstGeom>
-        </p:spPr>
-      </p:pic>
-      <p:pic>
-        <p:nvPicPr>
-          <p:cNvPr id="29" name="Graphic 28" descr="Arrow Up with solid fill">
-            <a:extLst>
-              <a:ext uri="{FF2B5EF4-FFF2-40B4-BE49-F238E27FC236}">
-                <a16:creationId xmlns:a16="http://schemas.microsoft.com/office/drawing/2014/main" id="{91F25E93-04E4-989F-E0DD-35D7ACD7A9F8}"/>
-              </a:ext>
-            </a:extLst>
-          </p:cNvPr>
-          <p:cNvPicPr>
-            <a:picLocks noChangeAspect="1"/>
-          </p:cNvPicPr>
-          <p:nvPr/>
-        </p:nvPicPr>
-        <p:blipFill>
-          <a:blip r:embed="rId8">
-            <a:extLst>
-              <a:ext uri="{96DAC541-7B7A-43D3-8B79-37D633B846F1}">
-                <asvg:svgBlip xmlns:asvg="http://schemas.microsoft.com/office/drawing/2016/SVG/main" r:embed="rId9"/>
-              </a:ext>
-            </a:extLst>
-          </a:blip>
-          <a:stretch>
-            <a:fillRect/>
-          </a:stretch>
-        </p:blipFill>
-        <p:spPr>
-          <a:xfrm rot="2623736">
-            <a:off x="3116987" y="1972502"/>
-            <a:ext cx="914400" cy="2407291"/>
-          </a:xfrm>
-          <a:prstGeom prst="rect">
-            <a:avLst/>
-          </a:prstGeom>
-        </p:spPr>
-      </p:pic>
-      <p:pic>
-        <p:nvPicPr>
-          <p:cNvPr id="32" name="Graphic 31" descr="Arrow Up with solid fill">
-            <a:extLst>
-              <a:ext uri="{FF2B5EF4-FFF2-40B4-BE49-F238E27FC236}">
-                <a16:creationId xmlns:a16="http://schemas.microsoft.com/office/drawing/2014/main" id="{ABE8B96F-6BD8-52EB-8D4E-B7D906607B7C}"/>
-              </a:ext>
-            </a:extLst>
-          </p:cNvPr>
-          <p:cNvPicPr>
-            <a:picLocks noChangeAspect="1"/>
-          </p:cNvPicPr>
-          <p:nvPr/>
-        </p:nvPicPr>
-        <p:blipFill>
-          <a:blip r:embed="rId8">
-            <a:extLst>
-              <a:ext uri="{96DAC541-7B7A-43D3-8B79-37D633B846F1}">
-                <asvg:svgBlip xmlns:asvg="http://schemas.microsoft.com/office/drawing/2016/SVG/main" r:embed="rId9"/>
-              </a:ext>
-            </a:extLst>
-          </a:blip>
-          <a:stretch>
-            <a:fillRect/>
-          </a:stretch>
-        </p:blipFill>
-        <p:spPr>
-          <a:xfrm rot="19022280">
-            <a:off x="3121470" y="1976985"/>
-            <a:ext cx="914400" cy="2407291"/>
-          </a:xfrm>
-          <a:prstGeom prst="rect">
-            <a:avLst/>
-          </a:prstGeom>
-        </p:spPr>
-      </p:pic>
-      <p:pic>
-        <p:nvPicPr>
-          <p:cNvPr id="5" name="Picture 4">
-            <a:extLst>
-              <a:ext uri="{FF2B5EF4-FFF2-40B4-BE49-F238E27FC236}">
-                <a16:creationId xmlns:a16="http://schemas.microsoft.com/office/drawing/2014/main" id="{0845B73E-B56D-22AB-CD05-028D8B186FBB}"/>
-              </a:ext>
-            </a:extLst>
-          </p:cNvPr>
-          <p:cNvPicPr>
-            <a:picLocks noChangeAspect="1"/>
-          </p:cNvPicPr>
-          <p:nvPr/>
-        </p:nvPicPr>
-        <p:blipFill>
-          <a:blip r:embed="rId10"/>
-          <a:srcRect t="5389" b="6584"/>
-          <a:stretch/>
-        </p:blipFill>
-        <p:spPr>
-          <a:xfrm>
-            <a:off x="6941546" y="1386207"/>
-            <a:ext cx="4584700" cy="4076271"/>
-          </a:xfrm>
-          <a:prstGeom prst="rect">
-            <a:avLst/>
-          </a:prstGeom>
-        </p:spPr>
-      </p:pic>
-      <p:pic>
-        <p:nvPicPr>
-          <p:cNvPr id="10" name="Graphic 9" descr="Arrow Up with solid fill">
-            <a:extLst>
-              <a:ext uri="{FF2B5EF4-FFF2-40B4-BE49-F238E27FC236}">
-                <a16:creationId xmlns:a16="http://schemas.microsoft.com/office/drawing/2014/main" id="{7FF87E4D-F0EB-DD05-5EFB-CAD9098787A1}"/>
-              </a:ext>
-            </a:extLst>
-          </p:cNvPr>
-          <p:cNvPicPr>
-            <a:picLocks noChangeAspect="1"/>
-          </p:cNvPicPr>
-          <p:nvPr/>
-        </p:nvPicPr>
-        <p:blipFill>
-          <a:blip r:embed="rId8">
-            <a:extLst>
-              <a:ext uri="{96DAC541-7B7A-43D3-8B79-37D633B846F1}">
-                <asvg:svgBlip xmlns:asvg="http://schemas.microsoft.com/office/drawing/2016/SVG/main" r:embed="rId9"/>
-              </a:ext>
-            </a:extLst>
-          </a:blip>
-          <a:stretch>
-            <a:fillRect/>
-          </a:stretch>
-        </p:blipFill>
-        <p:spPr>
-          <a:xfrm>
-            <a:off x="4294407" y="2383581"/>
-            <a:ext cx="914400" cy="1561401"/>
-          </a:xfrm>
-          <a:prstGeom prst="rect">
-            <a:avLst/>
-          </a:prstGeom>
-        </p:spPr>
-      </p:pic>
-      <p:sp>
-        <p:nvSpPr>
-          <p:cNvPr id="12" name="TextBox 11">
-            <a:extLst>
-              <a:ext uri="{FF2B5EF4-FFF2-40B4-BE49-F238E27FC236}">
-                <a16:creationId xmlns:a16="http://schemas.microsoft.com/office/drawing/2014/main" id="{A2760F8C-9A7E-E9E4-5A6C-103EF1DE38C5}"/>
-              </a:ext>
-            </a:extLst>
-          </p:cNvPr>
-          <p:cNvSpPr txBox="1"/>
-          <p:nvPr/>
-        </p:nvSpPr>
-        <p:spPr>
-          <a:xfrm>
-            <a:off x="3275084" y="495827"/>
-            <a:ext cx="4714369" cy="461665"/>
-          </a:xfrm>
-          <a:prstGeom prst="rect">
-            <a:avLst/>
-          </a:prstGeom>
-          <a:noFill/>
-        </p:spPr>
-        <p:txBody>
-          <a:bodyPr wrap="square" rtlCol="0">
-            <a:spAutoFit/>
-          </a:bodyPr>
-          <a:lstStyle/>
-          <a:p>
-            <a:r>
-              <a:rPr lang="en-US" sz="2400" dirty="0"/>
-              <a:t>Intra-process thermal asymmetry</a:t>
-            </a:r>
-          </a:p>
-        </p:txBody>
-      </p:sp>
-      <p:cxnSp>
-        <p:nvCxnSpPr>
-          <p:cNvPr id="14" name="Straight Connector 13">
-            <a:extLst>
-              <a:ext uri="{FF2B5EF4-FFF2-40B4-BE49-F238E27FC236}">
-                <a16:creationId xmlns:a16="http://schemas.microsoft.com/office/drawing/2014/main" id="{F5A1517A-9973-56FF-3FF9-7CD44E59B725}"/>
-              </a:ext>
-            </a:extLst>
-          </p:cNvPr>
-          <p:cNvCxnSpPr>
-            <a:cxnSpLocks/>
-          </p:cNvCxnSpPr>
-          <p:nvPr/>
-        </p:nvCxnSpPr>
-        <p:spPr>
-          <a:xfrm flipH="1">
-            <a:off x="8747006" y="4268880"/>
-            <a:ext cx="1" cy="1152000"/>
-          </a:xfrm>
-          <a:prstGeom prst="line">
-            <a:avLst/>
-          </a:prstGeom>
-          <a:ln w="28575">
-            <a:solidFill>
-              <a:srgbClr val="003D88"/>
-            </a:solidFill>
-            <a:prstDash val="lgDash"/>
-          </a:ln>
-        </p:spPr>
-        <p:style>
-          <a:lnRef idx="2">
-            <a:schemeClr val="accent1"/>
-          </a:lnRef>
-          <a:fillRef idx="0">
-            <a:schemeClr val="accent1"/>
-          </a:fillRef>
-          <a:effectRef idx="1">
-            <a:schemeClr val="accent1"/>
-          </a:effectRef>
-          <a:fontRef idx="minor">
-            <a:schemeClr val="tx1"/>
-          </a:fontRef>
-        </p:style>
-      </p:cxnSp>
-      <p:cxnSp>
-        <p:nvCxnSpPr>
-          <p:cNvPr id="21" name="Straight Connector 20">
-            <a:extLst>
-              <a:ext uri="{FF2B5EF4-FFF2-40B4-BE49-F238E27FC236}">
-                <a16:creationId xmlns:a16="http://schemas.microsoft.com/office/drawing/2014/main" id="{3DDF2D02-E59B-4F53-A400-DD3698874F46}"/>
-              </a:ext>
-            </a:extLst>
-          </p:cNvPr>
-          <p:cNvCxnSpPr>
-            <a:cxnSpLocks/>
-          </p:cNvCxnSpPr>
-          <p:nvPr/>
-        </p:nvCxnSpPr>
-        <p:spPr>
-          <a:xfrm>
-            <a:off x="9570739" y="3208833"/>
-            <a:ext cx="0" cy="2214000"/>
-          </a:xfrm>
-          <a:prstGeom prst="line">
-            <a:avLst/>
-          </a:prstGeom>
-          <a:ln w="28575">
-            <a:solidFill>
-              <a:srgbClr val="1D86EE"/>
-            </a:solidFill>
-            <a:prstDash val="lgDash"/>
-          </a:ln>
-        </p:spPr>
-        <p:style>
-          <a:lnRef idx="2">
-            <a:schemeClr val="accent1"/>
-          </a:lnRef>
-          <a:fillRef idx="0">
-            <a:schemeClr val="accent1"/>
-          </a:fillRef>
-          <a:effectRef idx="1">
-            <a:schemeClr val="accent1"/>
-          </a:effectRef>
-          <a:fontRef idx="minor">
-            <a:schemeClr val="tx1"/>
-          </a:fontRef>
-        </p:style>
-      </p:cxnSp>
-      <mc:AlternateContent xmlns:mc="http://schemas.openxmlformats.org/markup-compatibility/2006">
-        <mc:Choice xmlns:a14="http://schemas.microsoft.com/office/drawing/2010/main" Requires="a14">
-          <p:sp>
-            <p:nvSpPr>
-              <p:cNvPr id="23" name="TextBox 22">
-                <a:extLst>
-                  <a:ext uri="{FF2B5EF4-FFF2-40B4-BE49-F238E27FC236}">
-                    <a16:creationId xmlns:a16="http://schemas.microsoft.com/office/drawing/2014/main" id="{54FF724B-2E7B-DCD8-BBE5-E24A87E61FBD}"/>
-                  </a:ext>
-                </a:extLst>
-              </p:cNvPr>
-              <p:cNvSpPr txBox="1"/>
-              <p:nvPr/>
-            </p:nvSpPr>
-            <p:spPr>
-              <a:xfrm>
-                <a:off x="9395929" y="5417714"/>
-                <a:ext cx="545534" cy="428066"/>
-              </a:xfrm>
-              <a:prstGeom prst="rect">
-                <a:avLst/>
-              </a:prstGeom>
-              <a:noFill/>
-            </p:spPr>
-            <p:txBody>
-              <a:bodyPr wrap="square" rtlCol="0">
-                <a:spAutoFit/>
-              </a:bodyPr>
-              <a:lstStyle/>
-              <a:p>
-                <a14:m>
-                  <m:oMathPara xmlns:m="http://schemas.openxmlformats.org/officeDocument/2006/math">
-                    <m:oMathParaPr>
-                      <m:jc m:val="centerGroup"/>
-                    </m:oMathParaPr>
-                    <m:oMath xmlns:m="http://schemas.openxmlformats.org/officeDocument/2006/math">
-                      <m:sSub>
-                        <m:sSubPr>
-                          <m:ctrlPr>
-                            <a:rPr lang="en-US" sz="2000" smtClean="0">
-                              <a:latin typeface="Cambria Math" panose="02040503050406030204" pitchFamily="18" charset="0"/>
-                            </a:rPr>
-                          </m:ctrlPr>
-                        </m:sSubPr>
-                        <m:e>
-                          <m:r>
-                            <m:rPr>
-                              <m:sty m:val="p"/>
-                            </m:rPr>
-                            <a:rPr lang="en-CA" sz="2000" b="0" i="0" smtClean="0">
-                              <a:latin typeface="Cambria Math" panose="02040503050406030204" pitchFamily="18" charset="0"/>
-                            </a:rPr>
-                            <m:t>E</m:t>
-                          </m:r>
-                        </m:e>
-                        <m:sub>
-                          <m:sSub>
-                            <m:sSubPr>
-                              <m:ctrlPr>
-                                <a:rPr lang="en-US" sz="2000" smtClean="0">
-                                  <a:latin typeface="Cambria Math" panose="02040503050406030204" pitchFamily="18" charset="0"/>
-                                </a:rPr>
-                              </m:ctrlPr>
-                            </m:sSubPr>
-                            <m:e>
-                              <m:r>
-                                <m:rPr>
-                                  <m:sty m:val="p"/>
-                                </m:rPr>
-                                <a:rPr lang="en-CA" sz="2000" b="0" i="0" smtClean="0">
-                                  <a:latin typeface="Cambria Math" panose="02040503050406030204" pitchFamily="18" charset="0"/>
-                                </a:rPr>
-                                <m:t>r</m:t>
-                              </m:r>
-                            </m:e>
-                            <m:sub>
-                              <m:r>
-                                <m:rPr>
-                                  <m:sty m:val="p"/>
-                                </m:rPr>
-                                <a:rPr lang="en-CA" sz="2000" b="0" i="0" smtClean="0">
-                                  <a:latin typeface="Cambria Math" panose="02040503050406030204" pitchFamily="18" charset="0"/>
-                                </a:rPr>
-                                <m:t>a</m:t>
-                              </m:r>
-                            </m:sub>
-                          </m:sSub>
-                        </m:sub>
-                      </m:sSub>
-                    </m:oMath>
-                  </m:oMathPara>
-                </a14:m>
-                <a:endParaRPr lang="en-US" sz="2000" dirty="0"/>
-              </a:p>
-            </p:txBody>
-          </p:sp>
-        </mc:Choice>
-        <mc:Fallback>
-          <p:sp>
-            <p:nvSpPr>
-              <p:cNvPr id="23" name="TextBox 22">
-                <a:extLst>
-                  <a:ext uri="{FF2B5EF4-FFF2-40B4-BE49-F238E27FC236}">
-                    <a16:creationId xmlns:a16="http://schemas.microsoft.com/office/drawing/2014/main" id="{54FF724B-2E7B-DCD8-BBE5-E24A87E61FBD}"/>
-                  </a:ext>
-                </a:extLst>
-              </p:cNvPr>
-              <p:cNvSpPr txBox="1">
-                <a:spLocks noRot="1" noChangeAspect="1" noMove="1" noResize="1" noEditPoints="1" noAdjustHandles="1" noChangeArrowheads="1" noChangeShapeType="1" noTextEdit="1"/>
-              </p:cNvSpPr>
-              <p:nvPr/>
-            </p:nvSpPr>
-            <p:spPr>
-              <a:xfrm>
-                <a:off x="9395929" y="5417714"/>
-                <a:ext cx="545534" cy="428066"/>
-              </a:xfrm>
-              <a:prstGeom prst="rect">
-                <a:avLst/>
-              </a:prstGeom>
-              <a:blipFill>
-                <a:blip r:embed="rId11"/>
-                <a:stretch>
-                  <a:fillRect/>
-                </a:stretch>
-              </a:blipFill>
-            </p:spPr>
-            <p:txBody>
-              <a:bodyPr/>
-              <a:lstStyle/>
-              <a:p>
-                <a:r>
-                  <a:rPr lang="en-US">
-                    <a:noFill/>
-                  </a:rPr>
-                  <a:t> </a:t>
-                </a:r>
-              </a:p>
-            </p:txBody>
-          </p:sp>
-        </mc:Fallback>
-      </mc:AlternateContent>
-      <p:pic>
-        <p:nvPicPr>
-          <p:cNvPr id="30" name="Picture 29">
-            <a:extLst>
-              <a:ext uri="{FF2B5EF4-FFF2-40B4-BE49-F238E27FC236}">
-                <a16:creationId xmlns:a16="http://schemas.microsoft.com/office/drawing/2014/main" id="{C72D2F27-0D52-6574-AC7D-C209DA12D5FC}"/>
-              </a:ext>
-            </a:extLst>
-          </p:cNvPr>
-          <p:cNvPicPr>
-            <a:picLocks noChangeAspect="1"/>
-          </p:cNvPicPr>
-          <p:nvPr/>
-        </p:nvPicPr>
-        <p:blipFill>
-          <a:blip r:embed="rId12"/>
-          <a:stretch>
-            <a:fillRect/>
-          </a:stretch>
-        </p:blipFill>
-        <p:spPr>
-          <a:xfrm>
-            <a:off x="7828204" y="5909104"/>
-            <a:ext cx="3392228" cy="400109"/>
-          </a:xfrm>
-          <a:prstGeom prst="rect">
-            <a:avLst/>
-          </a:prstGeom>
-        </p:spPr>
-      </p:pic>
-      <p:sp>
-        <p:nvSpPr>
-          <p:cNvPr id="3" name="TextBox 2">
-            <a:extLst>
-              <a:ext uri="{FF2B5EF4-FFF2-40B4-BE49-F238E27FC236}">
-                <a16:creationId xmlns:a16="http://schemas.microsoft.com/office/drawing/2014/main" id="{637E0AAC-8364-A554-67B5-EC64216F8769}"/>
-              </a:ext>
-            </a:extLst>
-          </p:cNvPr>
-          <p:cNvSpPr txBox="1"/>
-          <p:nvPr/>
-        </p:nvSpPr>
-        <p:spPr>
-          <a:xfrm rot="16200000">
-            <a:off x="6130957" y="3142934"/>
-            <a:ext cx="1740726" cy="461665"/>
-          </a:xfrm>
-          <a:prstGeom prst="rect">
-            <a:avLst/>
-          </a:prstGeom>
-          <a:solidFill>
-            <a:schemeClr val="bg1"/>
-          </a:solidFill>
-        </p:spPr>
-        <p:txBody>
-          <a:bodyPr wrap="square" rtlCol="0">
-            <a:spAutoFit/>
-          </a:bodyPr>
-          <a:lstStyle/>
-          <a:p>
-            <a:r>
-              <a:rPr lang="en-US" sz="2400" dirty="0"/>
-              <a:t>Frequency</a:t>
-            </a:r>
-          </a:p>
-        </p:txBody>
-      </p:sp>
-      <p:sp>
-        <p:nvSpPr>
-          <p:cNvPr id="11" name="TextBox 10">
-            <a:extLst>
-              <a:ext uri="{FF2B5EF4-FFF2-40B4-BE49-F238E27FC236}">
-                <a16:creationId xmlns:a16="http://schemas.microsoft.com/office/drawing/2014/main" id="{8037FE87-2D89-41EF-6E73-600E625E1744}"/>
-              </a:ext>
-            </a:extLst>
-          </p:cNvPr>
-          <p:cNvSpPr txBox="1"/>
-          <p:nvPr/>
-        </p:nvSpPr>
-        <p:spPr>
-          <a:xfrm>
-            <a:off x="7699815" y="5868946"/>
-            <a:ext cx="3392227" cy="446276"/>
-          </a:xfrm>
-          <a:prstGeom prst="rect">
-            <a:avLst/>
-          </a:prstGeom>
-          <a:solidFill>
-            <a:schemeClr val="bg1"/>
-          </a:solidFill>
-        </p:spPr>
-        <p:txBody>
-          <a:bodyPr wrap="square" rtlCol="0">
-            <a:spAutoFit/>
-          </a:bodyPr>
-          <a:lstStyle/>
-          <a:p>
-            <a:pPr algn="ctr"/>
-            <a:r>
-              <a:rPr lang="en-US" sz="2300" dirty="0"/>
-              <a:t>Temperature Sensitivity</a:t>
-            </a:r>
-          </a:p>
-        </p:txBody>
-      </p:sp>
-      <mc:AlternateContent xmlns:mc="http://schemas.openxmlformats.org/markup-compatibility/2006">
-        <mc:Choice xmlns:a14="http://schemas.microsoft.com/office/drawing/2010/main" Requires="a14">
-          <p:sp>
-            <p:nvSpPr>
-              <p:cNvPr id="15" name="TextBox 14">
-                <a:extLst>
-                  <a:ext uri="{FF2B5EF4-FFF2-40B4-BE49-F238E27FC236}">
-                    <a16:creationId xmlns:a16="http://schemas.microsoft.com/office/drawing/2014/main" id="{3F684A82-1614-F08A-8B20-1B9D115E23DB}"/>
-                  </a:ext>
-                </a:extLst>
-              </p:cNvPr>
-              <p:cNvSpPr txBox="1"/>
-              <p:nvPr/>
-            </p:nvSpPr>
-            <p:spPr>
-              <a:xfrm>
-                <a:off x="8567551" y="5421178"/>
-                <a:ext cx="545534" cy="438518"/>
-              </a:xfrm>
-              <a:prstGeom prst="rect">
-                <a:avLst/>
-              </a:prstGeom>
-              <a:noFill/>
-            </p:spPr>
-            <p:txBody>
-              <a:bodyPr wrap="square" rtlCol="0">
-                <a:spAutoFit/>
-              </a:bodyPr>
-              <a:lstStyle/>
-              <a:p>
-                <a14:m>
-                  <m:oMathPara xmlns:m="http://schemas.openxmlformats.org/officeDocument/2006/math">
-                    <m:oMathParaPr>
-                      <m:jc m:val="centerGroup"/>
-                    </m:oMathParaPr>
-                    <m:oMath xmlns:m="http://schemas.openxmlformats.org/officeDocument/2006/math">
-                      <m:sSub>
-                        <m:sSubPr>
-                          <m:ctrlPr>
-                            <a:rPr lang="en-US" sz="2000" smtClean="0">
-                              <a:latin typeface="Cambria Math" panose="02040503050406030204" pitchFamily="18" charset="0"/>
-                            </a:rPr>
-                          </m:ctrlPr>
-                        </m:sSubPr>
-                        <m:e>
-                          <m:r>
-                            <m:rPr>
-                              <m:sty m:val="p"/>
-                            </m:rPr>
-                            <a:rPr lang="en-CA" sz="2000" b="0" i="0" smtClean="0">
-                              <a:latin typeface="Cambria Math" panose="02040503050406030204" pitchFamily="18" charset="0"/>
-                            </a:rPr>
-                            <m:t>E</m:t>
-                          </m:r>
-                        </m:e>
-                        <m:sub>
-                          <m:sSub>
-                            <m:sSubPr>
-                              <m:ctrlPr>
-                                <a:rPr lang="en-US" sz="2000" smtClean="0">
-                                  <a:latin typeface="Cambria Math" panose="02040503050406030204" pitchFamily="18" charset="0"/>
-                                </a:rPr>
-                              </m:ctrlPr>
-                            </m:sSubPr>
-                            <m:e>
-                              <m:r>
-                                <m:rPr>
-                                  <m:sty m:val="p"/>
-                                </m:rPr>
-                                <a:rPr lang="en-CA" sz="2000" b="0" i="0" smtClean="0">
-                                  <a:latin typeface="Cambria Math" panose="02040503050406030204" pitchFamily="18" charset="0"/>
-                                </a:rPr>
-                                <m:t>r</m:t>
-                              </m:r>
-                            </m:e>
-                            <m:sub>
-                              <m:r>
-                                <m:rPr>
-                                  <m:sty m:val="p"/>
-                                </m:rPr>
-                                <a:rPr lang="en-CA" sz="2000" b="0" i="0" smtClean="0">
-                                  <a:latin typeface="Cambria Math" panose="02040503050406030204" pitchFamily="18" charset="0"/>
-                                </a:rPr>
-                                <m:t>b</m:t>
-                              </m:r>
-                            </m:sub>
-                          </m:sSub>
-                        </m:sub>
-                      </m:sSub>
-                    </m:oMath>
-                  </m:oMathPara>
-                </a14:m>
-                <a:endParaRPr lang="en-US" sz="2000" dirty="0"/>
-              </a:p>
-            </p:txBody>
-          </p:sp>
-        </mc:Choice>
-        <mc:Fallback>
-          <p:sp>
-            <p:nvSpPr>
-              <p:cNvPr id="15" name="TextBox 14">
-                <a:extLst>
-                  <a:ext uri="{FF2B5EF4-FFF2-40B4-BE49-F238E27FC236}">
-                    <a16:creationId xmlns:a16="http://schemas.microsoft.com/office/drawing/2014/main" id="{3F684A82-1614-F08A-8B20-1B9D115E23DB}"/>
-                  </a:ext>
-                </a:extLst>
-              </p:cNvPr>
-              <p:cNvSpPr txBox="1">
-                <a:spLocks noRot="1" noChangeAspect="1" noMove="1" noResize="1" noEditPoints="1" noAdjustHandles="1" noChangeArrowheads="1" noChangeShapeType="1" noTextEdit="1"/>
-              </p:cNvSpPr>
-              <p:nvPr/>
-            </p:nvSpPr>
-            <p:spPr>
-              <a:xfrm>
-                <a:off x="8567551" y="5421178"/>
-                <a:ext cx="545534" cy="438518"/>
-              </a:xfrm>
-              <a:prstGeom prst="rect">
-                <a:avLst/>
-              </a:prstGeom>
-              <a:blipFill>
-                <a:blip r:embed="rId13"/>
-                <a:stretch>
-                  <a:fillRect/>
-                </a:stretch>
-              </a:blipFill>
-            </p:spPr>
-            <p:txBody>
-              <a:bodyPr/>
-              <a:lstStyle/>
-              <a:p>
-                <a:r>
-                  <a:rPr lang="en-US">
-                    <a:noFill/>
-                  </a:rPr>
-                  <a:t> </a:t>
-                </a:r>
-              </a:p>
-            </p:txBody>
-          </p:sp>
-        </mc:Fallback>
-      </mc:AlternateContent>
-    </p:spTree>
-    <p:extLst>
-      <p:ext uri="{BB962C8B-B14F-4D97-AF65-F5344CB8AC3E}">
-        <p14:creationId xmlns:p14="http://schemas.microsoft.com/office/powerpoint/2010/main" val="3671380772"/>
-      </p:ext>
-    </p:extLst>
-  </p:cSld>
-  <p:clrMapOvr>
-    <a:masterClrMapping/>
-  </p:clrMapOvr>
-</p:sld>
-</file>
-
-<file path=ppt/slides/slide7.xml><?xml version="1.0" encoding="utf-8"?>
-<p:sld xmlns:a="http://schemas.openxmlformats.org/drawingml/2006/main" xmlns:r="http://schemas.openxmlformats.org/officeDocument/2006/relationships" xmlns:p="http://schemas.openxmlformats.org/presentationml/2006/main">
-  <p:cSld>
-    <p:spTree>
-      <p:nvGrpSpPr>
-        <p:cNvPr id="1" name=""/>
-        <p:cNvGrpSpPr/>
-        <p:nvPr/>
-      </p:nvGrpSpPr>
-      <p:grpSpPr>
-        <a:xfrm>
-          <a:off x="0" y="0"/>
-          <a:ext cx="0" cy="0"/>
-          <a:chOff x="0" y="0"/>
-          <a:chExt cx="0" cy="0"/>
-        </a:xfrm>
-      </p:grpSpPr>
-      <p:pic>
-        <p:nvPicPr>
-          <p:cNvPr id="5" name="Picture 4">
-            <a:extLst>
-              <a:ext uri="{FF2B5EF4-FFF2-40B4-BE49-F238E27FC236}">
-                <a16:creationId xmlns:a16="http://schemas.microsoft.com/office/drawing/2014/main" id="{9F42E330-4C9C-5FF7-86F1-1FFE0DCAE1DF}"/>
-              </a:ext>
-            </a:extLst>
-          </p:cNvPr>
-          <p:cNvPicPr>
-            <a:picLocks noChangeAspect="1"/>
-          </p:cNvPicPr>
-          <p:nvPr/>
-        </p:nvPicPr>
-        <p:blipFill>
-          <a:blip r:embed="rId2"/>
-          <a:srcRect l="2125" r="2125"/>
-          <a:stretch/>
-        </p:blipFill>
-        <p:spPr>
-          <a:xfrm>
-            <a:off x="157163" y="1499919"/>
-            <a:ext cx="4411971" cy="3512280"/>
-          </a:xfrm>
-          <a:prstGeom prst="rect">
-            <a:avLst/>
-          </a:prstGeom>
-        </p:spPr>
-      </p:pic>
-      <p:pic>
-        <p:nvPicPr>
-          <p:cNvPr id="6" name="Picture 5">
-            <a:extLst>
-              <a:ext uri="{FF2B5EF4-FFF2-40B4-BE49-F238E27FC236}">
-                <a16:creationId xmlns:a16="http://schemas.microsoft.com/office/drawing/2014/main" id="{58DF6D50-0003-9D90-89CD-A7A95C592D66}"/>
-              </a:ext>
-            </a:extLst>
-          </p:cNvPr>
-          <p:cNvPicPr>
-            <a:picLocks noChangeAspect="1"/>
-          </p:cNvPicPr>
-          <p:nvPr/>
-        </p:nvPicPr>
-        <p:blipFill>
-          <a:blip r:embed="rId3"/>
-          <a:srcRect l="3388" r="3388"/>
-          <a:stretch/>
-        </p:blipFill>
-        <p:spPr>
-          <a:xfrm>
-            <a:off x="8512563" y="1604328"/>
-            <a:ext cx="3397539" cy="3604280"/>
-          </a:xfrm>
-          <a:prstGeom prst="rect">
-            <a:avLst/>
-          </a:prstGeom>
-        </p:spPr>
-      </p:pic>
-      <p:sp>
-        <p:nvSpPr>
-          <p:cNvPr id="7" name="TextBox 6">
-            <a:extLst>
-              <a:ext uri="{FF2B5EF4-FFF2-40B4-BE49-F238E27FC236}">
-                <a16:creationId xmlns:a16="http://schemas.microsoft.com/office/drawing/2014/main" id="{4F2FEA2F-D331-4DDD-9F3C-D7F39F3D33E2}"/>
-              </a:ext>
-            </a:extLst>
-          </p:cNvPr>
-          <p:cNvSpPr txBox="1"/>
-          <p:nvPr/>
-        </p:nvSpPr>
-        <p:spPr>
-          <a:xfrm>
-            <a:off x="3275084" y="495827"/>
-            <a:ext cx="4714369" cy="461665"/>
-          </a:xfrm>
-          <a:prstGeom prst="rect">
-            <a:avLst/>
-          </a:prstGeom>
-          <a:noFill/>
-        </p:spPr>
-        <p:txBody>
-          <a:bodyPr wrap="square" rtlCol="0">
-            <a:spAutoFit/>
-          </a:bodyPr>
-          <a:lstStyle/>
-          <a:p>
-            <a:r>
-              <a:rPr lang="en-US" sz="2400" dirty="0"/>
-              <a:t>Intra-process thermal asymmetry</a:t>
-            </a:r>
-          </a:p>
-        </p:txBody>
-      </p:sp>
-      <p:pic>
-        <p:nvPicPr>
-          <p:cNvPr id="9" name="Picture 8">
-            <a:extLst>
-              <a:ext uri="{FF2B5EF4-FFF2-40B4-BE49-F238E27FC236}">
-                <a16:creationId xmlns:a16="http://schemas.microsoft.com/office/drawing/2014/main" id="{9B1CBAB2-8000-6026-E623-397D34194199}"/>
-              </a:ext>
-            </a:extLst>
-          </p:cNvPr>
-          <p:cNvPicPr>
-            <a:picLocks noChangeAspect="1"/>
-          </p:cNvPicPr>
-          <p:nvPr/>
-        </p:nvPicPr>
-        <p:blipFill>
-          <a:blip r:embed="rId4"/>
-          <a:srcRect t="6370"/>
-          <a:stretch/>
-        </p:blipFill>
-        <p:spPr>
-          <a:xfrm>
-            <a:off x="4820059" y="1762735"/>
-            <a:ext cx="3326673" cy="3114762"/>
-          </a:xfrm>
-          <a:prstGeom prst="rect">
-            <a:avLst/>
-          </a:prstGeom>
-        </p:spPr>
-      </p:pic>
-      <p:pic>
-        <p:nvPicPr>
-          <p:cNvPr id="10" name="Picture 9" descr="A black text on a white background&#10;&#10;AI-generated content may be incorrect.">
-            <a:extLst>
-              <a:ext uri="{FF2B5EF4-FFF2-40B4-BE49-F238E27FC236}">
-                <a16:creationId xmlns:a16="http://schemas.microsoft.com/office/drawing/2014/main" id="{E2EBAB9A-D4FC-0920-24BD-F9303FDA029E}"/>
-              </a:ext>
-            </a:extLst>
-          </p:cNvPr>
-          <p:cNvPicPr>
-            <a:picLocks noChangeAspect="1"/>
-          </p:cNvPicPr>
-          <p:nvPr/>
-        </p:nvPicPr>
-        <p:blipFill>
-          <a:blip r:embed="rId5"/>
-          <a:stretch>
-            <a:fillRect/>
-          </a:stretch>
-        </p:blipFill>
-        <p:spPr>
-          <a:xfrm>
-            <a:off x="5693230" y="4574870"/>
-            <a:ext cx="1837507" cy="381559"/>
-          </a:xfrm>
-          <a:prstGeom prst="rect">
-            <a:avLst/>
-          </a:prstGeom>
-        </p:spPr>
-      </p:pic>
-      <p:pic>
-        <p:nvPicPr>
-          <p:cNvPr id="11" name="Picture 10" descr="A black text on a white background&#10;&#10;AI-generated content may be incorrect.">
-            <a:extLst>
-              <a:ext uri="{FF2B5EF4-FFF2-40B4-BE49-F238E27FC236}">
-                <a16:creationId xmlns:a16="http://schemas.microsoft.com/office/drawing/2014/main" id="{FD02FED3-3C58-38B1-8351-EDF409388ED2}"/>
-              </a:ext>
-            </a:extLst>
-          </p:cNvPr>
-          <p:cNvPicPr>
-            <a:picLocks noChangeAspect="1"/>
-          </p:cNvPicPr>
-          <p:nvPr/>
-        </p:nvPicPr>
-        <p:blipFill>
-          <a:blip r:embed="rId6"/>
-          <a:stretch>
-            <a:fillRect/>
-          </a:stretch>
-        </p:blipFill>
-        <p:spPr>
-          <a:xfrm>
-            <a:off x="4634047" y="2640648"/>
-            <a:ext cx="457201" cy="1016001"/>
-          </a:xfrm>
-          <a:prstGeom prst="rect">
-            <a:avLst/>
-          </a:prstGeom>
-        </p:spPr>
-      </p:pic>
-      <p:sp>
-        <p:nvSpPr>
-          <p:cNvPr id="15" name="TextBox 14">
-            <a:extLst>
-              <a:ext uri="{FF2B5EF4-FFF2-40B4-BE49-F238E27FC236}">
-                <a16:creationId xmlns:a16="http://schemas.microsoft.com/office/drawing/2014/main" id="{1599232C-7A1F-1F48-9E21-76F0536605E3}"/>
-              </a:ext>
-            </a:extLst>
-          </p:cNvPr>
-          <p:cNvSpPr txBox="1"/>
-          <p:nvPr/>
-        </p:nvSpPr>
-        <p:spPr>
-          <a:xfrm>
-            <a:off x="5156160" y="3196046"/>
-            <a:ext cx="415833" cy="307777"/>
-          </a:xfrm>
-          <a:prstGeom prst="rect">
-            <a:avLst/>
-          </a:prstGeom>
-          <a:noFill/>
-        </p:spPr>
-        <p:txBody>
-          <a:bodyPr wrap="square" rtlCol="0">
-            <a:spAutoFit/>
-          </a:bodyPr>
-          <a:lstStyle/>
-          <a:p>
-            <a:r>
-              <a:rPr lang="en-US" sz="1400" dirty="0"/>
-              <a:t>r</a:t>
-            </a:r>
-            <a:r>
-              <a:rPr lang="en-US" sz="1400" baseline="-25000" dirty="0"/>
-              <a:t>b</a:t>
-            </a:r>
-            <a:endParaRPr lang="en-US" sz="1400" dirty="0"/>
-          </a:p>
-        </p:txBody>
-      </p:sp>
-      <p:sp>
-        <p:nvSpPr>
-          <p:cNvPr id="16" name="TextBox 15">
-            <a:extLst>
-              <a:ext uri="{FF2B5EF4-FFF2-40B4-BE49-F238E27FC236}">
-                <a16:creationId xmlns:a16="http://schemas.microsoft.com/office/drawing/2014/main" id="{44FDFD56-88C1-C84C-D01F-B85EA5FD2B15}"/>
-              </a:ext>
-            </a:extLst>
-          </p:cNvPr>
-          <p:cNvSpPr txBox="1"/>
-          <p:nvPr/>
-        </p:nvSpPr>
-        <p:spPr>
-          <a:xfrm>
-            <a:off x="5171209" y="3760860"/>
-            <a:ext cx="415833" cy="307777"/>
-          </a:xfrm>
-          <a:prstGeom prst="rect">
-            <a:avLst/>
-          </a:prstGeom>
-          <a:noFill/>
-        </p:spPr>
-        <p:txBody>
-          <a:bodyPr wrap="square" rtlCol="0">
-            <a:spAutoFit/>
-          </a:bodyPr>
-          <a:lstStyle/>
-          <a:p>
-            <a:r>
-              <a:rPr lang="en-US" sz="1400" dirty="0"/>
-              <a:t>r</a:t>
-            </a:r>
-            <a:r>
-              <a:rPr lang="en-US" sz="1400" baseline="-25000" dirty="0"/>
-              <a:t>a</a:t>
-            </a:r>
-            <a:endParaRPr lang="en-US" sz="1400" dirty="0"/>
-          </a:p>
-        </p:txBody>
-      </p:sp>
-      <p:cxnSp>
-        <p:nvCxnSpPr>
-          <p:cNvPr id="18" name="Straight Arrow Connector 17">
-            <a:extLst>
-              <a:ext uri="{FF2B5EF4-FFF2-40B4-BE49-F238E27FC236}">
-                <a16:creationId xmlns:a16="http://schemas.microsoft.com/office/drawing/2014/main" id="{54980B91-232E-AE50-0E9D-6C2CA3A2C392}"/>
-              </a:ext>
-            </a:extLst>
-          </p:cNvPr>
-          <p:cNvCxnSpPr>
-            <a:cxnSpLocks/>
-          </p:cNvCxnSpPr>
-          <p:nvPr/>
-        </p:nvCxnSpPr>
-        <p:spPr>
-          <a:xfrm flipV="1">
-            <a:off x="5670462" y="3328607"/>
-            <a:ext cx="502824" cy="328042"/>
-          </a:xfrm>
-          <a:prstGeom prst="straightConnector1">
-            <a:avLst/>
-          </a:prstGeom>
-          <a:ln>
-            <a:solidFill>
-              <a:srgbClr val="1D86EE"/>
-            </a:solidFill>
-            <a:tailEnd type="triangle"/>
-          </a:ln>
-        </p:spPr>
-        <p:style>
-          <a:lnRef idx="2">
-            <a:schemeClr val="accent1"/>
-          </a:lnRef>
-          <a:fillRef idx="0">
-            <a:schemeClr val="accent1"/>
-          </a:fillRef>
-          <a:effectRef idx="1">
-            <a:schemeClr val="accent1"/>
-          </a:effectRef>
-          <a:fontRef idx="minor">
-            <a:schemeClr val="tx1"/>
-          </a:fontRef>
-        </p:style>
-      </p:cxnSp>
-      <mc:AlternateContent xmlns:mc="http://schemas.openxmlformats.org/markup-compatibility/2006">
-        <mc:Choice xmlns:a14="http://schemas.microsoft.com/office/drawing/2010/main" Requires="a14">
-          <p:sp>
-            <p:nvSpPr>
-              <p:cNvPr id="19" name="TextBox 18">
-                <a:extLst>
-                  <a:ext uri="{FF2B5EF4-FFF2-40B4-BE49-F238E27FC236}">
-                    <a16:creationId xmlns:a16="http://schemas.microsoft.com/office/drawing/2014/main" id="{6D07C209-1B60-0389-353E-3AC7CA0959B8}"/>
-                  </a:ext>
-                </a:extLst>
-              </p:cNvPr>
-              <p:cNvSpPr txBox="1"/>
-              <p:nvPr/>
-            </p:nvSpPr>
-            <p:spPr>
-              <a:xfrm>
-                <a:off x="5801885" y="3492628"/>
-                <a:ext cx="588229" cy="300210"/>
-              </a:xfrm>
-              <a:prstGeom prst="rect">
-                <a:avLst/>
-              </a:prstGeom>
-              <a:noFill/>
-            </p:spPr>
-            <p:txBody>
-              <a:bodyPr wrap="square" rtlCol="0">
-                <a:spAutoFit/>
-              </a:bodyPr>
-              <a:lstStyle/>
-              <a:p>
-                <a14:m>
-                  <m:oMathPara xmlns:m="http://schemas.openxmlformats.org/officeDocument/2006/math">
-                    <m:oMathParaPr>
-                      <m:jc m:val="centerGroup"/>
-                    </m:oMathParaPr>
-                    <m:oMath xmlns:m="http://schemas.openxmlformats.org/officeDocument/2006/math">
-                      <m:sSub>
-                        <m:sSubPr>
-                          <m:ctrlPr>
-                            <a:rPr lang="en-US" sz="1200" smtClean="0">
-                              <a:latin typeface="Cambria Math" panose="02040503050406030204" pitchFamily="18" charset="0"/>
-                            </a:rPr>
-                          </m:ctrlPr>
-                        </m:sSubPr>
-                        <m:e>
-                          <m:r>
-                            <m:rPr>
-                              <m:sty m:val="p"/>
-                            </m:rPr>
-                            <a:rPr lang="en-CA" sz="1200" b="0" i="0" smtClean="0">
-                              <a:latin typeface="Cambria Math" panose="02040503050406030204" pitchFamily="18" charset="0"/>
-                            </a:rPr>
-                            <m:t>E</m:t>
-                          </m:r>
-                        </m:e>
-                        <m:sub>
-                          <m:sSub>
-                            <m:sSubPr>
-                              <m:ctrlPr>
-                                <a:rPr lang="en-US" sz="1200" smtClean="0">
-                                  <a:latin typeface="Cambria Math" panose="02040503050406030204" pitchFamily="18" charset="0"/>
-                                </a:rPr>
-                              </m:ctrlPr>
-                            </m:sSubPr>
-                            <m:e>
-                              <m:r>
-                                <m:rPr>
-                                  <m:sty m:val="p"/>
-                                </m:rPr>
-                                <a:rPr lang="en-CA" sz="1200" b="0" i="0" smtClean="0">
-                                  <a:latin typeface="Cambria Math" panose="02040503050406030204" pitchFamily="18" charset="0"/>
-                                </a:rPr>
-                                <m:t>r</m:t>
-                              </m:r>
-                            </m:e>
-                            <m:sub>
-                              <m:r>
-                                <m:rPr>
-                                  <m:sty m:val="p"/>
-                                </m:rPr>
-                                <a:rPr lang="en-CA" sz="1200" b="0" i="0" smtClean="0">
-                                  <a:latin typeface="Cambria Math" panose="02040503050406030204" pitchFamily="18" charset="0"/>
-                                </a:rPr>
-                                <m:t>a</m:t>
-                              </m:r>
-                            </m:sub>
-                          </m:sSub>
-                        </m:sub>
-                      </m:sSub>
-                    </m:oMath>
-                  </m:oMathPara>
-                </a14:m>
-                <a:endParaRPr lang="en-US" sz="1200" dirty="0"/>
-              </a:p>
-            </p:txBody>
-          </p:sp>
-        </mc:Choice>
-        <mc:Fallback>
-          <p:sp>
-            <p:nvSpPr>
-              <p:cNvPr id="19" name="TextBox 18">
-                <a:extLst>
-                  <a:ext uri="{FF2B5EF4-FFF2-40B4-BE49-F238E27FC236}">
-                    <a16:creationId xmlns:a16="http://schemas.microsoft.com/office/drawing/2014/main" id="{6D07C209-1B60-0389-353E-3AC7CA0959B8}"/>
-                  </a:ext>
-                </a:extLst>
-              </p:cNvPr>
-              <p:cNvSpPr txBox="1">
-                <a:spLocks noRot="1" noChangeAspect="1" noMove="1" noResize="1" noEditPoints="1" noAdjustHandles="1" noChangeArrowheads="1" noChangeShapeType="1" noTextEdit="1"/>
-              </p:cNvSpPr>
-              <p:nvPr/>
-            </p:nvSpPr>
-            <p:spPr>
-              <a:xfrm>
-                <a:off x="5801885" y="3492628"/>
-                <a:ext cx="588229" cy="300210"/>
-              </a:xfrm>
-              <a:prstGeom prst="rect">
-                <a:avLst/>
-              </a:prstGeom>
-              <a:blipFill>
-                <a:blip r:embed="rId7"/>
-                <a:stretch>
-                  <a:fillRect/>
-                </a:stretch>
-              </a:blipFill>
-            </p:spPr>
-            <p:txBody>
-              <a:bodyPr/>
-              <a:lstStyle/>
-              <a:p>
-                <a:r>
-                  <a:rPr lang="en-US">
-                    <a:noFill/>
-                  </a:rPr>
-                  <a:t> </a:t>
-                </a:r>
-              </a:p>
-            </p:txBody>
-          </p:sp>
-        </mc:Fallback>
-      </mc:AlternateContent>
-      <p:cxnSp>
-        <p:nvCxnSpPr>
-          <p:cNvPr id="21" name="Straight Arrow Connector 20">
-            <a:extLst>
-              <a:ext uri="{FF2B5EF4-FFF2-40B4-BE49-F238E27FC236}">
-                <a16:creationId xmlns:a16="http://schemas.microsoft.com/office/drawing/2014/main" id="{01E19F28-2AFC-D3BD-997D-F851A5AB766C}"/>
-              </a:ext>
-            </a:extLst>
-          </p:cNvPr>
-          <p:cNvCxnSpPr>
-            <a:cxnSpLocks/>
-          </p:cNvCxnSpPr>
-          <p:nvPr/>
-        </p:nvCxnSpPr>
-        <p:spPr>
-          <a:xfrm flipV="1">
-            <a:off x="5647343" y="3003468"/>
-            <a:ext cx="588229" cy="268383"/>
-          </a:xfrm>
-          <a:prstGeom prst="straightConnector1">
-            <a:avLst/>
-          </a:prstGeom>
-          <a:ln>
-            <a:solidFill>
-              <a:srgbClr val="003D88"/>
-            </a:solidFill>
-            <a:tailEnd type="triangle"/>
-          </a:ln>
-        </p:spPr>
-        <p:style>
-          <a:lnRef idx="2">
-            <a:schemeClr val="accent1"/>
-          </a:lnRef>
-          <a:fillRef idx="0">
-            <a:schemeClr val="accent1"/>
-          </a:fillRef>
-          <a:effectRef idx="1">
-            <a:schemeClr val="accent1"/>
-          </a:effectRef>
-          <a:fontRef idx="minor">
-            <a:schemeClr val="tx1"/>
-          </a:fontRef>
-        </p:style>
-      </p:cxnSp>
-      <mc:AlternateContent xmlns:mc="http://schemas.openxmlformats.org/markup-compatibility/2006">
-        <mc:Choice xmlns:a14="http://schemas.microsoft.com/office/drawing/2010/main" Requires="a14">
-          <p:sp>
-            <p:nvSpPr>
-              <p:cNvPr id="23" name="TextBox 22">
-                <a:extLst>
-                  <a:ext uri="{FF2B5EF4-FFF2-40B4-BE49-F238E27FC236}">
-                    <a16:creationId xmlns:a16="http://schemas.microsoft.com/office/drawing/2014/main" id="{3A951EE5-37DC-DEB2-A846-F3F39C5E38C3}"/>
-                  </a:ext>
-                </a:extLst>
-              </p:cNvPr>
-              <p:cNvSpPr txBox="1"/>
-              <p:nvPr/>
-            </p:nvSpPr>
-            <p:spPr>
-              <a:xfrm>
-                <a:off x="5571993" y="2837449"/>
-                <a:ext cx="588229" cy="300210"/>
-              </a:xfrm>
-              <a:prstGeom prst="rect">
-                <a:avLst/>
-              </a:prstGeom>
-              <a:noFill/>
-            </p:spPr>
-            <p:txBody>
-              <a:bodyPr wrap="square" rtlCol="0">
-                <a:spAutoFit/>
-              </a:bodyPr>
-              <a:lstStyle/>
-              <a:p>
+                <a:pPr/>
                 <a14:m>
                   <m:oMathPara xmlns:m="http://schemas.openxmlformats.org/officeDocument/2006/math">
                     <m:oMathParaPr>
@@ -10117,7 +7848,4311 @@
             </p:txBody>
           </p:sp>
         </mc:Choice>
+        <mc:Fallback xmlns="">
+          <p:sp>
+            <p:nvSpPr>
+              <p:cNvPr id="2" name="TextBox 1">
+                <a:extLst>
+                  <a:ext uri="{FF2B5EF4-FFF2-40B4-BE49-F238E27FC236}">
+                    <a16:creationId xmlns:a16="http://schemas.microsoft.com/office/drawing/2014/main" id="{5A06FF18-EDCF-E4BB-F020-03B39CE6EFB1}"/>
+                  </a:ext>
+                </a:extLst>
+              </p:cNvPr>
+              <p:cNvSpPr txBox="1">
+                <a:spLocks noRot="1" noChangeAspect="1" noMove="1" noResize="1" noEditPoints="1" noAdjustHandles="1" noChangeArrowheads="1" noChangeShapeType="1" noTextEdit="1"/>
+              </p:cNvSpPr>
+              <p:nvPr/>
+            </p:nvSpPr>
+            <p:spPr>
+              <a:xfrm>
+                <a:off x="5344224" y="2944027"/>
+                <a:ext cx="545534" cy="294376"/>
+              </a:xfrm>
+              <a:prstGeom prst="rect">
+                <a:avLst/>
+              </a:prstGeom>
+              <a:blipFill>
+                <a:blip r:embed="rId8"/>
+                <a:stretch>
+                  <a:fillRect/>
+                </a:stretch>
+              </a:blipFill>
+            </p:spPr>
+            <p:txBody>
+              <a:bodyPr/>
+              <a:lstStyle/>
+              <a:p>
+                <a:r>
+                  <a:rPr lang="en-US">
+                    <a:noFill/>
+                  </a:rPr>
+                  <a:t> </a:t>
+                </a:r>
+              </a:p>
+            </p:txBody>
+          </p:sp>
+        </mc:Fallback>
+      </mc:AlternateContent>
+      <mc:AlternateContent xmlns:mc="http://schemas.openxmlformats.org/markup-compatibility/2006" xmlns:a14="http://schemas.microsoft.com/office/drawing/2010/main">
+        <mc:Choice Requires="a14">
+          <p:sp>
+            <p:nvSpPr>
+              <p:cNvPr id="4" name="TextBox 3">
+                <a:extLst>
+                  <a:ext uri="{FF2B5EF4-FFF2-40B4-BE49-F238E27FC236}">
+                    <a16:creationId xmlns:a16="http://schemas.microsoft.com/office/drawing/2014/main" id="{CB42D2F0-1B73-44A8-75F8-1EE4D7468F68}"/>
+                  </a:ext>
+                </a:extLst>
+              </p:cNvPr>
+              <p:cNvSpPr txBox="1"/>
+              <p:nvPr/>
+            </p:nvSpPr>
+            <p:spPr>
+              <a:xfrm>
+                <a:off x="5719224" y="3618821"/>
+                <a:ext cx="545534" cy="294376"/>
+              </a:xfrm>
+              <a:prstGeom prst="rect">
+                <a:avLst/>
+              </a:prstGeom>
+              <a:noFill/>
+            </p:spPr>
+            <p:txBody>
+              <a:bodyPr wrap="square" rtlCol="0">
+                <a:spAutoFit/>
+              </a:bodyPr>
+              <a:lstStyle/>
+              <a:p>
+                <a:pPr/>
+                <a14:m>
+                  <m:oMathPara xmlns:m="http://schemas.openxmlformats.org/officeDocument/2006/math">
+                    <m:oMathParaPr>
+                      <m:jc m:val="centerGroup"/>
+                    </m:oMathParaPr>
+                    <m:oMath xmlns:m="http://schemas.openxmlformats.org/officeDocument/2006/math">
+                      <m:sSub>
+                        <m:sSubPr>
+                          <m:ctrlPr>
+                            <a:rPr lang="en-US" sz="1200" i="1" smtClean="0">
+                              <a:latin typeface="Cambria Math" panose="02040503050406030204" pitchFamily="18" charset="0"/>
+                            </a:rPr>
+                          </m:ctrlPr>
+                        </m:sSubPr>
+                        <m:e>
+                          <m:r>
+                            <m:rPr>
+                              <m:sty m:val="p"/>
+                            </m:rPr>
+                            <a:rPr lang="en-CA" sz="1200" b="0" i="0" smtClean="0">
+                              <a:latin typeface="Cambria Math" panose="02040503050406030204" pitchFamily="18" charset="0"/>
+                            </a:rPr>
+                            <m:t>E</m:t>
+                          </m:r>
+                        </m:e>
+                        <m:sub>
+                          <m:sSub>
+                            <m:sSubPr>
+                              <m:ctrlPr>
+                                <a:rPr lang="en-US" sz="1200" i="1" smtClean="0">
+                                  <a:latin typeface="Cambria Math" panose="02040503050406030204" pitchFamily="18" charset="0"/>
+                                </a:rPr>
+                              </m:ctrlPr>
+                            </m:sSubPr>
+                            <m:e>
+                              <m:r>
+                                <m:rPr>
+                                  <m:sty m:val="p"/>
+                                </m:rPr>
+                                <a:rPr lang="en-CA" sz="1200" b="0" i="0" smtClean="0">
+                                  <a:latin typeface="Cambria Math" panose="02040503050406030204" pitchFamily="18" charset="0"/>
+                                </a:rPr>
+                                <m:t>c</m:t>
+                              </m:r>
+                              <m:r>
+                                <a:rPr lang="en-CA" sz="1200" b="0" i="0" smtClean="0">
+                                  <a:latin typeface="Cambria Math" panose="02040503050406030204" pitchFamily="18" charset="0"/>
+                                </a:rPr>
+                                <m:t>2</m:t>
+                              </m:r>
+                            </m:e>
+                            <m:sub>
+                              <m:r>
+                                <m:rPr>
+                                  <m:sty m:val="p"/>
+                                </m:rPr>
+                                <a:rPr lang="en-CA" sz="1200" b="0" i="0" smtClean="0">
+                                  <a:latin typeface="Cambria Math" panose="02040503050406030204" pitchFamily="18" charset="0"/>
+                                </a:rPr>
+                                <m:t>b</m:t>
+                              </m:r>
+                            </m:sub>
+                          </m:sSub>
+                        </m:sub>
+                      </m:sSub>
+                    </m:oMath>
+                  </m:oMathPara>
+                </a14:m>
+                <a:endParaRPr lang="en-US" sz="1200" dirty="0"/>
+              </a:p>
+            </p:txBody>
+          </p:sp>
+        </mc:Choice>
+        <mc:Fallback xmlns="">
+          <p:sp>
+            <p:nvSpPr>
+              <p:cNvPr id="4" name="TextBox 3">
+                <a:extLst>
+                  <a:ext uri="{FF2B5EF4-FFF2-40B4-BE49-F238E27FC236}">
+                    <a16:creationId xmlns:a16="http://schemas.microsoft.com/office/drawing/2014/main" id="{CB42D2F0-1B73-44A8-75F8-1EE4D7468F68}"/>
+                  </a:ext>
+                </a:extLst>
+              </p:cNvPr>
+              <p:cNvSpPr txBox="1">
+                <a:spLocks noRot="1" noChangeAspect="1" noMove="1" noResize="1" noEditPoints="1" noAdjustHandles="1" noChangeArrowheads="1" noChangeShapeType="1" noTextEdit="1"/>
+              </p:cNvSpPr>
+              <p:nvPr/>
+            </p:nvSpPr>
+            <p:spPr>
+              <a:xfrm>
+                <a:off x="5719224" y="3618821"/>
+                <a:ext cx="545534" cy="294376"/>
+              </a:xfrm>
+              <a:prstGeom prst="rect">
+                <a:avLst/>
+              </a:prstGeom>
+              <a:blipFill>
+                <a:blip r:embed="rId9"/>
+                <a:stretch>
+                  <a:fillRect/>
+                </a:stretch>
+              </a:blipFill>
+            </p:spPr>
+            <p:txBody>
+              <a:bodyPr/>
+              <a:lstStyle/>
+              <a:p>
+                <a:r>
+                  <a:rPr lang="en-US">
+                    <a:noFill/>
+                  </a:rPr>
+                  <a:t> </a:t>
+                </a:r>
+              </a:p>
+            </p:txBody>
+          </p:sp>
+        </mc:Fallback>
+      </mc:AlternateContent>
+    </p:spTree>
+    <p:extLst>
+      <p:ext uri="{BB962C8B-B14F-4D97-AF65-F5344CB8AC3E}">
+        <p14:creationId xmlns:p14="http://schemas.microsoft.com/office/powerpoint/2010/main" val="3965078389"/>
+      </p:ext>
+    </p:extLst>
+  </p:cSld>
+  <p:clrMapOvr>
+    <a:masterClrMapping/>
+  </p:clrMapOvr>
+</p:sld>
+</file>
+
+<file path=ppt/slides/slide6.xml><?xml version="1.0" encoding="utf-8"?>
+<p:sld xmlns:a="http://schemas.openxmlformats.org/drawingml/2006/main" xmlns:r="http://schemas.openxmlformats.org/officeDocument/2006/relationships" xmlns:p="http://schemas.openxmlformats.org/presentationml/2006/main">
+  <p:cSld>
+    <p:spTree>
+      <p:nvGrpSpPr>
+        <p:cNvPr id="1" name="">
+          <a:extLst>
+            <a:ext uri="{FF2B5EF4-FFF2-40B4-BE49-F238E27FC236}">
+              <a16:creationId xmlns:a16="http://schemas.microsoft.com/office/drawing/2014/main" id="{DBD292A2-9A94-AE40-D3F3-D1AF2AC2E49E}"/>
+            </a:ext>
+          </a:extLst>
+        </p:cNvPr>
+        <p:cNvGrpSpPr/>
+        <p:nvPr/>
+      </p:nvGrpSpPr>
+      <p:grpSpPr>
+        <a:xfrm>
+          <a:off x="0" y="0"/>
+          <a:ext cx="0" cy="0"/>
+          <a:chOff x="0" y="0"/>
+          <a:chExt cx="0" cy="0"/>
+        </a:xfrm>
+      </p:grpSpPr>
+      <p:pic>
+        <p:nvPicPr>
+          <p:cNvPr id="5" name="Picture 4">
+            <a:extLst>
+              <a:ext uri="{FF2B5EF4-FFF2-40B4-BE49-F238E27FC236}">
+                <a16:creationId xmlns:a16="http://schemas.microsoft.com/office/drawing/2014/main" id="{037A1CF2-C29D-1382-E1E9-46CB54D17D37}"/>
+              </a:ext>
+            </a:extLst>
+          </p:cNvPr>
+          <p:cNvPicPr>
+            <a:picLocks noChangeAspect="1"/>
+          </p:cNvPicPr>
+          <p:nvPr/>
+        </p:nvPicPr>
+        <p:blipFill>
+          <a:blip r:embed="rId3"/>
+          <a:srcRect l="1747" r="1747"/>
+          <a:stretch/>
+        </p:blipFill>
+        <p:spPr>
+          <a:xfrm>
+            <a:off x="284044" y="1520806"/>
+            <a:ext cx="4217504" cy="3337519"/>
+          </a:xfrm>
+          <a:prstGeom prst="rect">
+            <a:avLst/>
+          </a:prstGeom>
+        </p:spPr>
+      </p:pic>
+      <p:pic>
+        <p:nvPicPr>
+          <p:cNvPr id="7" name="Picture 6">
+            <a:extLst>
+              <a:ext uri="{FF2B5EF4-FFF2-40B4-BE49-F238E27FC236}">
+                <a16:creationId xmlns:a16="http://schemas.microsoft.com/office/drawing/2014/main" id="{5BBCC808-2C53-EBD4-F5C2-01050766239B}"/>
+              </a:ext>
+            </a:extLst>
+          </p:cNvPr>
+          <p:cNvPicPr>
+            <a:picLocks noChangeAspect="1"/>
+          </p:cNvPicPr>
+          <p:nvPr/>
+        </p:nvPicPr>
+        <p:blipFill>
+          <a:blip r:embed="rId4"/>
+          <a:srcRect l="6869" r="6869"/>
+          <a:stretch/>
+        </p:blipFill>
+        <p:spPr>
+          <a:xfrm>
+            <a:off x="8562301" y="1588864"/>
+            <a:ext cx="3224886" cy="3746835"/>
+          </a:xfrm>
+          <a:prstGeom prst="rect">
+            <a:avLst/>
+          </a:prstGeom>
+        </p:spPr>
+      </p:pic>
+      <p:pic>
+        <p:nvPicPr>
+          <p:cNvPr id="11" name="Picture 10">
+            <a:extLst>
+              <a:ext uri="{FF2B5EF4-FFF2-40B4-BE49-F238E27FC236}">
+                <a16:creationId xmlns:a16="http://schemas.microsoft.com/office/drawing/2014/main" id="{85C6AB02-0FA6-E75E-CCD4-2B6444BC9540}"/>
+              </a:ext>
+            </a:extLst>
+          </p:cNvPr>
+          <p:cNvPicPr>
+            <a:picLocks noChangeAspect="1"/>
+          </p:cNvPicPr>
+          <p:nvPr/>
+        </p:nvPicPr>
+        <p:blipFill>
+          <a:blip r:embed="rId5"/>
+          <a:srcRect l="-1240" r="4286"/>
+          <a:stretch/>
+        </p:blipFill>
+        <p:spPr>
+          <a:xfrm>
+            <a:off x="4618945" y="1690606"/>
+            <a:ext cx="3224886" cy="3326228"/>
+          </a:xfrm>
+          <a:prstGeom prst="rect">
+            <a:avLst/>
+          </a:prstGeom>
+        </p:spPr>
+      </p:pic>
+      <mc:AlternateContent xmlns:mc="http://schemas.openxmlformats.org/markup-compatibility/2006">
+        <mc:Choice xmlns:a14="http://schemas.microsoft.com/office/drawing/2010/main" Requires="a14">
+          <p:sp>
+            <p:nvSpPr>
+              <p:cNvPr id="17" name="TextBox 16">
+                <a:extLst>
+                  <a:ext uri="{FF2B5EF4-FFF2-40B4-BE49-F238E27FC236}">
+                    <a16:creationId xmlns:a16="http://schemas.microsoft.com/office/drawing/2014/main" id="{A790AD85-0BAA-404F-9EC7-C60FB5A94A01}"/>
+                  </a:ext>
+                </a:extLst>
+              </p:cNvPr>
+              <p:cNvSpPr txBox="1"/>
+              <p:nvPr/>
+            </p:nvSpPr>
+            <p:spPr>
+              <a:xfrm>
+                <a:off x="4895238" y="3281310"/>
+                <a:ext cx="588229" cy="361702"/>
+              </a:xfrm>
+              <a:prstGeom prst="rect">
+                <a:avLst/>
+              </a:prstGeom>
+              <a:noFill/>
+            </p:spPr>
+            <p:txBody>
+              <a:bodyPr wrap="square" rtlCol="0">
+                <a:spAutoFit/>
+              </a:bodyPr>
+              <a:lstStyle/>
+              <a:p>
+                <a14:m>
+                  <m:oMathPara xmlns:m="http://schemas.openxmlformats.org/officeDocument/2006/math">
+                    <m:oMathParaPr>
+                      <m:jc m:val="centerGroup"/>
+                    </m:oMathParaPr>
+                    <m:oMath xmlns:m="http://schemas.openxmlformats.org/officeDocument/2006/math">
+                      <m:sSub>
+                        <m:sSubPr>
+                          <m:ctrlPr>
+                            <a:rPr lang="en-US" sz="1600" i="1" dirty="0" smtClean="0">
+                              <a:solidFill>
+                                <a:srgbClr val="003D88"/>
+                              </a:solidFill>
+                              <a:latin typeface="Cambria Math" panose="02040503050406030204" pitchFamily="18" charset="0"/>
+                            </a:rPr>
+                          </m:ctrlPr>
+                        </m:sSubPr>
+                        <m:e>
+                          <m:r>
+                            <a:rPr lang="en-CA" sz="1600" b="0" i="1" dirty="0" smtClean="0">
+                              <a:solidFill>
+                                <a:srgbClr val="003D88"/>
+                              </a:solidFill>
+                              <a:latin typeface="Cambria Math" panose="02040503050406030204" pitchFamily="18" charset="0"/>
+                            </a:rPr>
+                            <m:t>𝑌</m:t>
+                          </m:r>
+                        </m:e>
+                        <m:sub>
+                          <m:sSub>
+                            <m:sSubPr>
+                              <m:ctrlPr>
+                                <a:rPr lang="en-US" sz="1600" i="1" dirty="0" smtClean="0">
+                                  <a:solidFill>
+                                    <a:srgbClr val="003D88"/>
+                                  </a:solidFill>
+                                  <a:latin typeface="Cambria Math" panose="02040503050406030204" pitchFamily="18" charset="0"/>
+                                </a:rPr>
+                              </m:ctrlPr>
+                            </m:sSubPr>
+                            <m:e>
+                              <m:r>
+                                <a:rPr lang="en-CA" sz="1600" b="0" i="1" dirty="0" smtClean="0">
+                                  <a:solidFill>
+                                    <a:srgbClr val="003D88"/>
+                                  </a:solidFill>
+                                  <a:latin typeface="Cambria Math" panose="02040503050406030204" pitchFamily="18" charset="0"/>
+                                </a:rPr>
+                                <m:t>𝑟</m:t>
+                              </m:r>
+                            </m:e>
+                            <m:sub>
+                              <m:r>
+                                <a:rPr lang="en-CA" sz="1600" b="0" i="1" dirty="0" smtClean="0">
+                                  <a:solidFill>
+                                    <a:srgbClr val="003D88"/>
+                                  </a:solidFill>
+                                  <a:latin typeface="Cambria Math" panose="02040503050406030204" pitchFamily="18" charset="0"/>
+                                </a:rPr>
+                                <m:t>𝑏</m:t>
+                              </m:r>
+                            </m:sub>
+                          </m:sSub>
+                        </m:sub>
+                      </m:sSub>
+                    </m:oMath>
+                  </m:oMathPara>
+                </a14:m>
+                <a:endParaRPr lang="en-US" sz="1600" baseline="-25000" dirty="0">
+                  <a:solidFill>
+                    <a:srgbClr val="003D88"/>
+                  </a:solidFill>
+                </a:endParaRPr>
+              </a:p>
+            </p:txBody>
+          </p:sp>
+        </mc:Choice>
         <mc:Fallback>
+          <p:sp>
+            <p:nvSpPr>
+              <p:cNvPr id="17" name="TextBox 16">
+                <a:extLst>
+                  <a:ext uri="{FF2B5EF4-FFF2-40B4-BE49-F238E27FC236}">
+                    <a16:creationId xmlns:a16="http://schemas.microsoft.com/office/drawing/2014/main" id="{A790AD85-0BAA-404F-9EC7-C60FB5A94A01}"/>
+                  </a:ext>
+                </a:extLst>
+              </p:cNvPr>
+              <p:cNvSpPr txBox="1">
+                <a:spLocks noRot="1" noChangeAspect="1" noMove="1" noResize="1" noEditPoints="1" noAdjustHandles="1" noChangeArrowheads="1" noChangeShapeType="1" noTextEdit="1"/>
+              </p:cNvSpPr>
+              <p:nvPr/>
+            </p:nvSpPr>
+            <p:spPr>
+              <a:xfrm>
+                <a:off x="4895238" y="3281310"/>
+                <a:ext cx="588229" cy="361702"/>
+              </a:xfrm>
+              <a:prstGeom prst="rect">
+                <a:avLst/>
+              </a:prstGeom>
+              <a:blipFill>
+                <a:blip r:embed="rId6"/>
+                <a:stretch>
+                  <a:fillRect/>
+                </a:stretch>
+              </a:blipFill>
+            </p:spPr>
+            <p:txBody>
+              <a:bodyPr/>
+              <a:lstStyle/>
+              <a:p>
+                <a:r>
+                  <a:rPr lang="en-US">
+                    <a:noFill/>
+                  </a:rPr>
+                  <a:t> </a:t>
+                </a:r>
+              </a:p>
+            </p:txBody>
+          </p:sp>
+        </mc:Fallback>
+      </mc:AlternateContent>
+      <p:sp>
+        <p:nvSpPr>
+          <p:cNvPr id="26" name="TextBox 25">
+            <a:extLst>
+              <a:ext uri="{FF2B5EF4-FFF2-40B4-BE49-F238E27FC236}">
+                <a16:creationId xmlns:a16="http://schemas.microsoft.com/office/drawing/2014/main" id="{DCF7B9E5-673B-E33F-AE8E-45D1C43F3DC1}"/>
+              </a:ext>
+            </a:extLst>
+          </p:cNvPr>
+          <p:cNvSpPr txBox="1"/>
+          <p:nvPr/>
+        </p:nvSpPr>
+        <p:spPr>
+          <a:xfrm>
+            <a:off x="3275084" y="495827"/>
+            <a:ext cx="4714369" cy="461665"/>
+          </a:xfrm>
+          <a:prstGeom prst="rect">
+            <a:avLst/>
+          </a:prstGeom>
+          <a:noFill/>
+        </p:spPr>
+        <p:txBody>
+          <a:bodyPr wrap="square" rtlCol="0">
+            <a:spAutoFit/>
+          </a:bodyPr>
+          <a:lstStyle/>
+          <a:p>
+            <a:r>
+              <a:rPr lang="en-US" sz="2400" dirty="0"/>
+              <a:t>Inter-process thermal asymmetry</a:t>
+            </a:r>
+          </a:p>
+        </p:txBody>
+      </p:sp>
+      <p:sp>
+        <p:nvSpPr>
+          <p:cNvPr id="6" name="TextBox 5">
+            <a:extLst>
+              <a:ext uri="{FF2B5EF4-FFF2-40B4-BE49-F238E27FC236}">
+                <a16:creationId xmlns:a16="http://schemas.microsoft.com/office/drawing/2014/main" id="{6044F545-0C51-0437-7432-2FEE9607A2AB}"/>
+              </a:ext>
+            </a:extLst>
+          </p:cNvPr>
+          <p:cNvSpPr txBox="1"/>
+          <p:nvPr/>
+        </p:nvSpPr>
+        <p:spPr>
+          <a:xfrm rot="16200000">
+            <a:off x="7703175" y="2898620"/>
+            <a:ext cx="1423125" cy="369332"/>
+          </a:xfrm>
+          <a:prstGeom prst="rect">
+            <a:avLst/>
+          </a:prstGeom>
+          <a:solidFill>
+            <a:schemeClr val="bg1"/>
+          </a:solidFill>
+        </p:spPr>
+        <p:txBody>
+          <a:bodyPr wrap="square">
+            <a:spAutoFit/>
+          </a:bodyPr>
+          <a:lstStyle/>
+          <a:p>
+            <a:r>
+              <a:rPr lang="en-US" dirty="0"/>
+              <a:t>Frequency</a:t>
+            </a:r>
+          </a:p>
+        </p:txBody>
+      </p:sp>
+      <mc:AlternateContent xmlns:mc="http://schemas.openxmlformats.org/markup-compatibility/2006">
+        <mc:Choice xmlns:a14="http://schemas.microsoft.com/office/drawing/2010/main" Requires="a14">
+          <p:sp>
+            <p:nvSpPr>
+              <p:cNvPr id="2" name="TextBox 1">
+                <a:extLst>
+                  <a:ext uri="{FF2B5EF4-FFF2-40B4-BE49-F238E27FC236}">
+                    <a16:creationId xmlns:a16="http://schemas.microsoft.com/office/drawing/2014/main" id="{FFB0B54E-AC8E-B52F-05A4-E14F90AF121A}"/>
+                  </a:ext>
+                </a:extLst>
+              </p:cNvPr>
+              <p:cNvSpPr txBox="1"/>
+              <p:nvPr/>
+            </p:nvSpPr>
+            <p:spPr>
+              <a:xfrm>
+                <a:off x="5443342" y="3093915"/>
+                <a:ext cx="545534" cy="360740"/>
+              </a:xfrm>
+              <a:prstGeom prst="rect">
+                <a:avLst/>
+              </a:prstGeom>
+              <a:noFill/>
+            </p:spPr>
+            <p:txBody>
+              <a:bodyPr wrap="square" rtlCol="0">
+                <a:spAutoFit/>
+              </a:bodyPr>
+              <a:lstStyle/>
+              <a:p>
+                <a:pPr/>
+                <a14:m>
+                  <m:oMathPara xmlns:m="http://schemas.openxmlformats.org/officeDocument/2006/math">
+                    <m:oMathParaPr>
+                      <m:jc m:val="centerGroup"/>
+                    </m:oMathParaPr>
+                    <m:oMath xmlns:m="http://schemas.openxmlformats.org/officeDocument/2006/math">
+                      <m:sSub>
+                        <m:sSubPr>
+                          <m:ctrlPr>
+                            <a:rPr lang="en-US" sz="1600" i="1" smtClean="0">
+                              <a:solidFill>
+                                <a:srgbClr val="003D88"/>
+                              </a:solidFill>
+                            </a:rPr>
+                          </m:ctrlPr>
+                        </m:sSubPr>
+                        <m:e>
+                          <m:r>
+                            <m:rPr>
+                              <m:sty m:val="p"/>
+                            </m:rPr>
+                            <a:rPr lang="en-CA" sz="1600" b="0" i="0" smtClean="0">
+                              <a:solidFill>
+                                <a:srgbClr val="003D88"/>
+                              </a:solidFill>
+                            </a:rPr>
+                            <m:t>E</m:t>
+                          </m:r>
+                        </m:e>
+                        <m:sub>
+                          <m:sSub>
+                            <m:sSubPr>
+                              <m:ctrlPr>
+                                <a:rPr lang="en-US" sz="1600" i="1" smtClean="0">
+                                  <a:solidFill>
+                                    <a:srgbClr val="003D88"/>
+                                  </a:solidFill>
+                                </a:rPr>
+                              </m:ctrlPr>
+                            </m:sSubPr>
+                            <m:e>
+                              <m:r>
+                                <m:rPr>
+                                  <m:sty m:val="p"/>
+                                </m:rPr>
+                                <a:rPr lang="en-CA" sz="1600" b="0" i="0" smtClean="0">
+                                  <a:solidFill>
+                                    <a:srgbClr val="003D88"/>
+                                  </a:solidFill>
+                                </a:rPr>
+                                <m:t>r</m:t>
+                              </m:r>
+                            </m:e>
+                            <m:sub>
+                              <m:r>
+                                <m:rPr>
+                                  <m:sty m:val="p"/>
+                                </m:rPr>
+                                <a:rPr lang="en-CA" sz="1600" b="0" i="0" smtClean="0">
+                                  <a:solidFill>
+                                    <a:srgbClr val="003D88"/>
+                                  </a:solidFill>
+                                </a:rPr>
+                                <m:t>b</m:t>
+                              </m:r>
+                            </m:sub>
+                          </m:sSub>
+                        </m:sub>
+                      </m:sSub>
+                    </m:oMath>
+                  </m:oMathPara>
+                </a14:m>
+                <a:endParaRPr lang="en-US" sz="1600" dirty="0">
+                  <a:solidFill>
+                    <a:srgbClr val="003D88"/>
+                  </a:solidFill>
+                </a:endParaRPr>
+              </a:p>
+            </p:txBody>
+          </p:sp>
+        </mc:Choice>
+        <mc:Fallback>
+          <p:sp>
+            <p:nvSpPr>
+              <p:cNvPr id="2" name="TextBox 1">
+                <a:extLst>
+                  <a:ext uri="{FF2B5EF4-FFF2-40B4-BE49-F238E27FC236}">
+                    <a16:creationId xmlns:a16="http://schemas.microsoft.com/office/drawing/2014/main" id="{FFB0B54E-AC8E-B52F-05A4-E14F90AF121A}"/>
+                  </a:ext>
+                </a:extLst>
+              </p:cNvPr>
+              <p:cNvSpPr txBox="1">
+                <a:spLocks noRot="1" noChangeAspect="1" noMove="1" noResize="1" noEditPoints="1" noAdjustHandles="1" noChangeArrowheads="1" noChangeShapeType="1" noTextEdit="1"/>
+              </p:cNvSpPr>
+              <p:nvPr/>
+            </p:nvSpPr>
+            <p:spPr>
+              <a:xfrm>
+                <a:off x="5443342" y="3093915"/>
+                <a:ext cx="545534" cy="360740"/>
+              </a:xfrm>
+              <a:prstGeom prst="rect">
+                <a:avLst/>
+              </a:prstGeom>
+              <a:blipFill>
+                <a:blip r:embed="rId7"/>
+                <a:stretch>
+                  <a:fillRect/>
+                </a:stretch>
+              </a:blipFill>
+            </p:spPr>
+            <p:txBody>
+              <a:bodyPr/>
+              <a:lstStyle/>
+              <a:p>
+                <a:r>
+                  <a:rPr lang="en-US">
+                    <a:noFill/>
+                  </a:rPr>
+                  <a:t> </a:t>
+                </a:r>
+              </a:p>
+            </p:txBody>
+          </p:sp>
+        </mc:Fallback>
+      </mc:AlternateContent>
+      <mc:AlternateContent xmlns:mc="http://schemas.openxmlformats.org/markup-compatibility/2006">
+        <mc:Choice xmlns:a14="http://schemas.microsoft.com/office/drawing/2010/main" Requires="a14">
+          <p:sp>
+            <p:nvSpPr>
+              <p:cNvPr id="4" name="TextBox 3">
+                <a:extLst>
+                  <a:ext uri="{FF2B5EF4-FFF2-40B4-BE49-F238E27FC236}">
+                    <a16:creationId xmlns:a16="http://schemas.microsoft.com/office/drawing/2014/main" id="{C0D0C409-910B-7199-9DB2-4CBB3B1CFC15}"/>
+                  </a:ext>
+                </a:extLst>
+              </p:cNvPr>
+              <p:cNvSpPr txBox="1"/>
+              <p:nvPr/>
+            </p:nvSpPr>
+            <p:spPr>
+              <a:xfrm>
+                <a:off x="5863410" y="3793051"/>
+                <a:ext cx="545534" cy="360740"/>
+              </a:xfrm>
+              <a:prstGeom prst="rect">
+                <a:avLst/>
+              </a:prstGeom>
+              <a:noFill/>
+            </p:spPr>
+            <p:txBody>
+              <a:bodyPr wrap="square" rtlCol="0">
+                <a:spAutoFit/>
+              </a:bodyPr>
+              <a:lstStyle/>
+              <a:p>
+                <a:pPr/>
+                <a14:m>
+                  <m:oMathPara xmlns:m="http://schemas.openxmlformats.org/officeDocument/2006/math">
+                    <m:oMathParaPr>
+                      <m:jc m:val="centerGroup"/>
+                    </m:oMathParaPr>
+                    <m:oMath xmlns:m="http://schemas.openxmlformats.org/officeDocument/2006/math">
+                      <m:sSub>
+                        <m:sSubPr>
+                          <m:ctrlPr>
+                            <a:rPr lang="en-US" sz="1600" i="1" smtClean="0">
+                              <a:solidFill>
+                                <a:srgbClr val="DAA620"/>
+                              </a:solidFill>
+                            </a:rPr>
+                          </m:ctrlPr>
+                        </m:sSubPr>
+                        <m:e>
+                          <m:r>
+                            <m:rPr>
+                              <m:sty m:val="p"/>
+                            </m:rPr>
+                            <a:rPr lang="en-CA" sz="1600" b="0" i="0" smtClean="0">
+                              <a:solidFill>
+                                <a:srgbClr val="DAA620"/>
+                              </a:solidFill>
+                            </a:rPr>
+                            <m:t>E</m:t>
+                          </m:r>
+                        </m:e>
+                        <m:sub>
+                          <m:sSub>
+                            <m:sSubPr>
+                              <m:ctrlPr>
+                                <a:rPr lang="en-US" sz="1600" i="1" smtClean="0">
+                                  <a:solidFill>
+                                    <a:srgbClr val="DAA620"/>
+                                  </a:solidFill>
+                                </a:rPr>
+                              </m:ctrlPr>
+                            </m:sSubPr>
+                            <m:e>
+                              <m:r>
+                                <m:rPr>
+                                  <m:sty m:val="p"/>
+                                </m:rPr>
+                                <a:rPr lang="en-CA" sz="1600" b="0" i="0" smtClean="0">
+                                  <a:solidFill>
+                                    <a:srgbClr val="DAA620"/>
+                                  </a:solidFill>
+                                </a:rPr>
+                                <m:t>c</m:t>
+                              </m:r>
+                              <m:r>
+                                <a:rPr lang="en-CA" sz="1600" b="0" i="0" smtClean="0">
+                                  <a:solidFill>
+                                    <a:srgbClr val="DAA620"/>
+                                  </a:solidFill>
+                                </a:rPr>
+                                <m:t>2</m:t>
+                              </m:r>
+                            </m:e>
+                            <m:sub>
+                              <m:r>
+                                <m:rPr>
+                                  <m:sty m:val="p"/>
+                                </m:rPr>
+                                <a:rPr lang="en-CA" sz="1600" b="0" i="0" smtClean="0">
+                                  <a:solidFill>
+                                    <a:srgbClr val="DAA620"/>
+                                  </a:solidFill>
+                                </a:rPr>
+                                <m:t>b</m:t>
+                              </m:r>
+                            </m:sub>
+                          </m:sSub>
+                        </m:sub>
+                      </m:sSub>
+                    </m:oMath>
+                  </m:oMathPara>
+                </a14:m>
+                <a:endParaRPr lang="en-US" sz="1600" dirty="0"/>
+              </a:p>
+            </p:txBody>
+          </p:sp>
+        </mc:Choice>
+        <mc:Fallback>
+          <p:sp>
+            <p:nvSpPr>
+              <p:cNvPr id="4" name="TextBox 3">
+                <a:extLst>
+                  <a:ext uri="{FF2B5EF4-FFF2-40B4-BE49-F238E27FC236}">
+                    <a16:creationId xmlns:a16="http://schemas.microsoft.com/office/drawing/2014/main" id="{C0D0C409-910B-7199-9DB2-4CBB3B1CFC15}"/>
+                  </a:ext>
+                </a:extLst>
+              </p:cNvPr>
+              <p:cNvSpPr txBox="1">
+                <a:spLocks noRot="1" noChangeAspect="1" noMove="1" noResize="1" noEditPoints="1" noAdjustHandles="1" noChangeArrowheads="1" noChangeShapeType="1" noTextEdit="1"/>
+              </p:cNvSpPr>
+              <p:nvPr/>
+            </p:nvSpPr>
+            <p:spPr>
+              <a:xfrm>
+                <a:off x="5863410" y="3793051"/>
+                <a:ext cx="545534" cy="360740"/>
+              </a:xfrm>
+              <a:prstGeom prst="rect">
+                <a:avLst/>
+              </a:prstGeom>
+              <a:blipFill>
+                <a:blip r:embed="rId8"/>
+                <a:stretch>
+                  <a:fillRect/>
+                </a:stretch>
+              </a:blipFill>
+            </p:spPr>
+            <p:txBody>
+              <a:bodyPr/>
+              <a:lstStyle/>
+              <a:p>
+                <a:r>
+                  <a:rPr lang="en-US">
+                    <a:noFill/>
+                  </a:rPr>
+                  <a:t> </a:t>
+                </a:r>
+              </a:p>
+            </p:txBody>
+          </p:sp>
+        </mc:Fallback>
+      </mc:AlternateContent>
+      <p:sp>
+        <p:nvSpPr>
+          <p:cNvPr id="3" name="TextBox 2">
+            <a:extLst>
+              <a:ext uri="{FF2B5EF4-FFF2-40B4-BE49-F238E27FC236}">
+                <a16:creationId xmlns:a16="http://schemas.microsoft.com/office/drawing/2014/main" id="{5008A091-ED45-A2B3-6011-C7E9C836CAF5}"/>
+              </a:ext>
+            </a:extLst>
+          </p:cNvPr>
+          <p:cNvSpPr txBox="1"/>
+          <p:nvPr/>
+        </p:nvSpPr>
+        <p:spPr>
+          <a:xfrm rot="16200000">
+            <a:off x="4392714" y="2939395"/>
+            <a:ext cx="792502" cy="400110"/>
+          </a:xfrm>
+          <a:prstGeom prst="rect">
+            <a:avLst/>
+          </a:prstGeom>
+          <a:solidFill>
+            <a:schemeClr val="bg1"/>
+          </a:solidFill>
+        </p:spPr>
+        <p:txBody>
+          <a:bodyPr wrap="square" rtlCol="0">
+            <a:spAutoFit/>
+          </a:bodyPr>
+          <a:lstStyle/>
+          <a:p>
+            <a:r>
+              <a:rPr lang="en-US" sz="2000" dirty="0"/>
+              <a:t>Rate</a:t>
+            </a:r>
+          </a:p>
+        </p:txBody>
+      </p:sp>
+      <p:sp>
+        <p:nvSpPr>
+          <p:cNvPr id="8" name="TextBox 7">
+            <a:extLst>
+              <a:ext uri="{FF2B5EF4-FFF2-40B4-BE49-F238E27FC236}">
+                <a16:creationId xmlns:a16="http://schemas.microsoft.com/office/drawing/2014/main" id="{4BEA1DB1-17BD-7578-FFF1-FBE98A9D8C65}"/>
+              </a:ext>
+            </a:extLst>
+          </p:cNvPr>
+          <p:cNvSpPr txBox="1"/>
+          <p:nvPr/>
+        </p:nvSpPr>
+        <p:spPr>
+          <a:xfrm>
+            <a:off x="5505242" y="4693780"/>
+            <a:ext cx="2053364" cy="369332"/>
+          </a:xfrm>
+          <a:prstGeom prst="rect">
+            <a:avLst/>
+          </a:prstGeom>
+          <a:solidFill>
+            <a:schemeClr val="bg1"/>
+          </a:solidFill>
+        </p:spPr>
+        <p:txBody>
+          <a:bodyPr wrap="square" rtlCol="0">
+            <a:spAutoFit/>
+          </a:bodyPr>
+          <a:lstStyle/>
+          <a:p>
+            <a:r>
+              <a:rPr lang="en-US" dirty="0"/>
+              <a:t>Temperature (°C)</a:t>
+            </a:r>
+          </a:p>
+        </p:txBody>
+      </p:sp>
+      <p:sp>
+        <p:nvSpPr>
+          <p:cNvPr id="9" name="Freeform 8">
+            <a:extLst>
+              <a:ext uri="{FF2B5EF4-FFF2-40B4-BE49-F238E27FC236}">
+                <a16:creationId xmlns:a16="http://schemas.microsoft.com/office/drawing/2014/main" id="{8B090AD9-045E-1472-2DB2-3D6DA9E2FD65}"/>
+              </a:ext>
+            </a:extLst>
+          </p:cNvPr>
+          <p:cNvSpPr/>
+          <p:nvPr/>
+        </p:nvSpPr>
+        <p:spPr>
+          <a:xfrm>
+            <a:off x="5508701" y="3288884"/>
+            <a:ext cx="545533" cy="294376"/>
+          </a:xfrm>
+          <a:custGeom>
+            <a:avLst/>
+            <a:gdLst>
+              <a:gd name="connsiteX0" fmla="*/ 0 w 334536"/>
+              <a:gd name="connsiteY0" fmla="*/ 156117 h 156117"/>
+              <a:gd name="connsiteX1" fmla="*/ 178419 w 334536"/>
+              <a:gd name="connsiteY1" fmla="*/ 81776 h 156117"/>
+              <a:gd name="connsiteX2" fmla="*/ 334536 w 334536"/>
+              <a:gd name="connsiteY2" fmla="*/ 0 h 156117"/>
+              <a:gd name="connsiteX3" fmla="*/ 334536 w 334536"/>
+              <a:gd name="connsiteY3" fmla="*/ 0 h 156117"/>
+            </a:gdLst>
+            <a:ahLst/>
+            <a:cxnLst>
+              <a:cxn ang="0">
+                <a:pos x="connsiteX0" y="connsiteY0"/>
+              </a:cxn>
+              <a:cxn ang="0">
+                <a:pos x="connsiteX1" y="connsiteY1"/>
+              </a:cxn>
+              <a:cxn ang="0">
+                <a:pos x="connsiteX2" y="connsiteY2"/>
+              </a:cxn>
+              <a:cxn ang="0">
+                <a:pos x="connsiteX3" y="connsiteY3"/>
+              </a:cxn>
+            </a:cxnLst>
+            <a:rect l="l" t="t" r="r" b="b"/>
+            <a:pathLst>
+              <a:path w="334536" h="156117">
+                <a:moveTo>
+                  <a:pt x="0" y="156117"/>
+                </a:moveTo>
+                <a:cubicBezTo>
+                  <a:pt x="61331" y="131956"/>
+                  <a:pt x="122663" y="107795"/>
+                  <a:pt x="178419" y="81776"/>
+                </a:cubicBezTo>
+                <a:cubicBezTo>
+                  <a:pt x="234175" y="55757"/>
+                  <a:pt x="334536" y="0"/>
+                  <a:pt x="334536" y="0"/>
+                </a:cubicBezTo>
+                <a:lnTo>
+                  <a:pt x="334536" y="0"/>
+                </a:lnTo>
+              </a:path>
+            </a:pathLst>
+          </a:custGeom>
+          <a:noFill/>
+          <a:ln w="28575">
+            <a:solidFill>
+              <a:srgbClr val="003D88"/>
+            </a:solidFill>
+            <a:headEnd type="none" w="med" len="med"/>
+            <a:tailEnd type="triangle" w="med" len="med"/>
+          </a:ln>
+        </p:spPr>
+        <p:style>
+          <a:lnRef idx="2">
+            <a:schemeClr val="accent1">
+              <a:shade val="15000"/>
+            </a:schemeClr>
+          </a:lnRef>
+          <a:fillRef idx="1">
+            <a:schemeClr val="accent1"/>
+          </a:fillRef>
+          <a:effectRef idx="0">
+            <a:schemeClr val="accent1"/>
+          </a:effectRef>
+          <a:fontRef idx="minor">
+            <a:schemeClr val="lt1"/>
+          </a:fontRef>
+        </p:style>
+        <p:txBody>
+          <a:bodyPr rtlCol="0" anchor="ctr"/>
+          <a:lstStyle/>
+          <a:p>
+            <a:pPr algn="ctr"/>
+            <a:endParaRPr lang="en-US"/>
+          </a:p>
+        </p:txBody>
+      </p:sp>
+      <p:sp>
+        <p:nvSpPr>
+          <p:cNvPr id="18" name="Freeform 17">
+            <a:extLst>
+              <a:ext uri="{FF2B5EF4-FFF2-40B4-BE49-F238E27FC236}">
+                <a16:creationId xmlns:a16="http://schemas.microsoft.com/office/drawing/2014/main" id="{4433F5BF-7BAC-3E3E-D566-8601B55A9DF7}"/>
+              </a:ext>
+            </a:extLst>
+          </p:cNvPr>
+          <p:cNvSpPr/>
+          <p:nvPr/>
+        </p:nvSpPr>
+        <p:spPr>
+          <a:xfrm>
+            <a:off x="5661776" y="3526048"/>
+            <a:ext cx="588229" cy="497309"/>
+          </a:xfrm>
+          <a:custGeom>
+            <a:avLst/>
+            <a:gdLst>
+              <a:gd name="connsiteX0" fmla="*/ 0 w 644893"/>
+              <a:gd name="connsiteY0" fmla="*/ 551849 h 551849"/>
+              <a:gd name="connsiteX1" fmla="*/ 134754 w 644893"/>
+              <a:gd name="connsiteY1" fmla="*/ 465221 h 551849"/>
+              <a:gd name="connsiteX2" fmla="*/ 275924 w 644893"/>
+              <a:gd name="connsiteY2" fmla="*/ 356135 h 551849"/>
+              <a:gd name="connsiteX3" fmla="*/ 404261 w 644893"/>
+              <a:gd name="connsiteY3" fmla="*/ 247049 h 551849"/>
+              <a:gd name="connsiteX4" fmla="*/ 513347 w 644893"/>
+              <a:gd name="connsiteY4" fmla="*/ 141171 h 551849"/>
+              <a:gd name="connsiteX5" fmla="*/ 603183 w 644893"/>
+              <a:gd name="connsiteY5" fmla="*/ 41710 h 551849"/>
+              <a:gd name="connsiteX6" fmla="*/ 644893 w 644893"/>
+              <a:gd name="connsiteY6" fmla="*/ 0 h 551849"/>
+              <a:gd name="connsiteX7" fmla="*/ 644893 w 644893"/>
+              <a:gd name="connsiteY7" fmla="*/ 0 h 551849"/>
+            </a:gdLst>
+            <a:ahLst/>
+            <a:cxnLst>
+              <a:cxn ang="0">
+                <a:pos x="connsiteX0" y="connsiteY0"/>
+              </a:cxn>
+              <a:cxn ang="0">
+                <a:pos x="connsiteX1" y="connsiteY1"/>
+              </a:cxn>
+              <a:cxn ang="0">
+                <a:pos x="connsiteX2" y="connsiteY2"/>
+              </a:cxn>
+              <a:cxn ang="0">
+                <a:pos x="connsiteX3" y="connsiteY3"/>
+              </a:cxn>
+              <a:cxn ang="0">
+                <a:pos x="connsiteX4" y="connsiteY4"/>
+              </a:cxn>
+              <a:cxn ang="0">
+                <a:pos x="connsiteX5" y="connsiteY5"/>
+              </a:cxn>
+              <a:cxn ang="0">
+                <a:pos x="connsiteX6" y="connsiteY6"/>
+              </a:cxn>
+              <a:cxn ang="0">
+                <a:pos x="connsiteX7" y="connsiteY7"/>
+              </a:cxn>
+            </a:cxnLst>
+            <a:rect l="l" t="t" r="r" b="b"/>
+            <a:pathLst>
+              <a:path w="644893" h="551849">
+                <a:moveTo>
+                  <a:pt x="0" y="551849"/>
+                </a:moveTo>
+                <a:cubicBezTo>
+                  <a:pt x="44383" y="524844"/>
+                  <a:pt x="88767" y="497840"/>
+                  <a:pt x="134754" y="465221"/>
+                </a:cubicBezTo>
+                <a:cubicBezTo>
+                  <a:pt x="180741" y="432602"/>
+                  <a:pt x="231006" y="392497"/>
+                  <a:pt x="275924" y="356135"/>
+                </a:cubicBezTo>
+                <a:cubicBezTo>
+                  <a:pt x="320842" y="319773"/>
+                  <a:pt x="364691" y="282876"/>
+                  <a:pt x="404261" y="247049"/>
+                </a:cubicBezTo>
+                <a:cubicBezTo>
+                  <a:pt x="443831" y="211222"/>
+                  <a:pt x="480193" y="175394"/>
+                  <a:pt x="513347" y="141171"/>
+                </a:cubicBezTo>
+                <a:cubicBezTo>
+                  <a:pt x="546501" y="106948"/>
+                  <a:pt x="581259" y="65238"/>
+                  <a:pt x="603183" y="41710"/>
+                </a:cubicBezTo>
+                <a:cubicBezTo>
+                  <a:pt x="625107" y="18181"/>
+                  <a:pt x="644893" y="0"/>
+                  <a:pt x="644893" y="0"/>
+                </a:cubicBezTo>
+                <a:lnTo>
+                  <a:pt x="644893" y="0"/>
+                </a:lnTo>
+              </a:path>
+            </a:pathLst>
+          </a:custGeom>
+          <a:noFill/>
+          <a:ln w="28575">
+            <a:solidFill>
+              <a:srgbClr val="DAA620"/>
+            </a:solidFill>
+            <a:headEnd type="none" w="med" len="med"/>
+            <a:tailEnd type="triangle" w="med" len="med"/>
+          </a:ln>
+        </p:spPr>
+        <p:style>
+          <a:lnRef idx="2">
+            <a:schemeClr val="accent1">
+              <a:shade val="15000"/>
+            </a:schemeClr>
+          </a:lnRef>
+          <a:fillRef idx="1">
+            <a:schemeClr val="accent1"/>
+          </a:fillRef>
+          <a:effectRef idx="0">
+            <a:schemeClr val="accent1"/>
+          </a:effectRef>
+          <a:fontRef idx="minor">
+            <a:schemeClr val="lt1"/>
+          </a:fontRef>
+        </p:style>
+        <p:txBody>
+          <a:bodyPr rtlCol="0" anchor="ctr"/>
+          <a:lstStyle/>
+          <a:p>
+            <a:pPr algn="ctr"/>
+            <a:endParaRPr lang="en-US"/>
+          </a:p>
+        </p:txBody>
+      </p:sp>
+      <p:cxnSp>
+        <p:nvCxnSpPr>
+          <p:cNvPr id="22" name="Straight Connector 21">
+            <a:extLst>
+              <a:ext uri="{FF2B5EF4-FFF2-40B4-BE49-F238E27FC236}">
+                <a16:creationId xmlns:a16="http://schemas.microsoft.com/office/drawing/2014/main" id="{CC57537F-83F8-8738-EA81-8C60127F7BCF}"/>
+              </a:ext>
+            </a:extLst>
+          </p:cNvPr>
+          <p:cNvCxnSpPr>
+            <a:cxnSpLocks/>
+          </p:cNvCxnSpPr>
+          <p:nvPr/>
+        </p:nvCxnSpPr>
+        <p:spPr>
+          <a:xfrm>
+            <a:off x="5167328" y="3845859"/>
+            <a:ext cx="0" cy="801643"/>
+          </a:xfrm>
+          <a:prstGeom prst="line">
+            <a:avLst/>
+          </a:prstGeom>
+          <a:ln>
+            <a:solidFill>
+              <a:schemeClr val="tx1"/>
+            </a:solidFill>
+            <a:prstDash val="sysDot"/>
+          </a:ln>
+        </p:spPr>
+        <p:style>
+          <a:lnRef idx="2">
+            <a:schemeClr val="accent1"/>
+          </a:lnRef>
+          <a:fillRef idx="0">
+            <a:schemeClr val="accent1"/>
+          </a:fillRef>
+          <a:effectRef idx="1">
+            <a:schemeClr val="accent1"/>
+          </a:effectRef>
+          <a:fontRef idx="minor">
+            <a:schemeClr val="tx1"/>
+          </a:fontRef>
+        </p:style>
+      </p:cxnSp>
+      <p:sp>
+        <p:nvSpPr>
+          <p:cNvPr id="24" name="TextBox 23">
+            <a:extLst>
+              <a:ext uri="{FF2B5EF4-FFF2-40B4-BE49-F238E27FC236}">
+                <a16:creationId xmlns:a16="http://schemas.microsoft.com/office/drawing/2014/main" id="{7062C071-CEAC-B2CD-01A9-9A76164BCB72}"/>
+              </a:ext>
+            </a:extLst>
+          </p:cNvPr>
+          <p:cNvSpPr txBox="1"/>
+          <p:nvPr/>
+        </p:nvSpPr>
+        <p:spPr>
+          <a:xfrm>
+            <a:off x="4966133" y="4617751"/>
+            <a:ext cx="585389" cy="338554"/>
+          </a:xfrm>
+          <a:prstGeom prst="rect">
+            <a:avLst/>
+          </a:prstGeom>
+          <a:noFill/>
+        </p:spPr>
+        <p:txBody>
+          <a:bodyPr wrap="square" rtlCol="0">
+            <a:spAutoFit/>
+          </a:bodyPr>
+          <a:lstStyle/>
+          <a:p>
+            <a:r>
+              <a:rPr lang="en-US" sz="1600" dirty="0"/>
+              <a:t>T</a:t>
+            </a:r>
+            <a:r>
+              <a:rPr lang="en-US" sz="1600" baseline="-25000" dirty="0"/>
+              <a:t>amb</a:t>
+            </a:r>
+            <a:endParaRPr lang="en-US" sz="1600" dirty="0"/>
+          </a:p>
+        </p:txBody>
+      </p:sp>
+      <p:cxnSp>
+        <p:nvCxnSpPr>
+          <p:cNvPr id="27" name="Straight Arrow Connector 26">
+            <a:extLst>
+              <a:ext uri="{FF2B5EF4-FFF2-40B4-BE49-F238E27FC236}">
+                <a16:creationId xmlns:a16="http://schemas.microsoft.com/office/drawing/2014/main" id="{46532547-6C9D-A4E4-F13F-6F620FDA0CF1}"/>
+              </a:ext>
+            </a:extLst>
+          </p:cNvPr>
+          <p:cNvCxnSpPr>
+            <a:cxnSpLocks/>
+          </p:cNvCxnSpPr>
+          <p:nvPr/>
+        </p:nvCxnSpPr>
+        <p:spPr>
+          <a:xfrm>
+            <a:off x="5167328" y="3606607"/>
+            <a:ext cx="0" cy="183055"/>
+          </a:xfrm>
+          <a:prstGeom prst="straightConnector1">
+            <a:avLst/>
+          </a:prstGeom>
+          <a:ln>
+            <a:solidFill>
+              <a:schemeClr val="tx1"/>
+            </a:solidFill>
+            <a:tailEnd type="triangle"/>
+          </a:ln>
+        </p:spPr>
+        <p:style>
+          <a:lnRef idx="2">
+            <a:schemeClr val="accent1"/>
+          </a:lnRef>
+          <a:fillRef idx="0">
+            <a:schemeClr val="accent1"/>
+          </a:fillRef>
+          <a:effectRef idx="1">
+            <a:schemeClr val="accent1"/>
+          </a:effectRef>
+          <a:fontRef idx="minor">
+            <a:schemeClr val="tx1"/>
+          </a:fontRef>
+        </p:style>
+      </p:cxnSp>
+      <p:cxnSp>
+        <p:nvCxnSpPr>
+          <p:cNvPr id="29" name="Straight Arrow Connector 28">
+            <a:extLst>
+              <a:ext uri="{FF2B5EF4-FFF2-40B4-BE49-F238E27FC236}">
+                <a16:creationId xmlns:a16="http://schemas.microsoft.com/office/drawing/2014/main" id="{0B0393AA-AECD-EA86-A15B-45D6061DC0E3}"/>
+              </a:ext>
+            </a:extLst>
+          </p:cNvPr>
+          <p:cNvCxnSpPr>
+            <a:cxnSpLocks/>
+          </p:cNvCxnSpPr>
+          <p:nvPr/>
+        </p:nvCxnSpPr>
+        <p:spPr>
+          <a:xfrm flipH="1" flipV="1">
+            <a:off x="5203699" y="4186774"/>
+            <a:ext cx="191721" cy="161772"/>
+          </a:xfrm>
+          <a:prstGeom prst="straightConnector1">
+            <a:avLst/>
+          </a:prstGeom>
+          <a:ln>
+            <a:solidFill>
+              <a:schemeClr val="tx1"/>
+            </a:solidFill>
+            <a:tailEnd type="triangle"/>
+          </a:ln>
+        </p:spPr>
+        <p:style>
+          <a:lnRef idx="2">
+            <a:schemeClr val="accent1"/>
+          </a:lnRef>
+          <a:fillRef idx="0">
+            <a:schemeClr val="accent1"/>
+          </a:fillRef>
+          <a:effectRef idx="1">
+            <a:schemeClr val="accent1"/>
+          </a:effectRef>
+          <a:fontRef idx="minor">
+            <a:schemeClr val="tx1"/>
+          </a:fontRef>
+        </p:style>
+      </p:cxnSp>
+      <mc:AlternateContent xmlns:mc="http://schemas.openxmlformats.org/markup-compatibility/2006">
+        <mc:Choice xmlns:a14="http://schemas.microsoft.com/office/drawing/2010/main" Requires="a14">
+          <p:sp>
+            <p:nvSpPr>
+              <p:cNvPr id="32" name="TextBox 31">
+                <a:extLst>
+                  <a:ext uri="{FF2B5EF4-FFF2-40B4-BE49-F238E27FC236}">
+                    <a16:creationId xmlns:a16="http://schemas.microsoft.com/office/drawing/2014/main" id="{12B758B2-09F6-1250-5A6E-96C93B348893}"/>
+                  </a:ext>
+                </a:extLst>
+              </p:cNvPr>
+              <p:cNvSpPr txBox="1"/>
+              <p:nvPr/>
+            </p:nvSpPr>
+            <p:spPr>
+              <a:xfrm>
+                <a:off x="5297570" y="4219777"/>
+                <a:ext cx="588229" cy="361702"/>
+              </a:xfrm>
+              <a:prstGeom prst="rect">
+                <a:avLst/>
+              </a:prstGeom>
+              <a:noFill/>
+            </p:spPr>
+            <p:txBody>
+              <a:bodyPr wrap="square" rtlCol="0">
+                <a:spAutoFit/>
+              </a:bodyPr>
+              <a:lstStyle/>
+              <a:p>
+                <a14:m>
+                  <m:oMathPara xmlns:m="http://schemas.openxmlformats.org/officeDocument/2006/math">
+                    <m:oMathParaPr>
+                      <m:jc m:val="centerGroup"/>
+                    </m:oMathParaPr>
+                    <m:oMath xmlns:m="http://schemas.openxmlformats.org/officeDocument/2006/math">
+                      <m:sSub>
+                        <m:sSubPr>
+                          <m:ctrlPr>
+                            <a:rPr lang="en-US" sz="1600" i="1" dirty="0" smtClean="0">
+                              <a:solidFill>
+                                <a:srgbClr val="DAA620"/>
+                              </a:solidFill>
+                              <a:latin typeface="Cambria Math" panose="02040503050406030204" pitchFamily="18" charset="0"/>
+                            </a:rPr>
+                          </m:ctrlPr>
+                        </m:sSubPr>
+                        <m:e>
+                          <m:r>
+                            <a:rPr lang="en-CA" sz="1600" b="0" i="1" dirty="0" smtClean="0">
+                              <a:solidFill>
+                                <a:srgbClr val="DAA620"/>
+                              </a:solidFill>
+                              <a:latin typeface="Cambria Math" panose="02040503050406030204" pitchFamily="18" charset="0"/>
+                            </a:rPr>
+                            <m:t>𝑌</m:t>
+                          </m:r>
+                        </m:e>
+                        <m:sub>
+                          <m:sSub>
+                            <m:sSubPr>
+                              <m:ctrlPr>
+                                <a:rPr lang="en-US" sz="1600" i="1" dirty="0" smtClean="0">
+                                  <a:solidFill>
+                                    <a:srgbClr val="DAA620"/>
+                                  </a:solidFill>
+                                  <a:latin typeface="Cambria Math" panose="02040503050406030204" pitchFamily="18" charset="0"/>
+                                </a:rPr>
+                              </m:ctrlPr>
+                            </m:sSubPr>
+                            <m:e>
+                              <m:r>
+                                <a:rPr lang="en-CA" sz="1600" b="0" i="1" dirty="0" smtClean="0">
+                                  <a:solidFill>
+                                    <a:srgbClr val="DAA620"/>
+                                  </a:solidFill>
+                                  <a:latin typeface="Cambria Math" panose="02040503050406030204" pitchFamily="18" charset="0"/>
+                                </a:rPr>
+                                <m:t>𝑐</m:t>
+                              </m:r>
+                            </m:e>
+                            <m:sub>
+                              <m:r>
+                                <a:rPr lang="en-CA" sz="1600" b="0" i="1" dirty="0" smtClean="0">
+                                  <a:solidFill>
+                                    <a:srgbClr val="DAA620"/>
+                                  </a:solidFill>
+                                  <a:latin typeface="Cambria Math" panose="02040503050406030204" pitchFamily="18" charset="0"/>
+                                </a:rPr>
+                                <m:t>2</m:t>
+                              </m:r>
+                              <m:r>
+                                <a:rPr lang="en-CA" sz="1600" b="0" i="1" dirty="0" smtClean="0">
+                                  <a:solidFill>
+                                    <a:srgbClr val="DAA620"/>
+                                  </a:solidFill>
+                                  <a:latin typeface="Cambria Math" panose="02040503050406030204" pitchFamily="18" charset="0"/>
+                                </a:rPr>
+                                <m:t>𝑏</m:t>
+                              </m:r>
+                            </m:sub>
+                          </m:sSub>
+                        </m:sub>
+                      </m:sSub>
+                    </m:oMath>
+                  </m:oMathPara>
+                </a14:m>
+                <a:endParaRPr lang="en-US" sz="1600" baseline="-25000" dirty="0">
+                  <a:solidFill>
+                    <a:srgbClr val="003D88"/>
+                  </a:solidFill>
+                </a:endParaRPr>
+              </a:p>
+            </p:txBody>
+          </p:sp>
+        </mc:Choice>
+        <mc:Fallback>
+          <p:sp>
+            <p:nvSpPr>
+              <p:cNvPr id="32" name="TextBox 31">
+                <a:extLst>
+                  <a:ext uri="{FF2B5EF4-FFF2-40B4-BE49-F238E27FC236}">
+                    <a16:creationId xmlns:a16="http://schemas.microsoft.com/office/drawing/2014/main" id="{12B758B2-09F6-1250-5A6E-96C93B348893}"/>
+                  </a:ext>
+                </a:extLst>
+              </p:cNvPr>
+              <p:cNvSpPr txBox="1">
+                <a:spLocks noRot="1" noChangeAspect="1" noMove="1" noResize="1" noEditPoints="1" noAdjustHandles="1" noChangeArrowheads="1" noChangeShapeType="1" noTextEdit="1"/>
+              </p:cNvSpPr>
+              <p:nvPr/>
+            </p:nvSpPr>
+            <p:spPr>
+              <a:xfrm>
+                <a:off x="5297570" y="4219777"/>
+                <a:ext cx="588229" cy="361702"/>
+              </a:xfrm>
+              <a:prstGeom prst="rect">
+                <a:avLst/>
+              </a:prstGeom>
+              <a:blipFill>
+                <a:blip r:embed="rId9"/>
+                <a:stretch>
+                  <a:fillRect/>
+                </a:stretch>
+              </a:blipFill>
+            </p:spPr>
+            <p:txBody>
+              <a:bodyPr/>
+              <a:lstStyle/>
+              <a:p>
+                <a:r>
+                  <a:rPr lang="en-US">
+                    <a:noFill/>
+                  </a:rPr>
+                  <a:t> </a:t>
+                </a:r>
+              </a:p>
+            </p:txBody>
+          </p:sp>
+        </mc:Fallback>
+      </mc:AlternateContent>
+      <p:sp>
+        <p:nvSpPr>
+          <p:cNvPr id="37" name="Rectangle 36">
+            <a:extLst>
+              <a:ext uri="{FF2B5EF4-FFF2-40B4-BE49-F238E27FC236}">
+                <a16:creationId xmlns:a16="http://schemas.microsoft.com/office/drawing/2014/main" id="{C35D6AB0-ADA3-739E-40E7-7875EA535C5A}"/>
+              </a:ext>
+            </a:extLst>
+          </p:cNvPr>
+          <p:cNvSpPr/>
+          <p:nvPr/>
+        </p:nvSpPr>
+        <p:spPr>
+          <a:xfrm>
+            <a:off x="9933271" y="4717844"/>
+            <a:ext cx="370573" cy="272856"/>
+          </a:xfrm>
+          <a:prstGeom prst="rect">
+            <a:avLst/>
+          </a:prstGeom>
+          <a:solidFill>
+            <a:schemeClr val="bg1"/>
+          </a:solidFill>
+          <a:ln>
+            <a:noFill/>
+          </a:ln>
+        </p:spPr>
+        <p:style>
+          <a:lnRef idx="2">
+            <a:schemeClr val="accent1">
+              <a:shade val="15000"/>
+            </a:schemeClr>
+          </a:lnRef>
+          <a:fillRef idx="1">
+            <a:schemeClr val="accent1"/>
+          </a:fillRef>
+          <a:effectRef idx="0">
+            <a:schemeClr val="accent1"/>
+          </a:effectRef>
+          <a:fontRef idx="minor">
+            <a:schemeClr val="lt1"/>
+          </a:fontRef>
+        </p:style>
+        <p:txBody>
+          <a:bodyPr rtlCol="0" anchor="ctr"/>
+          <a:lstStyle/>
+          <a:p>
+            <a:pPr algn="ctr"/>
+            <a:endParaRPr lang="en-US"/>
+          </a:p>
+        </p:txBody>
+      </p:sp>
+      <mc:AlternateContent xmlns:mc="http://schemas.openxmlformats.org/markup-compatibility/2006">
+        <mc:Choice xmlns:a14="http://schemas.microsoft.com/office/drawing/2010/main" Requires="a14">
+          <p:sp>
+            <p:nvSpPr>
+              <p:cNvPr id="34" name="TextBox 33">
+                <a:extLst>
+                  <a:ext uri="{FF2B5EF4-FFF2-40B4-BE49-F238E27FC236}">
+                    <a16:creationId xmlns:a16="http://schemas.microsoft.com/office/drawing/2014/main" id="{633546F6-17D2-6B7A-BE8B-643B8C633E22}"/>
+                  </a:ext>
+                </a:extLst>
+              </p:cNvPr>
+              <p:cNvSpPr txBox="1"/>
+              <p:nvPr/>
+            </p:nvSpPr>
+            <p:spPr>
+              <a:xfrm>
+                <a:off x="9845790" y="4600498"/>
+                <a:ext cx="545534" cy="394339"/>
+              </a:xfrm>
+              <a:prstGeom prst="rect">
+                <a:avLst/>
+              </a:prstGeom>
+              <a:noFill/>
+            </p:spPr>
+            <p:txBody>
+              <a:bodyPr wrap="square" rtlCol="0">
+                <a:spAutoFit/>
+              </a:bodyPr>
+              <a:lstStyle/>
+              <a:p>
+                <a:pPr/>
+                <a14:m>
+                  <m:oMathPara xmlns:m="http://schemas.openxmlformats.org/officeDocument/2006/math">
+                    <m:oMathParaPr>
+                      <m:jc m:val="centerGroup"/>
+                    </m:oMathParaPr>
+                    <m:oMath xmlns:m="http://schemas.openxmlformats.org/officeDocument/2006/math">
+                      <m:sSub>
+                        <m:sSubPr>
+                          <m:ctrlPr>
+                            <a:rPr lang="en-US" i="1" smtClean="0">
+                              <a:solidFill>
+                                <a:srgbClr val="003D88"/>
+                              </a:solidFill>
+                            </a:rPr>
+                          </m:ctrlPr>
+                        </m:sSubPr>
+                        <m:e>
+                          <m:r>
+                            <m:rPr>
+                              <m:sty m:val="p"/>
+                            </m:rPr>
+                            <a:rPr lang="en-CA" b="0" i="0" smtClean="0">
+                              <a:solidFill>
+                                <a:srgbClr val="003D88"/>
+                              </a:solidFill>
+                            </a:rPr>
+                            <m:t>E</m:t>
+                          </m:r>
+                        </m:e>
+                        <m:sub>
+                          <m:sSub>
+                            <m:sSubPr>
+                              <m:ctrlPr>
+                                <a:rPr lang="en-US" i="1" smtClean="0">
+                                  <a:solidFill>
+                                    <a:srgbClr val="003D88"/>
+                                  </a:solidFill>
+                                </a:rPr>
+                              </m:ctrlPr>
+                            </m:sSubPr>
+                            <m:e>
+                              <m:r>
+                                <m:rPr>
+                                  <m:sty m:val="p"/>
+                                </m:rPr>
+                                <a:rPr lang="en-CA" b="0" i="0" smtClean="0">
+                                  <a:solidFill>
+                                    <a:srgbClr val="003D88"/>
+                                  </a:solidFill>
+                                </a:rPr>
+                                <m:t>r</m:t>
+                              </m:r>
+                            </m:e>
+                            <m:sub>
+                              <m:r>
+                                <m:rPr>
+                                  <m:sty m:val="p"/>
+                                </m:rPr>
+                                <a:rPr lang="en-CA" b="0" i="0" smtClean="0">
+                                  <a:solidFill>
+                                    <a:srgbClr val="003D88"/>
+                                  </a:solidFill>
+                                </a:rPr>
+                                <m:t>b</m:t>
+                              </m:r>
+                            </m:sub>
+                          </m:sSub>
+                        </m:sub>
+                      </m:sSub>
+                    </m:oMath>
+                  </m:oMathPara>
+                </a14:m>
+                <a:endParaRPr lang="en-US" dirty="0">
+                  <a:solidFill>
+                    <a:srgbClr val="003D88"/>
+                  </a:solidFill>
+                </a:endParaRPr>
+              </a:p>
+            </p:txBody>
+          </p:sp>
+        </mc:Choice>
+        <mc:Fallback>
+          <p:sp>
+            <p:nvSpPr>
+              <p:cNvPr id="34" name="TextBox 33">
+                <a:extLst>
+                  <a:ext uri="{FF2B5EF4-FFF2-40B4-BE49-F238E27FC236}">
+                    <a16:creationId xmlns:a16="http://schemas.microsoft.com/office/drawing/2014/main" id="{633546F6-17D2-6B7A-BE8B-643B8C633E22}"/>
+                  </a:ext>
+                </a:extLst>
+              </p:cNvPr>
+              <p:cNvSpPr txBox="1">
+                <a:spLocks noRot="1" noChangeAspect="1" noMove="1" noResize="1" noEditPoints="1" noAdjustHandles="1" noChangeArrowheads="1" noChangeShapeType="1" noTextEdit="1"/>
+              </p:cNvSpPr>
+              <p:nvPr/>
+            </p:nvSpPr>
+            <p:spPr>
+              <a:xfrm>
+                <a:off x="9845790" y="4600498"/>
+                <a:ext cx="545534" cy="394339"/>
+              </a:xfrm>
+              <a:prstGeom prst="rect">
+                <a:avLst/>
+              </a:prstGeom>
+              <a:blipFill>
+                <a:blip r:embed="rId10"/>
+                <a:stretch>
+                  <a:fillRect/>
+                </a:stretch>
+              </a:blipFill>
+            </p:spPr>
+            <p:txBody>
+              <a:bodyPr/>
+              <a:lstStyle/>
+              <a:p>
+                <a:r>
+                  <a:rPr lang="en-US">
+                    <a:noFill/>
+                  </a:rPr>
+                  <a:t> </a:t>
+                </a:r>
+              </a:p>
+            </p:txBody>
+          </p:sp>
+        </mc:Fallback>
+      </mc:AlternateContent>
+      <p:sp>
+        <p:nvSpPr>
+          <p:cNvPr id="39" name="Rectangle 38">
+            <a:extLst>
+              <a:ext uri="{FF2B5EF4-FFF2-40B4-BE49-F238E27FC236}">
+                <a16:creationId xmlns:a16="http://schemas.microsoft.com/office/drawing/2014/main" id="{C296534A-0FAD-1A3D-7758-774FAFC77624}"/>
+              </a:ext>
+            </a:extLst>
+          </p:cNvPr>
+          <p:cNvSpPr/>
+          <p:nvPr/>
+        </p:nvSpPr>
+        <p:spPr>
+          <a:xfrm>
+            <a:off x="10684042" y="4723226"/>
+            <a:ext cx="418699" cy="228452"/>
+          </a:xfrm>
+          <a:prstGeom prst="rect">
+            <a:avLst/>
+          </a:prstGeom>
+          <a:solidFill>
+            <a:schemeClr val="bg1"/>
+          </a:solidFill>
+          <a:ln>
+            <a:noFill/>
+          </a:ln>
+        </p:spPr>
+        <p:style>
+          <a:lnRef idx="2">
+            <a:schemeClr val="accent1">
+              <a:shade val="15000"/>
+            </a:schemeClr>
+          </a:lnRef>
+          <a:fillRef idx="1">
+            <a:schemeClr val="accent1"/>
+          </a:fillRef>
+          <a:effectRef idx="0">
+            <a:schemeClr val="accent1"/>
+          </a:effectRef>
+          <a:fontRef idx="minor">
+            <a:schemeClr val="lt1"/>
+          </a:fontRef>
+        </p:style>
+        <p:txBody>
+          <a:bodyPr rtlCol="0" anchor="ctr"/>
+          <a:lstStyle/>
+          <a:p>
+            <a:pPr algn="ctr"/>
+            <a:endParaRPr lang="en-US"/>
+          </a:p>
+        </p:txBody>
+      </p:sp>
+      <mc:AlternateContent xmlns:mc="http://schemas.openxmlformats.org/markup-compatibility/2006">
+        <mc:Choice xmlns:a14="http://schemas.microsoft.com/office/drawing/2010/main" Requires="a14">
+          <p:sp>
+            <p:nvSpPr>
+              <p:cNvPr id="35" name="TextBox 34">
+                <a:extLst>
+                  <a:ext uri="{FF2B5EF4-FFF2-40B4-BE49-F238E27FC236}">
+                    <a16:creationId xmlns:a16="http://schemas.microsoft.com/office/drawing/2014/main" id="{F4D21E3E-801E-D3C0-B51A-102310AA6C4A}"/>
+                  </a:ext>
+                </a:extLst>
+              </p:cNvPr>
+              <p:cNvSpPr txBox="1"/>
+              <p:nvPr/>
+            </p:nvSpPr>
+            <p:spPr>
+              <a:xfrm>
+                <a:off x="10583073" y="4600498"/>
+                <a:ext cx="545534" cy="394339"/>
+              </a:xfrm>
+              <a:prstGeom prst="rect">
+                <a:avLst/>
+              </a:prstGeom>
+              <a:noFill/>
+            </p:spPr>
+            <p:txBody>
+              <a:bodyPr wrap="square" rtlCol="0">
+                <a:spAutoFit/>
+              </a:bodyPr>
+              <a:lstStyle/>
+              <a:p>
+                <a:pPr/>
+                <a14:m>
+                  <m:oMathPara xmlns:m="http://schemas.openxmlformats.org/officeDocument/2006/math">
+                    <m:oMathParaPr>
+                      <m:jc m:val="centerGroup"/>
+                    </m:oMathParaPr>
+                    <m:oMath xmlns:m="http://schemas.openxmlformats.org/officeDocument/2006/math">
+                      <m:sSub>
+                        <m:sSubPr>
+                          <m:ctrlPr>
+                            <a:rPr lang="en-US" i="1" smtClean="0">
+                              <a:solidFill>
+                                <a:srgbClr val="DAA620"/>
+                              </a:solidFill>
+                            </a:rPr>
+                          </m:ctrlPr>
+                        </m:sSubPr>
+                        <m:e>
+                          <m:r>
+                            <m:rPr>
+                              <m:sty m:val="p"/>
+                            </m:rPr>
+                            <a:rPr lang="en-CA" b="0" i="0" smtClean="0">
+                              <a:solidFill>
+                                <a:srgbClr val="DAA620"/>
+                              </a:solidFill>
+                            </a:rPr>
+                            <m:t>E</m:t>
+                          </m:r>
+                        </m:e>
+                        <m:sub>
+                          <m:sSub>
+                            <m:sSubPr>
+                              <m:ctrlPr>
+                                <a:rPr lang="en-US" i="1" smtClean="0">
+                                  <a:solidFill>
+                                    <a:srgbClr val="DAA620"/>
+                                  </a:solidFill>
+                                </a:rPr>
+                              </m:ctrlPr>
+                            </m:sSubPr>
+                            <m:e>
+                              <m:r>
+                                <m:rPr>
+                                  <m:sty m:val="p"/>
+                                </m:rPr>
+                                <a:rPr lang="en-CA" b="0" i="0" smtClean="0">
+                                  <a:solidFill>
+                                    <a:srgbClr val="DAA620"/>
+                                  </a:solidFill>
+                                </a:rPr>
+                                <m:t>c</m:t>
+                              </m:r>
+                              <m:r>
+                                <a:rPr lang="en-CA" b="0" i="0" smtClean="0">
+                                  <a:solidFill>
+                                    <a:srgbClr val="DAA620"/>
+                                  </a:solidFill>
+                                </a:rPr>
+                                <m:t>2</m:t>
+                              </m:r>
+                            </m:e>
+                            <m:sub>
+                              <m:r>
+                                <m:rPr>
+                                  <m:sty m:val="p"/>
+                                </m:rPr>
+                                <a:rPr lang="en-CA" b="0" i="0" smtClean="0">
+                                  <a:solidFill>
+                                    <a:srgbClr val="DAA620"/>
+                                  </a:solidFill>
+                                </a:rPr>
+                                <m:t>b</m:t>
+                              </m:r>
+                            </m:sub>
+                          </m:sSub>
+                        </m:sub>
+                      </m:sSub>
+                    </m:oMath>
+                  </m:oMathPara>
+                </a14:m>
+                <a:endParaRPr lang="en-US" dirty="0"/>
+              </a:p>
+            </p:txBody>
+          </p:sp>
+        </mc:Choice>
+        <mc:Fallback>
+          <p:sp>
+            <p:nvSpPr>
+              <p:cNvPr id="35" name="TextBox 34">
+                <a:extLst>
+                  <a:ext uri="{FF2B5EF4-FFF2-40B4-BE49-F238E27FC236}">
+                    <a16:creationId xmlns:a16="http://schemas.microsoft.com/office/drawing/2014/main" id="{F4D21E3E-801E-D3C0-B51A-102310AA6C4A}"/>
+                  </a:ext>
+                </a:extLst>
+              </p:cNvPr>
+              <p:cNvSpPr txBox="1">
+                <a:spLocks noRot="1" noChangeAspect="1" noMove="1" noResize="1" noEditPoints="1" noAdjustHandles="1" noChangeArrowheads="1" noChangeShapeType="1" noTextEdit="1"/>
+              </p:cNvSpPr>
+              <p:nvPr/>
+            </p:nvSpPr>
+            <p:spPr>
+              <a:xfrm>
+                <a:off x="10583073" y="4600498"/>
+                <a:ext cx="545534" cy="394339"/>
+              </a:xfrm>
+              <a:prstGeom prst="rect">
+                <a:avLst/>
+              </a:prstGeom>
+              <a:blipFill>
+                <a:blip r:embed="rId11"/>
+                <a:stretch>
+                  <a:fillRect/>
+                </a:stretch>
+              </a:blipFill>
+            </p:spPr>
+            <p:txBody>
+              <a:bodyPr/>
+              <a:lstStyle/>
+              <a:p>
+                <a:r>
+                  <a:rPr lang="en-US">
+                    <a:noFill/>
+                  </a:rPr>
+                  <a:t> </a:t>
+                </a:r>
+              </a:p>
+            </p:txBody>
+          </p:sp>
+        </mc:Fallback>
+      </mc:AlternateContent>
+      <p:sp>
+        <p:nvSpPr>
+          <p:cNvPr id="42" name="Rectangle 41">
+            <a:extLst>
+              <a:ext uri="{FF2B5EF4-FFF2-40B4-BE49-F238E27FC236}">
+                <a16:creationId xmlns:a16="http://schemas.microsoft.com/office/drawing/2014/main" id="{46F42D6C-87D7-3BA0-4ED9-10CD1D60D10A}"/>
+              </a:ext>
+            </a:extLst>
+          </p:cNvPr>
+          <p:cNvSpPr/>
+          <p:nvPr/>
+        </p:nvSpPr>
+        <p:spPr>
+          <a:xfrm>
+            <a:off x="3204272" y="2916738"/>
+            <a:ext cx="222216" cy="177177"/>
+          </a:xfrm>
+          <a:prstGeom prst="rect">
+            <a:avLst/>
+          </a:prstGeom>
+          <a:solidFill>
+            <a:schemeClr val="bg1"/>
+          </a:solidFill>
+          <a:ln>
+            <a:noFill/>
+          </a:ln>
+        </p:spPr>
+        <p:style>
+          <a:lnRef idx="2">
+            <a:schemeClr val="accent1">
+              <a:shade val="15000"/>
+            </a:schemeClr>
+          </a:lnRef>
+          <a:fillRef idx="1">
+            <a:schemeClr val="accent1"/>
+          </a:fillRef>
+          <a:effectRef idx="0">
+            <a:schemeClr val="accent1"/>
+          </a:effectRef>
+          <a:fontRef idx="minor">
+            <a:schemeClr val="lt1"/>
+          </a:fontRef>
+        </p:style>
+        <p:txBody>
+          <a:bodyPr rtlCol="0" anchor="ctr"/>
+          <a:lstStyle/>
+          <a:p>
+            <a:pPr algn="ctr"/>
+            <a:endParaRPr lang="en-US"/>
+          </a:p>
+        </p:txBody>
+      </p:sp>
+      <p:sp>
+        <p:nvSpPr>
+          <p:cNvPr id="43" name="Rectangle 42">
+            <a:extLst>
+              <a:ext uri="{FF2B5EF4-FFF2-40B4-BE49-F238E27FC236}">
+                <a16:creationId xmlns:a16="http://schemas.microsoft.com/office/drawing/2014/main" id="{B1AEB282-5A36-5143-1377-4D4402B04314}"/>
+              </a:ext>
+            </a:extLst>
+          </p:cNvPr>
+          <p:cNvSpPr/>
+          <p:nvPr/>
+        </p:nvSpPr>
+        <p:spPr>
+          <a:xfrm>
+            <a:off x="3634046" y="4383228"/>
+            <a:ext cx="222216" cy="177177"/>
+          </a:xfrm>
+          <a:prstGeom prst="rect">
+            <a:avLst/>
+          </a:prstGeom>
+          <a:solidFill>
+            <a:schemeClr val="bg1"/>
+          </a:solidFill>
+          <a:ln>
+            <a:noFill/>
+          </a:ln>
+        </p:spPr>
+        <p:style>
+          <a:lnRef idx="2">
+            <a:schemeClr val="accent1">
+              <a:shade val="15000"/>
+            </a:schemeClr>
+          </a:lnRef>
+          <a:fillRef idx="1">
+            <a:schemeClr val="accent1"/>
+          </a:fillRef>
+          <a:effectRef idx="0">
+            <a:schemeClr val="accent1"/>
+          </a:effectRef>
+          <a:fontRef idx="minor">
+            <a:schemeClr val="lt1"/>
+          </a:fontRef>
+        </p:style>
+        <p:txBody>
+          <a:bodyPr rtlCol="0" anchor="ctr"/>
+          <a:lstStyle/>
+          <a:p>
+            <a:pPr algn="ctr"/>
+            <a:endParaRPr lang="en-US"/>
+          </a:p>
+        </p:txBody>
+      </p:sp>
+      <p:sp>
+        <p:nvSpPr>
+          <p:cNvPr id="41" name="TextBox 40">
+            <a:extLst>
+              <a:ext uri="{FF2B5EF4-FFF2-40B4-BE49-F238E27FC236}">
+                <a16:creationId xmlns:a16="http://schemas.microsoft.com/office/drawing/2014/main" id="{8FDF6C04-381C-31C7-6F24-568736C898B1}"/>
+              </a:ext>
+            </a:extLst>
+          </p:cNvPr>
+          <p:cNvSpPr txBox="1"/>
+          <p:nvPr/>
+        </p:nvSpPr>
+        <p:spPr>
+          <a:xfrm>
+            <a:off x="3587149" y="4169795"/>
+            <a:ext cx="914399" cy="461665"/>
+          </a:xfrm>
+          <a:prstGeom prst="rect">
+            <a:avLst/>
+          </a:prstGeom>
+          <a:noFill/>
+        </p:spPr>
+        <p:txBody>
+          <a:bodyPr wrap="square" rtlCol="0">
+            <a:spAutoFit/>
+          </a:bodyPr>
+          <a:lstStyle/>
+          <a:p>
+            <a:r>
+              <a:rPr lang="en-US" sz="2400" dirty="0"/>
+              <a:t>r</a:t>
+            </a:r>
+            <a:r>
+              <a:rPr lang="en-US" sz="2400" baseline="-25000" dirty="0"/>
+              <a:t>b</a:t>
+            </a:r>
+          </a:p>
+        </p:txBody>
+      </p:sp>
+      <p:sp>
+        <p:nvSpPr>
+          <p:cNvPr id="40" name="TextBox 39">
+            <a:extLst>
+              <a:ext uri="{FF2B5EF4-FFF2-40B4-BE49-F238E27FC236}">
+                <a16:creationId xmlns:a16="http://schemas.microsoft.com/office/drawing/2014/main" id="{7849E8BF-87EA-3C6E-DE4D-6E1445B22CC3}"/>
+              </a:ext>
+            </a:extLst>
+          </p:cNvPr>
+          <p:cNvSpPr txBox="1"/>
+          <p:nvPr/>
+        </p:nvSpPr>
+        <p:spPr>
+          <a:xfrm>
+            <a:off x="3148435" y="2819645"/>
+            <a:ext cx="1080248" cy="461665"/>
+          </a:xfrm>
+          <a:prstGeom prst="rect">
+            <a:avLst/>
+          </a:prstGeom>
+          <a:noFill/>
+        </p:spPr>
+        <p:txBody>
+          <a:bodyPr wrap="square" rtlCol="0">
+            <a:spAutoFit/>
+          </a:bodyPr>
+          <a:lstStyle/>
+          <a:p>
+            <a:r>
+              <a:rPr lang="en-US" sz="2400" dirty="0"/>
+              <a:t>c</a:t>
+            </a:r>
+            <a:r>
+              <a:rPr lang="en-US" sz="2400" baseline="-25000" dirty="0"/>
+              <a:t>2b</a:t>
+            </a:r>
+            <a:endParaRPr lang="en-US" sz="2400" dirty="0"/>
+          </a:p>
+        </p:txBody>
+      </p:sp>
+    </p:spTree>
+    <p:extLst>
+      <p:ext uri="{BB962C8B-B14F-4D97-AF65-F5344CB8AC3E}">
+        <p14:creationId xmlns:p14="http://schemas.microsoft.com/office/powerpoint/2010/main" val="1456515589"/>
+      </p:ext>
+    </p:extLst>
+  </p:cSld>
+  <p:clrMapOvr>
+    <a:masterClrMapping/>
+  </p:clrMapOvr>
+</p:sld>
+</file>
+
+<file path=ppt/slides/slide7.xml><?xml version="1.0" encoding="utf-8"?>
+<p:sld xmlns:a="http://schemas.openxmlformats.org/drawingml/2006/main" xmlns:r="http://schemas.openxmlformats.org/officeDocument/2006/relationships" xmlns:p="http://schemas.openxmlformats.org/presentationml/2006/main">
+  <p:cSld>
+    <p:spTree>
+      <p:nvGrpSpPr>
+        <p:cNvPr id="1" name="">
+          <a:extLst>
+            <a:ext uri="{FF2B5EF4-FFF2-40B4-BE49-F238E27FC236}">
+              <a16:creationId xmlns:a16="http://schemas.microsoft.com/office/drawing/2014/main" id="{D478DB4D-06EF-B8DF-79E9-70283EE4660A}"/>
+            </a:ext>
+          </a:extLst>
+        </p:cNvPr>
+        <p:cNvGrpSpPr/>
+        <p:nvPr/>
+      </p:nvGrpSpPr>
+      <p:grpSpPr>
+        <a:xfrm>
+          <a:off x="0" y="0"/>
+          <a:ext cx="0" cy="0"/>
+          <a:chOff x="0" y="0"/>
+          <a:chExt cx="0" cy="0"/>
+        </a:xfrm>
+      </p:grpSpPr>
+      <p:sp>
+        <p:nvSpPr>
+          <p:cNvPr id="4" name="Rounded Rectangle 3">
+            <a:extLst>
+              <a:ext uri="{FF2B5EF4-FFF2-40B4-BE49-F238E27FC236}">
+                <a16:creationId xmlns:a16="http://schemas.microsoft.com/office/drawing/2014/main" id="{AF1107AF-C7D0-4958-344D-FDA11F8CAC4B}"/>
+              </a:ext>
+            </a:extLst>
+          </p:cNvPr>
+          <p:cNvSpPr/>
+          <p:nvPr/>
+        </p:nvSpPr>
+        <p:spPr>
+          <a:xfrm>
+            <a:off x="2005148" y="1567542"/>
+            <a:ext cx="803366" cy="783767"/>
+          </a:xfrm>
+          <a:prstGeom prst="roundRect">
+            <a:avLst/>
+          </a:prstGeom>
+          <a:solidFill>
+            <a:schemeClr val="bg2"/>
+          </a:solidFill>
+          <a:ln>
+            <a:solidFill>
+              <a:schemeClr val="bg2">
+                <a:lumMod val="75000"/>
+              </a:schemeClr>
+            </a:solidFill>
+          </a:ln>
+        </p:spPr>
+        <p:style>
+          <a:lnRef idx="2">
+            <a:schemeClr val="accent1">
+              <a:shade val="15000"/>
+            </a:schemeClr>
+          </a:lnRef>
+          <a:fillRef idx="1">
+            <a:schemeClr val="accent1"/>
+          </a:fillRef>
+          <a:effectRef idx="0">
+            <a:schemeClr val="accent1"/>
+          </a:effectRef>
+          <a:fontRef idx="minor">
+            <a:schemeClr val="lt1"/>
+          </a:fontRef>
+        </p:style>
+        <p:txBody>
+          <a:bodyPr rtlCol="0" anchor="ctr"/>
+          <a:lstStyle/>
+          <a:p>
+            <a:pPr algn="ctr"/>
+            <a:r>
+              <a:rPr lang="en-US" sz="2400" dirty="0">
+                <a:solidFill>
+                  <a:schemeClr val="bg2">
+                    <a:lumMod val="75000"/>
+                  </a:schemeClr>
+                </a:solidFill>
+              </a:rPr>
+              <a:t>N</a:t>
+            </a:r>
+            <a:r>
+              <a:rPr lang="en-US" sz="2400" baseline="-25000" dirty="0">
+                <a:solidFill>
+                  <a:schemeClr val="bg2">
+                    <a:lumMod val="75000"/>
+                  </a:schemeClr>
+                </a:solidFill>
+              </a:rPr>
+              <a:t>1</a:t>
+            </a:r>
+          </a:p>
+        </p:txBody>
+      </p:sp>
+      <p:sp>
+        <p:nvSpPr>
+          <p:cNvPr id="6" name="Oval 5">
+            <a:extLst>
+              <a:ext uri="{FF2B5EF4-FFF2-40B4-BE49-F238E27FC236}">
+                <a16:creationId xmlns:a16="http://schemas.microsoft.com/office/drawing/2014/main" id="{3D8AA8BC-9F82-9DFD-BA1B-52C370D4A161}"/>
+              </a:ext>
+            </a:extLst>
+          </p:cNvPr>
+          <p:cNvSpPr/>
+          <p:nvPr/>
+        </p:nvSpPr>
+        <p:spPr>
+          <a:xfrm>
+            <a:off x="2005148" y="3944982"/>
+            <a:ext cx="875212" cy="862149"/>
+          </a:xfrm>
+          <a:prstGeom prst="ellipse">
+            <a:avLst/>
+          </a:prstGeom>
+          <a:solidFill>
+            <a:schemeClr val="bg2"/>
+          </a:solidFill>
+          <a:ln>
+            <a:solidFill>
+              <a:schemeClr val="bg2">
+                <a:lumMod val="75000"/>
+              </a:schemeClr>
+            </a:solidFill>
+          </a:ln>
+        </p:spPr>
+        <p:style>
+          <a:lnRef idx="2">
+            <a:schemeClr val="accent1">
+              <a:shade val="15000"/>
+            </a:schemeClr>
+          </a:lnRef>
+          <a:fillRef idx="1">
+            <a:schemeClr val="accent1"/>
+          </a:fillRef>
+          <a:effectRef idx="0">
+            <a:schemeClr val="accent1"/>
+          </a:effectRef>
+          <a:fontRef idx="minor">
+            <a:schemeClr val="lt1"/>
+          </a:fontRef>
+        </p:style>
+        <p:txBody>
+          <a:bodyPr rtlCol="0" anchor="ctr"/>
+          <a:lstStyle/>
+          <a:p>
+            <a:pPr algn="ctr"/>
+            <a:r>
+              <a:rPr lang="en-US" sz="2000" dirty="0">
+                <a:solidFill>
+                  <a:schemeClr val="bg2">
+                    <a:lumMod val="75000"/>
+                  </a:schemeClr>
+                </a:solidFill>
+              </a:rPr>
+              <a:t>R</a:t>
+            </a:r>
+            <a:r>
+              <a:rPr lang="en-US" sz="2000" baseline="-25000" dirty="0">
+                <a:solidFill>
+                  <a:schemeClr val="bg2">
+                    <a:lumMod val="75000"/>
+                  </a:schemeClr>
+                </a:solidFill>
+              </a:rPr>
+              <a:t>a</a:t>
+            </a:r>
+          </a:p>
+        </p:txBody>
+      </p:sp>
+      <p:sp>
+        <p:nvSpPr>
+          <p:cNvPr id="7" name="Oval 6">
+            <a:extLst>
+              <a:ext uri="{FF2B5EF4-FFF2-40B4-BE49-F238E27FC236}">
+                <a16:creationId xmlns:a16="http://schemas.microsoft.com/office/drawing/2014/main" id="{D7A4BEA1-1C7C-8E5C-3EF3-4CB5B1EBA1F8}"/>
+              </a:ext>
+            </a:extLst>
+          </p:cNvPr>
+          <p:cNvSpPr/>
+          <p:nvPr/>
+        </p:nvSpPr>
+        <p:spPr>
+          <a:xfrm>
+            <a:off x="4299857" y="3944982"/>
+            <a:ext cx="875212" cy="862149"/>
+          </a:xfrm>
+          <a:prstGeom prst="ellipse">
+            <a:avLst/>
+          </a:prstGeom>
+          <a:solidFill>
+            <a:schemeClr val="bg2"/>
+          </a:solidFill>
+          <a:ln>
+            <a:solidFill>
+              <a:schemeClr val="bg2">
+                <a:lumMod val="75000"/>
+              </a:schemeClr>
+            </a:solidFill>
+          </a:ln>
+        </p:spPr>
+        <p:style>
+          <a:lnRef idx="2">
+            <a:schemeClr val="accent1">
+              <a:shade val="15000"/>
+            </a:schemeClr>
+          </a:lnRef>
+          <a:fillRef idx="1">
+            <a:schemeClr val="accent1"/>
+          </a:fillRef>
+          <a:effectRef idx="0">
+            <a:schemeClr val="accent1"/>
+          </a:effectRef>
+          <a:fontRef idx="minor">
+            <a:schemeClr val="lt1"/>
+          </a:fontRef>
+        </p:style>
+        <p:txBody>
+          <a:bodyPr rtlCol="0" anchor="ctr"/>
+          <a:lstStyle/>
+          <a:p>
+            <a:pPr algn="ctr"/>
+            <a:r>
+              <a:rPr lang="en-US" sz="2400" dirty="0">
+                <a:solidFill>
+                  <a:schemeClr val="bg2">
+                    <a:lumMod val="75000"/>
+                  </a:schemeClr>
+                </a:solidFill>
+              </a:rPr>
+              <a:t>R</a:t>
+            </a:r>
+            <a:r>
+              <a:rPr lang="en-US" sz="2400" baseline="-25000" dirty="0">
+                <a:solidFill>
+                  <a:schemeClr val="bg2">
+                    <a:lumMod val="75000"/>
+                  </a:schemeClr>
+                </a:solidFill>
+              </a:rPr>
+              <a:t>b</a:t>
+            </a:r>
+            <a:endParaRPr lang="en-US" baseline="-25000" dirty="0">
+              <a:solidFill>
+                <a:schemeClr val="bg2">
+                  <a:lumMod val="75000"/>
+                </a:schemeClr>
+              </a:solidFill>
+            </a:endParaRPr>
+          </a:p>
+        </p:txBody>
+      </p:sp>
+      <p:sp>
+        <p:nvSpPr>
+          <p:cNvPr id="24" name="TextBox 23">
+            <a:extLst>
+              <a:ext uri="{FF2B5EF4-FFF2-40B4-BE49-F238E27FC236}">
+                <a16:creationId xmlns:a16="http://schemas.microsoft.com/office/drawing/2014/main" id="{6DA00BF8-F4B2-C7B5-66E2-7096EB778268}"/>
+              </a:ext>
+            </a:extLst>
+          </p:cNvPr>
+          <p:cNvSpPr txBox="1"/>
+          <p:nvPr/>
+        </p:nvSpPr>
+        <p:spPr>
+          <a:xfrm>
+            <a:off x="1524397" y="4905096"/>
+            <a:ext cx="945756" cy="461665"/>
+          </a:xfrm>
+          <a:prstGeom prst="rect">
+            <a:avLst/>
+          </a:prstGeom>
+          <a:noFill/>
+        </p:spPr>
+        <p:txBody>
+          <a:bodyPr wrap="square" rtlCol="0">
+            <a:spAutoFit/>
+          </a:bodyPr>
+          <a:lstStyle/>
+          <a:p>
+            <a:r>
+              <a:rPr lang="en-US" sz="2400" dirty="0"/>
+              <a:t>r</a:t>
+            </a:r>
+            <a:r>
+              <a:rPr lang="en-US" sz="2400" baseline="-25000" dirty="0"/>
+              <a:t>a</a:t>
+            </a:r>
+          </a:p>
+        </p:txBody>
+      </p:sp>
+      <p:sp>
+        <p:nvSpPr>
+          <p:cNvPr id="25" name="TextBox 24">
+            <a:extLst>
+              <a:ext uri="{FF2B5EF4-FFF2-40B4-BE49-F238E27FC236}">
+                <a16:creationId xmlns:a16="http://schemas.microsoft.com/office/drawing/2014/main" id="{104DB52E-9259-C3C1-626A-B9E806B59CC6}"/>
+              </a:ext>
+            </a:extLst>
+          </p:cNvPr>
+          <p:cNvSpPr txBox="1"/>
+          <p:nvPr/>
+        </p:nvSpPr>
+        <p:spPr>
+          <a:xfrm>
+            <a:off x="3749867" y="2086311"/>
+            <a:ext cx="1019608" cy="400110"/>
+          </a:xfrm>
+          <a:prstGeom prst="rect">
+            <a:avLst/>
+          </a:prstGeom>
+          <a:noFill/>
+        </p:spPr>
+        <p:txBody>
+          <a:bodyPr wrap="square" rtlCol="0">
+            <a:spAutoFit/>
+          </a:bodyPr>
+          <a:lstStyle/>
+          <a:p>
+            <a:r>
+              <a:rPr lang="en-US" sz="2000" dirty="0">
+                <a:solidFill>
+                  <a:schemeClr val="bg2">
+                    <a:lumMod val="75000"/>
+                  </a:schemeClr>
+                </a:solidFill>
+              </a:rPr>
+              <a:t>c</a:t>
+            </a:r>
+            <a:r>
+              <a:rPr lang="en-US" sz="2000" baseline="-25000" dirty="0">
+                <a:solidFill>
+                  <a:schemeClr val="bg2">
+                    <a:lumMod val="75000"/>
+                  </a:schemeClr>
+                </a:solidFill>
+              </a:rPr>
+              <a:t>2a</a:t>
+            </a:r>
+          </a:p>
+        </p:txBody>
+      </p:sp>
+      <p:sp>
+        <p:nvSpPr>
+          <p:cNvPr id="26" name="TextBox 25">
+            <a:extLst>
+              <a:ext uri="{FF2B5EF4-FFF2-40B4-BE49-F238E27FC236}">
+                <a16:creationId xmlns:a16="http://schemas.microsoft.com/office/drawing/2014/main" id="{B9B4B76B-72F8-E849-AE8F-EAEA23160241}"/>
+              </a:ext>
+            </a:extLst>
+          </p:cNvPr>
+          <p:cNvSpPr txBox="1"/>
+          <p:nvPr/>
+        </p:nvSpPr>
+        <p:spPr>
+          <a:xfrm>
+            <a:off x="2894648" y="2103294"/>
+            <a:ext cx="896732" cy="400110"/>
+          </a:xfrm>
+          <a:prstGeom prst="rect">
+            <a:avLst/>
+          </a:prstGeom>
+          <a:noFill/>
+        </p:spPr>
+        <p:txBody>
+          <a:bodyPr wrap="square" rtlCol="0">
+            <a:spAutoFit/>
+          </a:bodyPr>
+          <a:lstStyle/>
+          <a:p>
+            <a:r>
+              <a:rPr lang="en-US" sz="2000" dirty="0">
+                <a:solidFill>
+                  <a:schemeClr val="bg2">
+                    <a:lumMod val="75000"/>
+                  </a:schemeClr>
+                </a:solidFill>
+              </a:rPr>
+              <a:t>c</a:t>
+            </a:r>
+            <a:r>
+              <a:rPr lang="en-US" sz="2000" baseline="-25000" dirty="0">
+                <a:solidFill>
+                  <a:schemeClr val="bg2">
+                    <a:lumMod val="75000"/>
+                  </a:schemeClr>
+                </a:solidFill>
+              </a:rPr>
+              <a:t>1b</a:t>
+            </a:r>
+          </a:p>
+        </p:txBody>
+      </p:sp>
+      <p:sp>
+        <p:nvSpPr>
+          <p:cNvPr id="27" name="TextBox 26">
+            <a:extLst>
+              <a:ext uri="{FF2B5EF4-FFF2-40B4-BE49-F238E27FC236}">
+                <a16:creationId xmlns:a16="http://schemas.microsoft.com/office/drawing/2014/main" id="{857E7AC5-02DE-0023-8072-1608CB8D64FE}"/>
+              </a:ext>
+            </a:extLst>
+          </p:cNvPr>
+          <p:cNvSpPr txBox="1"/>
+          <p:nvPr/>
+        </p:nvSpPr>
+        <p:spPr>
+          <a:xfrm>
+            <a:off x="4741818" y="2954774"/>
+            <a:ext cx="1080248" cy="400110"/>
+          </a:xfrm>
+          <a:prstGeom prst="rect">
+            <a:avLst/>
+          </a:prstGeom>
+          <a:noFill/>
+        </p:spPr>
+        <p:txBody>
+          <a:bodyPr wrap="square" rtlCol="0">
+            <a:spAutoFit/>
+          </a:bodyPr>
+          <a:lstStyle/>
+          <a:p>
+            <a:r>
+              <a:rPr lang="en-US" sz="2000" dirty="0">
+                <a:solidFill>
+                  <a:schemeClr val="bg2">
+                    <a:lumMod val="75000"/>
+                  </a:schemeClr>
+                </a:solidFill>
+              </a:rPr>
+              <a:t>c</a:t>
+            </a:r>
+            <a:r>
+              <a:rPr lang="en-US" sz="2000" baseline="-25000" dirty="0">
+                <a:solidFill>
+                  <a:schemeClr val="bg2">
+                    <a:lumMod val="75000"/>
+                  </a:schemeClr>
+                </a:solidFill>
+              </a:rPr>
+              <a:t>2b</a:t>
+            </a:r>
+            <a:endParaRPr lang="en-US" sz="2000" dirty="0">
+              <a:solidFill>
+                <a:schemeClr val="bg2">
+                  <a:lumMod val="75000"/>
+                </a:schemeClr>
+              </a:solidFill>
+            </a:endParaRPr>
+          </a:p>
+        </p:txBody>
+      </p:sp>
+      <p:sp>
+        <p:nvSpPr>
+          <p:cNvPr id="28" name="TextBox 27">
+            <a:extLst>
+              <a:ext uri="{FF2B5EF4-FFF2-40B4-BE49-F238E27FC236}">
+                <a16:creationId xmlns:a16="http://schemas.microsoft.com/office/drawing/2014/main" id="{C0F6BFCC-D0B9-B135-4362-A062F9C3D730}"/>
+              </a:ext>
+            </a:extLst>
+          </p:cNvPr>
+          <p:cNvSpPr txBox="1"/>
+          <p:nvPr/>
+        </p:nvSpPr>
+        <p:spPr>
+          <a:xfrm>
+            <a:off x="1970030" y="2849686"/>
+            <a:ext cx="1175756" cy="400110"/>
+          </a:xfrm>
+          <a:prstGeom prst="rect">
+            <a:avLst/>
+          </a:prstGeom>
+          <a:noFill/>
+        </p:spPr>
+        <p:txBody>
+          <a:bodyPr wrap="square" rtlCol="0">
+            <a:spAutoFit/>
+          </a:bodyPr>
+          <a:lstStyle/>
+          <a:p>
+            <a:r>
+              <a:rPr lang="en-US" sz="2000" dirty="0">
+                <a:solidFill>
+                  <a:schemeClr val="bg2">
+                    <a:lumMod val="75000"/>
+                  </a:schemeClr>
+                </a:solidFill>
+              </a:rPr>
+              <a:t>c</a:t>
+            </a:r>
+            <a:r>
+              <a:rPr lang="en-US" sz="2000" baseline="-25000" dirty="0">
+                <a:solidFill>
+                  <a:schemeClr val="bg2">
+                    <a:lumMod val="75000"/>
+                  </a:schemeClr>
+                </a:solidFill>
+              </a:rPr>
+              <a:t>1a</a:t>
+            </a:r>
+          </a:p>
+        </p:txBody>
+      </p:sp>
+      <p:sp>
+        <p:nvSpPr>
+          <p:cNvPr id="35" name="TextBox 34">
+            <a:extLst>
+              <a:ext uri="{FF2B5EF4-FFF2-40B4-BE49-F238E27FC236}">
+                <a16:creationId xmlns:a16="http://schemas.microsoft.com/office/drawing/2014/main" id="{8DBD0FA7-74A0-F60F-5B22-92745E29F29E}"/>
+              </a:ext>
+            </a:extLst>
+          </p:cNvPr>
+          <p:cNvSpPr txBox="1"/>
+          <p:nvPr/>
+        </p:nvSpPr>
+        <p:spPr>
+          <a:xfrm>
+            <a:off x="631172" y="1780641"/>
+            <a:ext cx="494046" cy="400110"/>
+          </a:xfrm>
+          <a:prstGeom prst="rect">
+            <a:avLst/>
+          </a:prstGeom>
+          <a:noFill/>
+        </p:spPr>
+        <p:txBody>
+          <a:bodyPr wrap="none" rtlCol="0">
+            <a:spAutoFit/>
+          </a:bodyPr>
+          <a:lstStyle/>
+          <a:p>
+            <a:r>
+              <a:rPr lang="en-US" sz="2000" dirty="0">
+                <a:solidFill>
+                  <a:schemeClr val="bg2">
+                    <a:lumMod val="75000"/>
+                  </a:schemeClr>
+                </a:solidFill>
+              </a:rPr>
+              <a:t>m</a:t>
+            </a:r>
+            <a:r>
+              <a:rPr lang="en-US" sz="2000" baseline="-25000" dirty="0">
+                <a:solidFill>
+                  <a:schemeClr val="bg2">
+                    <a:lumMod val="75000"/>
+                  </a:schemeClr>
+                </a:solidFill>
+              </a:rPr>
+              <a:t>1</a:t>
+            </a:r>
+          </a:p>
+        </p:txBody>
+      </p:sp>
+      <p:sp>
+        <p:nvSpPr>
+          <p:cNvPr id="37" name="TextBox 36">
+            <a:extLst>
+              <a:ext uri="{FF2B5EF4-FFF2-40B4-BE49-F238E27FC236}">
+                <a16:creationId xmlns:a16="http://schemas.microsoft.com/office/drawing/2014/main" id="{B7B5F1A6-52BF-85CF-DEB8-96BA3E5C1330}"/>
+              </a:ext>
+            </a:extLst>
+          </p:cNvPr>
+          <p:cNvSpPr txBox="1"/>
+          <p:nvPr/>
+        </p:nvSpPr>
+        <p:spPr>
+          <a:xfrm>
+            <a:off x="6077726" y="1780641"/>
+            <a:ext cx="494046" cy="400110"/>
+          </a:xfrm>
+          <a:prstGeom prst="rect">
+            <a:avLst/>
+          </a:prstGeom>
+          <a:noFill/>
+        </p:spPr>
+        <p:txBody>
+          <a:bodyPr wrap="none" rtlCol="0">
+            <a:spAutoFit/>
+          </a:bodyPr>
+          <a:lstStyle/>
+          <a:p>
+            <a:r>
+              <a:rPr lang="en-US" sz="2000" dirty="0">
+                <a:solidFill>
+                  <a:schemeClr val="bg2">
+                    <a:lumMod val="75000"/>
+                  </a:schemeClr>
+                </a:solidFill>
+              </a:rPr>
+              <a:t>m</a:t>
+            </a:r>
+            <a:r>
+              <a:rPr lang="en-US" sz="2000" baseline="-25000" dirty="0">
+                <a:solidFill>
+                  <a:schemeClr val="bg2">
+                    <a:lumMod val="75000"/>
+                  </a:schemeClr>
+                </a:solidFill>
+              </a:rPr>
+              <a:t>2</a:t>
+            </a:r>
+          </a:p>
+        </p:txBody>
+      </p:sp>
+      <p:sp>
+        <p:nvSpPr>
+          <p:cNvPr id="2" name="Rounded Rectangle 1">
+            <a:extLst>
+              <a:ext uri="{FF2B5EF4-FFF2-40B4-BE49-F238E27FC236}">
+                <a16:creationId xmlns:a16="http://schemas.microsoft.com/office/drawing/2014/main" id="{9932BECC-99D4-A952-CA5D-C970154320A2}"/>
+              </a:ext>
+            </a:extLst>
+          </p:cNvPr>
+          <p:cNvSpPr/>
+          <p:nvPr/>
+        </p:nvSpPr>
+        <p:spPr>
+          <a:xfrm>
+            <a:off x="4335780" y="1561854"/>
+            <a:ext cx="803366" cy="783767"/>
+          </a:xfrm>
+          <a:prstGeom prst="roundRect">
+            <a:avLst/>
+          </a:prstGeom>
+          <a:solidFill>
+            <a:schemeClr val="bg2"/>
+          </a:solidFill>
+          <a:ln>
+            <a:solidFill>
+              <a:schemeClr val="bg2">
+                <a:lumMod val="75000"/>
+              </a:schemeClr>
+            </a:solidFill>
+          </a:ln>
+        </p:spPr>
+        <p:style>
+          <a:lnRef idx="2">
+            <a:schemeClr val="accent1">
+              <a:shade val="15000"/>
+            </a:schemeClr>
+          </a:lnRef>
+          <a:fillRef idx="1">
+            <a:schemeClr val="accent1"/>
+          </a:fillRef>
+          <a:effectRef idx="0">
+            <a:schemeClr val="accent1"/>
+          </a:effectRef>
+          <a:fontRef idx="minor">
+            <a:schemeClr val="lt1"/>
+          </a:fontRef>
+        </p:style>
+        <p:txBody>
+          <a:bodyPr rtlCol="0" anchor="ctr"/>
+          <a:lstStyle/>
+          <a:p>
+            <a:pPr algn="ctr"/>
+            <a:r>
+              <a:rPr lang="en-US" sz="2400" dirty="0">
+                <a:solidFill>
+                  <a:schemeClr val="bg2">
+                    <a:lumMod val="75000"/>
+                  </a:schemeClr>
+                </a:solidFill>
+              </a:rPr>
+              <a:t>N</a:t>
+            </a:r>
+            <a:r>
+              <a:rPr lang="en-US" sz="2400" baseline="-25000" dirty="0">
+                <a:solidFill>
+                  <a:schemeClr val="bg2">
+                    <a:lumMod val="75000"/>
+                  </a:schemeClr>
+                </a:solidFill>
+              </a:rPr>
+              <a:t>2</a:t>
+            </a:r>
+            <a:endParaRPr lang="en-US" baseline="-25000" dirty="0">
+              <a:solidFill>
+                <a:schemeClr val="bg2">
+                  <a:lumMod val="75000"/>
+                </a:schemeClr>
+              </a:solidFill>
+            </a:endParaRPr>
+          </a:p>
+        </p:txBody>
+      </p:sp>
+      <p:pic>
+        <p:nvPicPr>
+          <p:cNvPr id="8" name="Graphic 7" descr="Line arrow: Rotate right with solid fill">
+            <a:extLst>
+              <a:ext uri="{FF2B5EF4-FFF2-40B4-BE49-F238E27FC236}">
+                <a16:creationId xmlns:a16="http://schemas.microsoft.com/office/drawing/2014/main" id="{6C14A8FC-8756-F4B0-E40F-11C1E83E5305}"/>
+              </a:ext>
+            </a:extLst>
+          </p:cNvPr>
+          <p:cNvPicPr>
+            <a:picLocks noChangeAspect="1"/>
+          </p:cNvPicPr>
+          <p:nvPr/>
+        </p:nvPicPr>
+        <p:blipFill>
+          <a:blip r:embed="rId2">
+            <a:extLst>
+              <a:ext uri="{96DAC541-7B7A-43D3-8B79-37D633B846F1}">
+                <asvg:svgBlip xmlns:asvg="http://schemas.microsoft.com/office/drawing/2016/SVG/main" r:embed="rId3"/>
+              </a:ext>
+            </a:extLst>
+          </a:blip>
+          <a:stretch>
+            <a:fillRect/>
+          </a:stretch>
+        </p:blipFill>
+        <p:spPr>
+          <a:xfrm rot="9532772">
+            <a:off x="4655052" y="4425622"/>
+            <a:ext cx="914400" cy="914400"/>
+          </a:xfrm>
+          <a:prstGeom prst="rect">
+            <a:avLst/>
+          </a:prstGeom>
+        </p:spPr>
+      </p:pic>
+      <p:pic>
+        <p:nvPicPr>
+          <p:cNvPr id="9" name="Graphic 8" descr="Line arrow: Rotate right with solid fill">
+            <a:extLst>
+              <a:ext uri="{FF2B5EF4-FFF2-40B4-BE49-F238E27FC236}">
+                <a16:creationId xmlns:a16="http://schemas.microsoft.com/office/drawing/2014/main" id="{1D48737D-3ADD-35A5-37F7-921A9E001E3D}"/>
+              </a:ext>
+            </a:extLst>
+          </p:cNvPr>
+          <p:cNvPicPr>
+            <a:picLocks noChangeAspect="1"/>
+          </p:cNvPicPr>
+          <p:nvPr/>
+        </p:nvPicPr>
+        <p:blipFill>
+          <a:blip r:embed="rId4">
+            <a:extLst>
+              <a:ext uri="{96DAC541-7B7A-43D3-8B79-37D633B846F1}">
+                <asvg:svgBlip xmlns:asvg="http://schemas.microsoft.com/office/drawing/2016/SVG/main" r:embed="rId5"/>
+              </a:ext>
+            </a:extLst>
+          </a:blip>
+          <a:stretch>
+            <a:fillRect/>
+          </a:stretch>
+        </p:blipFill>
+        <p:spPr>
+          <a:xfrm rot="13588340">
+            <a:off x="1639005" y="4458046"/>
+            <a:ext cx="914400" cy="914400"/>
+          </a:xfrm>
+          <a:prstGeom prst="rect">
+            <a:avLst/>
+          </a:prstGeom>
+        </p:spPr>
+      </p:pic>
+      <p:sp>
+        <p:nvSpPr>
+          <p:cNvPr id="13" name="TextBox 12">
+            <a:extLst>
+              <a:ext uri="{FF2B5EF4-FFF2-40B4-BE49-F238E27FC236}">
+                <a16:creationId xmlns:a16="http://schemas.microsoft.com/office/drawing/2014/main" id="{807E8711-1E91-CCD3-B021-CDF797AEA1B3}"/>
+              </a:ext>
+            </a:extLst>
+          </p:cNvPr>
+          <p:cNvSpPr txBox="1"/>
+          <p:nvPr/>
+        </p:nvSpPr>
+        <p:spPr>
+          <a:xfrm>
+            <a:off x="5399134" y="4962351"/>
+            <a:ext cx="914399" cy="461665"/>
+          </a:xfrm>
+          <a:prstGeom prst="rect">
+            <a:avLst/>
+          </a:prstGeom>
+          <a:noFill/>
+        </p:spPr>
+        <p:txBody>
+          <a:bodyPr wrap="square" rtlCol="0">
+            <a:spAutoFit/>
+          </a:bodyPr>
+          <a:lstStyle/>
+          <a:p>
+            <a:r>
+              <a:rPr lang="en-US" sz="2400" dirty="0"/>
+              <a:t>r</a:t>
+            </a:r>
+            <a:r>
+              <a:rPr lang="en-US" sz="2400" baseline="-25000" dirty="0"/>
+              <a:t>b</a:t>
+            </a:r>
+          </a:p>
+        </p:txBody>
+      </p:sp>
+      <p:pic>
+        <p:nvPicPr>
+          <p:cNvPr id="16" name="Graphic 15" descr="Line arrow: Straight with solid fill">
+            <a:extLst>
+              <a:ext uri="{FF2B5EF4-FFF2-40B4-BE49-F238E27FC236}">
+                <a16:creationId xmlns:a16="http://schemas.microsoft.com/office/drawing/2014/main" id="{8D9FB6EA-3895-E4EF-8952-3ABEEA81E3E0}"/>
+              </a:ext>
+            </a:extLst>
+          </p:cNvPr>
+          <p:cNvPicPr>
+            <a:picLocks noChangeAspect="1"/>
+          </p:cNvPicPr>
+          <p:nvPr/>
+        </p:nvPicPr>
+        <p:blipFill>
+          <a:blip r:embed="rId6">
+            <a:extLst>
+              <a:ext uri="{96DAC541-7B7A-43D3-8B79-37D633B846F1}">
+                <asvg:svgBlip xmlns:asvg="http://schemas.microsoft.com/office/drawing/2016/SVG/main" r:embed="rId7"/>
+              </a:ext>
+            </a:extLst>
+          </a:blip>
+          <a:stretch>
+            <a:fillRect/>
+          </a:stretch>
+        </p:blipFill>
+        <p:spPr>
+          <a:xfrm>
+            <a:off x="1054825" y="1508107"/>
+            <a:ext cx="914400" cy="914400"/>
+          </a:xfrm>
+          <a:prstGeom prst="rect">
+            <a:avLst/>
+          </a:prstGeom>
+        </p:spPr>
+      </p:pic>
+      <p:pic>
+        <p:nvPicPr>
+          <p:cNvPr id="19" name="Graphic 18" descr="Line arrow: Straight with solid fill">
+            <a:extLst>
+              <a:ext uri="{FF2B5EF4-FFF2-40B4-BE49-F238E27FC236}">
+                <a16:creationId xmlns:a16="http://schemas.microsoft.com/office/drawing/2014/main" id="{B2235172-F21D-4A73-94AE-01FA8D70FA35}"/>
+              </a:ext>
+            </a:extLst>
+          </p:cNvPr>
+          <p:cNvPicPr>
+            <a:picLocks noChangeAspect="1"/>
+          </p:cNvPicPr>
+          <p:nvPr/>
+        </p:nvPicPr>
+        <p:blipFill>
+          <a:blip r:embed="rId6">
+            <a:extLst>
+              <a:ext uri="{96DAC541-7B7A-43D3-8B79-37D633B846F1}">
+                <asvg:svgBlip xmlns:asvg="http://schemas.microsoft.com/office/drawing/2016/SVG/main" r:embed="rId7"/>
+              </a:ext>
+            </a:extLst>
+          </a:blip>
+          <a:stretch>
+            <a:fillRect/>
+          </a:stretch>
+        </p:blipFill>
+        <p:spPr>
+          <a:xfrm rot="10800000">
+            <a:off x="5175069" y="1496537"/>
+            <a:ext cx="914400" cy="914400"/>
+          </a:xfrm>
+          <a:prstGeom prst="rect">
+            <a:avLst/>
+          </a:prstGeom>
+        </p:spPr>
+      </p:pic>
+      <p:pic>
+        <p:nvPicPr>
+          <p:cNvPr id="20" name="Graphic 19" descr="Arrow Up with solid fill">
+            <a:extLst>
+              <a:ext uri="{FF2B5EF4-FFF2-40B4-BE49-F238E27FC236}">
+                <a16:creationId xmlns:a16="http://schemas.microsoft.com/office/drawing/2014/main" id="{AD0398B1-DEA5-5CE3-5D9E-160F61A2DB19}"/>
+              </a:ext>
+            </a:extLst>
+          </p:cNvPr>
+          <p:cNvPicPr>
+            <a:picLocks noChangeAspect="1"/>
+          </p:cNvPicPr>
+          <p:nvPr/>
+        </p:nvPicPr>
+        <p:blipFill>
+          <a:blip r:embed="rId8">
+            <a:extLst>
+              <a:ext uri="{96DAC541-7B7A-43D3-8B79-37D633B846F1}">
+                <asvg:svgBlip xmlns:asvg="http://schemas.microsoft.com/office/drawing/2016/SVG/main" r:embed="rId9"/>
+              </a:ext>
+            </a:extLst>
+          </a:blip>
+          <a:stretch>
+            <a:fillRect/>
+          </a:stretch>
+        </p:blipFill>
+        <p:spPr>
+          <a:xfrm>
+            <a:off x="1976128" y="2358739"/>
+            <a:ext cx="914400" cy="1561401"/>
+          </a:xfrm>
+          <a:prstGeom prst="rect">
+            <a:avLst/>
+          </a:prstGeom>
+        </p:spPr>
+      </p:pic>
+      <p:pic>
+        <p:nvPicPr>
+          <p:cNvPr id="29" name="Graphic 28" descr="Arrow Up with solid fill">
+            <a:extLst>
+              <a:ext uri="{FF2B5EF4-FFF2-40B4-BE49-F238E27FC236}">
+                <a16:creationId xmlns:a16="http://schemas.microsoft.com/office/drawing/2014/main" id="{91F25E93-04E4-989F-E0DD-35D7ACD7A9F8}"/>
+              </a:ext>
+            </a:extLst>
+          </p:cNvPr>
+          <p:cNvPicPr>
+            <a:picLocks noChangeAspect="1"/>
+          </p:cNvPicPr>
+          <p:nvPr/>
+        </p:nvPicPr>
+        <p:blipFill>
+          <a:blip r:embed="rId8">
+            <a:extLst>
+              <a:ext uri="{96DAC541-7B7A-43D3-8B79-37D633B846F1}">
+                <asvg:svgBlip xmlns:asvg="http://schemas.microsoft.com/office/drawing/2016/SVG/main" r:embed="rId9"/>
+              </a:ext>
+            </a:extLst>
+          </a:blip>
+          <a:stretch>
+            <a:fillRect/>
+          </a:stretch>
+        </p:blipFill>
+        <p:spPr>
+          <a:xfrm rot="2623736">
+            <a:off x="3116987" y="1972502"/>
+            <a:ext cx="914400" cy="2407291"/>
+          </a:xfrm>
+          <a:prstGeom prst="rect">
+            <a:avLst/>
+          </a:prstGeom>
+        </p:spPr>
+      </p:pic>
+      <p:pic>
+        <p:nvPicPr>
+          <p:cNvPr id="32" name="Graphic 31" descr="Arrow Up with solid fill">
+            <a:extLst>
+              <a:ext uri="{FF2B5EF4-FFF2-40B4-BE49-F238E27FC236}">
+                <a16:creationId xmlns:a16="http://schemas.microsoft.com/office/drawing/2014/main" id="{ABE8B96F-6BD8-52EB-8D4E-B7D906607B7C}"/>
+              </a:ext>
+            </a:extLst>
+          </p:cNvPr>
+          <p:cNvPicPr>
+            <a:picLocks noChangeAspect="1"/>
+          </p:cNvPicPr>
+          <p:nvPr/>
+        </p:nvPicPr>
+        <p:blipFill>
+          <a:blip r:embed="rId8">
+            <a:extLst>
+              <a:ext uri="{96DAC541-7B7A-43D3-8B79-37D633B846F1}">
+                <asvg:svgBlip xmlns:asvg="http://schemas.microsoft.com/office/drawing/2016/SVG/main" r:embed="rId9"/>
+              </a:ext>
+            </a:extLst>
+          </a:blip>
+          <a:stretch>
+            <a:fillRect/>
+          </a:stretch>
+        </p:blipFill>
+        <p:spPr>
+          <a:xfrm rot="19022280">
+            <a:off x="3121470" y="1976985"/>
+            <a:ext cx="914400" cy="2407291"/>
+          </a:xfrm>
+          <a:prstGeom prst="rect">
+            <a:avLst/>
+          </a:prstGeom>
+        </p:spPr>
+      </p:pic>
+      <p:pic>
+        <p:nvPicPr>
+          <p:cNvPr id="5" name="Picture 4">
+            <a:extLst>
+              <a:ext uri="{FF2B5EF4-FFF2-40B4-BE49-F238E27FC236}">
+                <a16:creationId xmlns:a16="http://schemas.microsoft.com/office/drawing/2014/main" id="{0845B73E-B56D-22AB-CD05-028D8B186FBB}"/>
+              </a:ext>
+            </a:extLst>
+          </p:cNvPr>
+          <p:cNvPicPr>
+            <a:picLocks noChangeAspect="1"/>
+          </p:cNvPicPr>
+          <p:nvPr/>
+        </p:nvPicPr>
+        <p:blipFill>
+          <a:blip r:embed="rId10"/>
+          <a:srcRect t="5389" b="6584"/>
+          <a:stretch/>
+        </p:blipFill>
+        <p:spPr>
+          <a:xfrm>
+            <a:off x="6941546" y="1386207"/>
+            <a:ext cx="4584700" cy="4076271"/>
+          </a:xfrm>
+          <a:prstGeom prst="rect">
+            <a:avLst/>
+          </a:prstGeom>
+        </p:spPr>
+      </p:pic>
+      <p:pic>
+        <p:nvPicPr>
+          <p:cNvPr id="10" name="Graphic 9" descr="Arrow Up with solid fill">
+            <a:extLst>
+              <a:ext uri="{FF2B5EF4-FFF2-40B4-BE49-F238E27FC236}">
+                <a16:creationId xmlns:a16="http://schemas.microsoft.com/office/drawing/2014/main" id="{7FF87E4D-F0EB-DD05-5EFB-CAD9098787A1}"/>
+              </a:ext>
+            </a:extLst>
+          </p:cNvPr>
+          <p:cNvPicPr>
+            <a:picLocks noChangeAspect="1"/>
+          </p:cNvPicPr>
+          <p:nvPr/>
+        </p:nvPicPr>
+        <p:blipFill>
+          <a:blip r:embed="rId8">
+            <a:extLst>
+              <a:ext uri="{96DAC541-7B7A-43D3-8B79-37D633B846F1}">
+                <asvg:svgBlip xmlns:asvg="http://schemas.microsoft.com/office/drawing/2016/SVG/main" r:embed="rId9"/>
+              </a:ext>
+            </a:extLst>
+          </a:blip>
+          <a:stretch>
+            <a:fillRect/>
+          </a:stretch>
+        </p:blipFill>
+        <p:spPr>
+          <a:xfrm>
+            <a:off x="4294407" y="2383581"/>
+            <a:ext cx="914400" cy="1561401"/>
+          </a:xfrm>
+          <a:prstGeom prst="rect">
+            <a:avLst/>
+          </a:prstGeom>
+        </p:spPr>
+      </p:pic>
+      <p:sp>
+        <p:nvSpPr>
+          <p:cNvPr id="12" name="TextBox 11">
+            <a:extLst>
+              <a:ext uri="{FF2B5EF4-FFF2-40B4-BE49-F238E27FC236}">
+                <a16:creationId xmlns:a16="http://schemas.microsoft.com/office/drawing/2014/main" id="{A2760F8C-9A7E-E9E4-5A6C-103EF1DE38C5}"/>
+              </a:ext>
+            </a:extLst>
+          </p:cNvPr>
+          <p:cNvSpPr txBox="1"/>
+          <p:nvPr/>
+        </p:nvSpPr>
+        <p:spPr>
+          <a:xfrm>
+            <a:off x="3275084" y="495827"/>
+            <a:ext cx="4714369" cy="461665"/>
+          </a:xfrm>
+          <a:prstGeom prst="rect">
+            <a:avLst/>
+          </a:prstGeom>
+          <a:noFill/>
+        </p:spPr>
+        <p:txBody>
+          <a:bodyPr wrap="square" rtlCol="0">
+            <a:spAutoFit/>
+          </a:bodyPr>
+          <a:lstStyle/>
+          <a:p>
+            <a:r>
+              <a:rPr lang="en-US" sz="2400" dirty="0"/>
+              <a:t>Intra-process thermal asymmetry</a:t>
+            </a:r>
+          </a:p>
+        </p:txBody>
+      </p:sp>
+      <p:cxnSp>
+        <p:nvCxnSpPr>
+          <p:cNvPr id="14" name="Straight Connector 13">
+            <a:extLst>
+              <a:ext uri="{FF2B5EF4-FFF2-40B4-BE49-F238E27FC236}">
+                <a16:creationId xmlns:a16="http://schemas.microsoft.com/office/drawing/2014/main" id="{F5A1517A-9973-56FF-3FF9-7CD44E59B725}"/>
+              </a:ext>
+            </a:extLst>
+          </p:cNvPr>
+          <p:cNvCxnSpPr>
+            <a:cxnSpLocks/>
+          </p:cNvCxnSpPr>
+          <p:nvPr/>
+        </p:nvCxnSpPr>
+        <p:spPr>
+          <a:xfrm flipH="1">
+            <a:off x="8747006" y="4268880"/>
+            <a:ext cx="1" cy="1152000"/>
+          </a:xfrm>
+          <a:prstGeom prst="line">
+            <a:avLst/>
+          </a:prstGeom>
+          <a:ln w="28575">
+            <a:solidFill>
+              <a:srgbClr val="003D88"/>
+            </a:solidFill>
+            <a:prstDash val="lgDash"/>
+          </a:ln>
+        </p:spPr>
+        <p:style>
+          <a:lnRef idx="2">
+            <a:schemeClr val="accent1"/>
+          </a:lnRef>
+          <a:fillRef idx="0">
+            <a:schemeClr val="accent1"/>
+          </a:fillRef>
+          <a:effectRef idx="1">
+            <a:schemeClr val="accent1"/>
+          </a:effectRef>
+          <a:fontRef idx="minor">
+            <a:schemeClr val="tx1"/>
+          </a:fontRef>
+        </p:style>
+      </p:cxnSp>
+      <p:cxnSp>
+        <p:nvCxnSpPr>
+          <p:cNvPr id="21" name="Straight Connector 20">
+            <a:extLst>
+              <a:ext uri="{FF2B5EF4-FFF2-40B4-BE49-F238E27FC236}">
+                <a16:creationId xmlns:a16="http://schemas.microsoft.com/office/drawing/2014/main" id="{3DDF2D02-E59B-4F53-A400-DD3698874F46}"/>
+              </a:ext>
+            </a:extLst>
+          </p:cNvPr>
+          <p:cNvCxnSpPr>
+            <a:cxnSpLocks/>
+          </p:cNvCxnSpPr>
+          <p:nvPr/>
+        </p:nvCxnSpPr>
+        <p:spPr>
+          <a:xfrm>
+            <a:off x="9570739" y="3208833"/>
+            <a:ext cx="0" cy="2214000"/>
+          </a:xfrm>
+          <a:prstGeom prst="line">
+            <a:avLst/>
+          </a:prstGeom>
+          <a:ln w="28575">
+            <a:solidFill>
+              <a:srgbClr val="1D86EE"/>
+            </a:solidFill>
+            <a:prstDash val="lgDash"/>
+          </a:ln>
+        </p:spPr>
+        <p:style>
+          <a:lnRef idx="2">
+            <a:schemeClr val="accent1"/>
+          </a:lnRef>
+          <a:fillRef idx="0">
+            <a:schemeClr val="accent1"/>
+          </a:fillRef>
+          <a:effectRef idx="1">
+            <a:schemeClr val="accent1"/>
+          </a:effectRef>
+          <a:fontRef idx="minor">
+            <a:schemeClr val="tx1"/>
+          </a:fontRef>
+        </p:style>
+      </p:cxnSp>
+      <mc:AlternateContent xmlns:mc="http://schemas.openxmlformats.org/markup-compatibility/2006" xmlns:a14="http://schemas.microsoft.com/office/drawing/2010/main">
+        <mc:Choice Requires="a14">
+          <p:sp>
+            <p:nvSpPr>
+              <p:cNvPr id="23" name="TextBox 22">
+                <a:extLst>
+                  <a:ext uri="{FF2B5EF4-FFF2-40B4-BE49-F238E27FC236}">
+                    <a16:creationId xmlns:a16="http://schemas.microsoft.com/office/drawing/2014/main" id="{54FF724B-2E7B-DCD8-BBE5-E24A87E61FBD}"/>
+                  </a:ext>
+                </a:extLst>
+              </p:cNvPr>
+              <p:cNvSpPr txBox="1"/>
+              <p:nvPr/>
+            </p:nvSpPr>
+            <p:spPr>
+              <a:xfrm>
+                <a:off x="9395929" y="5417714"/>
+                <a:ext cx="545534" cy="428066"/>
+              </a:xfrm>
+              <a:prstGeom prst="rect">
+                <a:avLst/>
+              </a:prstGeom>
+              <a:noFill/>
+            </p:spPr>
+            <p:txBody>
+              <a:bodyPr wrap="square" rtlCol="0">
+                <a:spAutoFit/>
+              </a:bodyPr>
+              <a:lstStyle/>
+              <a:p>
+                <a:pPr/>
+                <a14:m>
+                  <m:oMathPara xmlns:m="http://schemas.openxmlformats.org/officeDocument/2006/math">
+                    <m:oMathParaPr>
+                      <m:jc m:val="centerGroup"/>
+                    </m:oMathParaPr>
+                    <m:oMath xmlns:m="http://schemas.openxmlformats.org/officeDocument/2006/math">
+                      <m:sSub>
+                        <m:sSubPr>
+                          <m:ctrlPr>
+                            <a:rPr lang="en-US" sz="2000" i="1" smtClean="0">
+                              <a:latin typeface="Cambria Math" panose="02040503050406030204" pitchFamily="18" charset="0"/>
+                            </a:rPr>
+                          </m:ctrlPr>
+                        </m:sSubPr>
+                        <m:e>
+                          <m:r>
+                            <m:rPr>
+                              <m:sty m:val="p"/>
+                            </m:rPr>
+                            <a:rPr lang="en-CA" sz="2000" b="0" i="0" smtClean="0">
+                              <a:latin typeface="Cambria Math" panose="02040503050406030204" pitchFamily="18" charset="0"/>
+                            </a:rPr>
+                            <m:t>E</m:t>
+                          </m:r>
+                        </m:e>
+                        <m:sub>
+                          <m:sSub>
+                            <m:sSubPr>
+                              <m:ctrlPr>
+                                <a:rPr lang="en-US" sz="2000" i="1" smtClean="0">
+                                  <a:latin typeface="Cambria Math" panose="02040503050406030204" pitchFamily="18" charset="0"/>
+                                </a:rPr>
+                              </m:ctrlPr>
+                            </m:sSubPr>
+                            <m:e>
+                              <m:r>
+                                <m:rPr>
+                                  <m:sty m:val="p"/>
+                                </m:rPr>
+                                <a:rPr lang="en-CA" sz="2000" b="0" i="0" smtClean="0">
+                                  <a:latin typeface="Cambria Math" panose="02040503050406030204" pitchFamily="18" charset="0"/>
+                                </a:rPr>
+                                <m:t>r</m:t>
+                              </m:r>
+                            </m:e>
+                            <m:sub>
+                              <m:r>
+                                <m:rPr>
+                                  <m:sty m:val="p"/>
+                                </m:rPr>
+                                <a:rPr lang="en-CA" sz="2000" b="0" i="0" smtClean="0">
+                                  <a:latin typeface="Cambria Math" panose="02040503050406030204" pitchFamily="18" charset="0"/>
+                                </a:rPr>
+                                <m:t>a</m:t>
+                              </m:r>
+                            </m:sub>
+                          </m:sSub>
+                        </m:sub>
+                      </m:sSub>
+                    </m:oMath>
+                  </m:oMathPara>
+                </a14:m>
+                <a:endParaRPr lang="en-US" sz="2000" dirty="0"/>
+              </a:p>
+            </p:txBody>
+          </p:sp>
+        </mc:Choice>
+        <mc:Fallback xmlns="">
+          <p:sp>
+            <p:nvSpPr>
+              <p:cNvPr id="23" name="TextBox 22">
+                <a:extLst>
+                  <a:ext uri="{FF2B5EF4-FFF2-40B4-BE49-F238E27FC236}">
+                    <a16:creationId xmlns:a16="http://schemas.microsoft.com/office/drawing/2014/main" id="{54FF724B-2E7B-DCD8-BBE5-E24A87E61FBD}"/>
+                  </a:ext>
+                </a:extLst>
+              </p:cNvPr>
+              <p:cNvSpPr txBox="1">
+                <a:spLocks noRot="1" noChangeAspect="1" noMove="1" noResize="1" noEditPoints="1" noAdjustHandles="1" noChangeArrowheads="1" noChangeShapeType="1" noTextEdit="1"/>
+              </p:cNvSpPr>
+              <p:nvPr/>
+            </p:nvSpPr>
+            <p:spPr>
+              <a:xfrm>
+                <a:off x="9395929" y="5417714"/>
+                <a:ext cx="545534" cy="428066"/>
+              </a:xfrm>
+              <a:prstGeom prst="rect">
+                <a:avLst/>
+              </a:prstGeom>
+              <a:blipFill>
+                <a:blip r:embed="rId11"/>
+                <a:stretch>
+                  <a:fillRect/>
+                </a:stretch>
+              </a:blipFill>
+            </p:spPr>
+            <p:txBody>
+              <a:bodyPr/>
+              <a:lstStyle/>
+              <a:p>
+                <a:r>
+                  <a:rPr lang="en-US">
+                    <a:noFill/>
+                  </a:rPr>
+                  <a:t> </a:t>
+                </a:r>
+              </a:p>
+            </p:txBody>
+          </p:sp>
+        </mc:Fallback>
+      </mc:AlternateContent>
+      <p:pic>
+        <p:nvPicPr>
+          <p:cNvPr id="30" name="Picture 29">
+            <a:extLst>
+              <a:ext uri="{FF2B5EF4-FFF2-40B4-BE49-F238E27FC236}">
+                <a16:creationId xmlns:a16="http://schemas.microsoft.com/office/drawing/2014/main" id="{C72D2F27-0D52-6574-AC7D-C209DA12D5FC}"/>
+              </a:ext>
+            </a:extLst>
+          </p:cNvPr>
+          <p:cNvPicPr>
+            <a:picLocks noChangeAspect="1"/>
+          </p:cNvPicPr>
+          <p:nvPr/>
+        </p:nvPicPr>
+        <p:blipFill>
+          <a:blip r:embed="rId12"/>
+          <a:stretch>
+            <a:fillRect/>
+          </a:stretch>
+        </p:blipFill>
+        <p:spPr>
+          <a:xfrm>
+            <a:off x="7828204" y="5909104"/>
+            <a:ext cx="3392228" cy="400109"/>
+          </a:xfrm>
+          <a:prstGeom prst="rect">
+            <a:avLst/>
+          </a:prstGeom>
+        </p:spPr>
+      </p:pic>
+      <p:sp>
+        <p:nvSpPr>
+          <p:cNvPr id="3" name="TextBox 2">
+            <a:extLst>
+              <a:ext uri="{FF2B5EF4-FFF2-40B4-BE49-F238E27FC236}">
+                <a16:creationId xmlns:a16="http://schemas.microsoft.com/office/drawing/2014/main" id="{637E0AAC-8364-A554-67B5-EC64216F8769}"/>
+              </a:ext>
+            </a:extLst>
+          </p:cNvPr>
+          <p:cNvSpPr txBox="1"/>
+          <p:nvPr/>
+        </p:nvSpPr>
+        <p:spPr>
+          <a:xfrm rot="16200000">
+            <a:off x="6130957" y="3142934"/>
+            <a:ext cx="1740726" cy="461665"/>
+          </a:xfrm>
+          <a:prstGeom prst="rect">
+            <a:avLst/>
+          </a:prstGeom>
+          <a:solidFill>
+            <a:schemeClr val="bg1"/>
+          </a:solidFill>
+        </p:spPr>
+        <p:txBody>
+          <a:bodyPr wrap="square" rtlCol="0">
+            <a:spAutoFit/>
+          </a:bodyPr>
+          <a:lstStyle/>
+          <a:p>
+            <a:r>
+              <a:rPr lang="en-US" sz="2400" dirty="0"/>
+              <a:t>Frequency</a:t>
+            </a:r>
+          </a:p>
+        </p:txBody>
+      </p:sp>
+      <p:sp>
+        <p:nvSpPr>
+          <p:cNvPr id="11" name="TextBox 10">
+            <a:extLst>
+              <a:ext uri="{FF2B5EF4-FFF2-40B4-BE49-F238E27FC236}">
+                <a16:creationId xmlns:a16="http://schemas.microsoft.com/office/drawing/2014/main" id="{8037FE87-2D89-41EF-6E73-600E625E1744}"/>
+              </a:ext>
+            </a:extLst>
+          </p:cNvPr>
+          <p:cNvSpPr txBox="1"/>
+          <p:nvPr/>
+        </p:nvSpPr>
+        <p:spPr>
+          <a:xfrm>
+            <a:off x="7699815" y="5868946"/>
+            <a:ext cx="3392227" cy="446276"/>
+          </a:xfrm>
+          <a:prstGeom prst="rect">
+            <a:avLst/>
+          </a:prstGeom>
+          <a:solidFill>
+            <a:schemeClr val="bg1"/>
+          </a:solidFill>
+        </p:spPr>
+        <p:txBody>
+          <a:bodyPr wrap="square" rtlCol="0">
+            <a:spAutoFit/>
+          </a:bodyPr>
+          <a:lstStyle/>
+          <a:p>
+            <a:pPr algn="ctr"/>
+            <a:r>
+              <a:rPr lang="en-US" sz="2300" dirty="0"/>
+              <a:t>Temperature Sensitivity</a:t>
+            </a:r>
+          </a:p>
+        </p:txBody>
+      </p:sp>
+      <mc:AlternateContent xmlns:mc="http://schemas.openxmlformats.org/markup-compatibility/2006" xmlns:a14="http://schemas.microsoft.com/office/drawing/2010/main">
+        <mc:Choice Requires="a14">
+          <p:sp>
+            <p:nvSpPr>
+              <p:cNvPr id="15" name="TextBox 14">
+                <a:extLst>
+                  <a:ext uri="{FF2B5EF4-FFF2-40B4-BE49-F238E27FC236}">
+                    <a16:creationId xmlns:a16="http://schemas.microsoft.com/office/drawing/2014/main" id="{3F684A82-1614-F08A-8B20-1B9D115E23DB}"/>
+                  </a:ext>
+                </a:extLst>
+              </p:cNvPr>
+              <p:cNvSpPr txBox="1"/>
+              <p:nvPr/>
+            </p:nvSpPr>
+            <p:spPr>
+              <a:xfrm>
+                <a:off x="8567551" y="5421178"/>
+                <a:ext cx="545534" cy="438518"/>
+              </a:xfrm>
+              <a:prstGeom prst="rect">
+                <a:avLst/>
+              </a:prstGeom>
+              <a:noFill/>
+            </p:spPr>
+            <p:txBody>
+              <a:bodyPr wrap="square" rtlCol="0">
+                <a:spAutoFit/>
+              </a:bodyPr>
+              <a:lstStyle/>
+              <a:p>
+                <a:pPr/>
+                <a14:m>
+                  <m:oMathPara xmlns:m="http://schemas.openxmlformats.org/officeDocument/2006/math">
+                    <m:oMathParaPr>
+                      <m:jc m:val="centerGroup"/>
+                    </m:oMathParaPr>
+                    <m:oMath xmlns:m="http://schemas.openxmlformats.org/officeDocument/2006/math">
+                      <m:sSub>
+                        <m:sSubPr>
+                          <m:ctrlPr>
+                            <a:rPr lang="en-US" sz="2000" i="1" smtClean="0">
+                              <a:latin typeface="Cambria Math" panose="02040503050406030204" pitchFamily="18" charset="0"/>
+                            </a:rPr>
+                          </m:ctrlPr>
+                        </m:sSubPr>
+                        <m:e>
+                          <m:r>
+                            <m:rPr>
+                              <m:sty m:val="p"/>
+                            </m:rPr>
+                            <a:rPr lang="en-CA" sz="2000" b="0" i="0" smtClean="0">
+                              <a:latin typeface="Cambria Math" panose="02040503050406030204" pitchFamily="18" charset="0"/>
+                            </a:rPr>
+                            <m:t>E</m:t>
+                          </m:r>
+                        </m:e>
+                        <m:sub>
+                          <m:sSub>
+                            <m:sSubPr>
+                              <m:ctrlPr>
+                                <a:rPr lang="en-US" sz="2000" i="1" smtClean="0">
+                                  <a:latin typeface="Cambria Math" panose="02040503050406030204" pitchFamily="18" charset="0"/>
+                                </a:rPr>
+                              </m:ctrlPr>
+                            </m:sSubPr>
+                            <m:e>
+                              <m:r>
+                                <m:rPr>
+                                  <m:sty m:val="p"/>
+                                </m:rPr>
+                                <a:rPr lang="en-CA" sz="2000" b="0" i="0" smtClean="0">
+                                  <a:latin typeface="Cambria Math" panose="02040503050406030204" pitchFamily="18" charset="0"/>
+                                </a:rPr>
+                                <m:t>r</m:t>
+                              </m:r>
+                            </m:e>
+                            <m:sub>
+                              <m:r>
+                                <m:rPr>
+                                  <m:sty m:val="p"/>
+                                </m:rPr>
+                                <a:rPr lang="en-CA" sz="2000" b="0" i="0" smtClean="0">
+                                  <a:latin typeface="Cambria Math" panose="02040503050406030204" pitchFamily="18" charset="0"/>
+                                </a:rPr>
+                                <m:t>b</m:t>
+                              </m:r>
+                            </m:sub>
+                          </m:sSub>
+                        </m:sub>
+                      </m:sSub>
+                    </m:oMath>
+                  </m:oMathPara>
+                </a14:m>
+                <a:endParaRPr lang="en-US" sz="2000" dirty="0"/>
+              </a:p>
+            </p:txBody>
+          </p:sp>
+        </mc:Choice>
+        <mc:Fallback xmlns="">
+          <p:sp>
+            <p:nvSpPr>
+              <p:cNvPr id="15" name="TextBox 14">
+                <a:extLst>
+                  <a:ext uri="{FF2B5EF4-FFF2-40B4-BE49-F238E27FC236}">
+                    <a16:creationId xmlns:a16="http://schemas.microsoft.com/office/drawing/2014/main" id="{3F684A82-1614-F08A-8B20-1B9D115E23DB}"/>
+                  </a:ext>
+                </a:extLst>
+              </p:cNvPr>
+              <p:cNvSpPr txBox="1">
+                <a:spLocks noRot="1" noChangeAspect="1" noMove="1" noResize="1" noEditPoints="1" noAdjustHandles="1" noChangeArrowheads="1" noChangeShapeType="1" noTextEdit="1"/>
+              </p:cNvSpPr>
+              <p:nvPr/>
+            </p:nvSpPr>
+            <p:spPr>
+              <a:xfrm>
+                <a:off x="8567551" y="5421178"/>
+                <a:ext cx="545534" cy="438518"/>
+              </a:xfrm>
+              <a:prstGeom prst="rect">
+                <a:avLst/>
+              </a:prstGeom>
+              <a:blipFill>
+                <a:blip r:embed="rId13"/>
+                <a:stretch>
+                  <a:fillRect/>
+                </a:stretch>
+              </a:blipFill>
+            </p:spPr>
+            <p:txBody>
+              <a:bodyPr/>
+              <a:lstStyle/>
+              <a:p>
+                <a:r>
+                  <a:rPr lang="en-US">
+                    <a:noFill/>
+                  </a:rPr>
+                  <a:t> </a:t>
+                </a:r>
+              </a:p>
+            </p:txBody>
+          </p:sp>
+        </mc:Fallback>
+      </mc:AlternateContent>
+    </p:spTree>
+    <p:extLst>
+      <p:ext uri="{BB962C8B-B14F-4D97-AF65-F5344CB8AC3E}">
+        <p14:creationId xmlns:p14="http://schemas.microsoft.com/office/powerpoint/2010/main" val="3671380772"/>
+      </p:ext>
+    </p:extLst>
+  </p:cSld>
+  <p:clrMapOvr>
+    <a:masterClrMapping/>
+  </p:clrMapOvr>
+</p:sld>
+</file>
+
+<file path=ppt/slides/slide8.xml><?xml version="1.0" encoding="utf-8"?>
+<p:sld xmlns:a="http://schemas.openxmlformats.org/drawingml/2006/main" xmlns:r="http://schemas.openxmlformats.org/officeDocument/2006/relationships" xmlns:p="http://schemas.openxmlformats.org/presentationml/2006/main">
+  <p:cSld>
+    <p:spTree>
+      <p:nvGrpSpPr>
+        <p:cNvPr id="1" name=""/>
+        <p:cNvGrpSpPr/>
+        <p:nvPr/>
+      </p:nvGrpSpPr>
+      <p:grpSpPr>
+        <a:xfrm>
+          <a:off x="0" y="0"/>
+          <a:ext cx="0" cy="0"/>
+          <a:chOff x="0" y="0"/>
+          <a:chExt cx="0" cy="0"/>
+        </a:xfrm>
+      </p:grpSpPr>
+      <p:pic>
+        <p:nvPicPr>
+          <p:cNvPr id="5" name="Picture 4">
+            <a:extLst>
+              <a:ext uri="{FF2B5EF4-FFF2-40B4-BE49-F238E27FC236}">
+                <a16:creationId xmlns:a16="http://schemas.microsoft.com/office/drawing/2014/main" id="{9F42E330-4C9C-5FF7-86F1-1FFE0DCAE1DF}"/>
+              </a:ext>
+            </a:extLst>
+          </p:cNvPr>
+          <p:cNvPicPr>
+            <a:picLocks noChangeAspect="1"/>
+          </p:cNvPicPr>
+          <p:nvPr/>
+        </p:nvPicPr>
+        <p:blipFill>
+          <a:blip r:embed="rId2"/>
+          <a:srcRect l="2125" r="2125"/>
+          <a:stretch/>
+        </p:blipFill>
+        <p:spPr>
+          <a:xfrm>
+            <a:off x="157163" y="1499919"/>
+            <a:ext cx="4411971" cy="3512280"/>
+          </a:xfrm>
+          <a:prstGeom prst="rect">
+            <a:avLst/>
+          </a:prstGeom>
+        </p:spPr>
+      </p:pic>
+      <p:pic>
+        <p:nvPicPr>
+          <p:cNvPr id="6" name="Picture 5">
+            <a:extLst>
+              <a:ext uri="{FF2B5EF4-FFF2-40B4-BE49-F238E27FC236}">
+                <a16:creationId xmlns:a16="http://schemas.microsoft.com/office/drawing/2014/main" id="{58DF6D50-0003-9D90-89CD-A7A95C592D66}"/>
+              </a:ext>
+            </a:extLst>
+          </p:cNvPr>
+          <p:cNvPicPr>
+            <a:picLocks noChangeAspect="1"/>
+          </p:cNvPicPr>
+          <p:nvPr/>
+        </p:nvPicPr>
+        <p:blipFill>
+          <a:blip r:embed="rId3"/>
+          <a:srcRect l="3388" r="3388"/>
+          <a:stretch/>
+        </p:blipFill>
+        <p:spPr>
+          <a:xfrm>
+            <a:off x="8512563" y="1604328"/>
+            <a:ext cx="3397539" cy="3604280"/>
+          </a:xfrm>
+          <a:prstGeom prst="rect">
+            <a:avLst/>
+          </a:prstGeom>
+        </p:spPr>
+      </p:pic>
+      <p:sp>
+        <p:nvSpPr>
+          <p:cNvPr id="7" name="TextBox 6">
+            <a:extLst>
+              <a:ext uri="{FF2B5EF4-FFF2-40B4-BE49-F238E27FC236}">
+                <a16:creationId xmlns:a16="http://schemas.microsoft.com/office/drawing/2014/main" id="{4F2FEA2F-D331-4DDD-9F3C-D7F39F3D33E2}"/>
+              </a:ext>
+            </a:extLst>
+          </p:cNvPr>
+          <p:cNvSpPr txBox="1"/>
+          <p:nvPr/>
+        </p:nvSpPr>
+        <p:spPr>
+          <a:xfrm>
+            <a:off x="3275084" y="495827"/>
+            <a:ext cx="4714369" cy="461665"/>
+          </a:xfrm>
+          <a:prstGeom prst="rect">
+            <a:avLst/>
+          </a:prstGeom>
+          <a:noFill/>
+        </p:spPr>
+        <p:txBody>
+          <a:bodyPr wrap="square" rtlCol="0">
+            <a:spAutoFit/>
+          </a:bodyPr>
+          <a:lstStyle/>
+          <a:p>
+            <a:r>
+              <a:rPr lang="en-US" sz="2400" dirty="0"/>
+              <a:t>Intra-process thermal asymmetry</a:t>
+            </a:r>
+          </a:p>
+        </p:txBody>
+      </p:sp>
+      <p:pic>
+        <p:nvPicPr>
+          <p:cNvPr id="9" name="Picture 8">
+            <a:extLst>
+              <a:ext uri="{FF2B5EF4-FFF2-40B4-BE49-F238E27FC236}">
+                <a16:creationId xmlns:a16="http://schemas.microsoft.com/office/drawing/2014/main" id="{9B1CBAB2-8000-6026-E623-397D34194199}"/>
+              </a:ext>
+            </a:extLst>
+          </p:cNvPr>
+          <p:cNvPicPr>
+            <a:picLocks noChangeAspect="1"/>
+          </p:cNvPicPr>
+          <p:nvPr/>
+        </p:nvPicPr>
+        <p:blipFill>
+          <a:blip r:embed="rId4"/>
+          <a:srcRect t="6370"/>
+          <a:stretch/>
+        </p:blipFill>
+        <p:spPr>
+          <a:xfrm>
+            <a:off x="4820059" y="1762735"/>
+            <a:ext cx="3326673" cy="3114762"/>
+          </a:xfrm>
+          <a:prstGeom prst="rect">
+            <a:avLst/>
+          </a:prstGeom>
+        </p:spPr>
+      </p:pic>
+      <p:pic>
+        <p:nvPicPr>
+          <p:cNvPr id="10" name="Picture 9" descr="A black text on a white background&#10;&#10;AI-generated content may be incorrect.">
+            <a:extLst>
+              <a:ext uri="{FF2B5EF4-FFF2-40B4-BE49-F238E27FC236}">
+                <a16:creationId xmlns:a16="http://schemas.microsoft.com/office/drawing/2014/main" id="{E2EBAB9A-D4FC-0920-24BD-F9303FDA029E}"/>
+              </a:ext>
+            </a:extLst>
+          </p:cNvPr>
+          <p:cNvPicPr>
+            <a:picLocks noChangeAspect="1"/>
+          </p:cNvPicPr>
+          <p:nvPr/>
+        </p:nvPicPr>
+        <p:blipFill>
+          <a:blip r:embed="rId5"/>
+          <a:stretch>
+            <a:fillRect/>
+          </a:stretch>
+        </p:blipFill>
+        <p:spPr>
+          <a:xfrm>
+            <a:off x="5693230" y="4574870"/>
+            <a:ext cx="1837507" cy="381559"/>
+          </a:xfrm>
+          <a:prstGeom prst="rect">
+            <a:avLst/>
+          </a:prstGeom>
+        </p:spPr>
+      </p:pic>
+      <p:pic>
+        <p:nvPicPr>
+          <p:cNvPr id="11" name="Picture 10" descr="A black text on a white background&#10;&#10;AI-generated content may be incorrect.">
+            <a:extLst>
+              <a:ext uri="{FF2B5EF4-FFF2-40B4-BE49-F238E27FC236}">
+                <a16:creationId xmlns:a16="http://schemas.microsoft.com/office/drawing/2014/main" id="{FD02FED3-3C58-38B1-8351-EDF409388ED2}"/>
+              </a:ext>
+            </a:extLst>
+          </p:cNvPr>
+          <p:cNvPicPr>
+            <a:picLocks noChangeAspect="1"/>
+          </p:cNvPicPr>
+          <p:nvPr/>
+        </p:nvPicPr>
+        <p:blipFill>
+          <a:blip r:embed="rId6"/>
+          <a:stretch>
+            <a:fillRect/>
+          </a:stretch>
+        </p:blipFill>
+        <p:spPr>
+          <a:xfrm>
+            <a:off x="4634047" y="2640648"/>
+            <a:ext cx="457201" cy="1016001"/>
+          </a:xfrm>
+          <a:prstGeom prst="rect">
+            <a:avLst/>
+          </a:prstGeom>
+        </p:spPr>
+      </p:pic>
+      <p:sp>
+        <p:nvSpPr>
+          <p:cNvPr id="15" name="TextBox 14">
+            <a:extLst>
+              <a:ext uri="{FF2B5EF4-FFF2-40B4-BE49-F238E27FC236}">
+                <a16:creationId xmlns:a16="http://schemas.microsoft.com/office/drawing/2014/main" id="{1599232C-7A1F-1F48-9E21-76F0536605E3}"/>
+              </a:ext>
+            </a:extLst>
+          </p:cNvPr>
+          <p:cNvSpPr txBox="1"/>
+          <p:nvPr/>
+        </p:nvSpPr>
+        <p:spPr>
+          <a:xfrm>
+            <a:off x="5156160" y="3196046"/>
+            <a:ext cx="415833" cy="307777"/>
+          </a:xfrm>
+          <a:prstGeom prst="rect">
+            <a:avLst/>
+          </a:prstGeom>
+          <a:noFill/>
+        </p:spPr>
+        <p:txBody>
+          <a:bodyPr wrap="square" rtlCol="0">
+            <a:spAutoFit/>
+          </a:bodyPr>
+          <a:lstStyle/>
+          <a:p>
+            <a:r>
+              <a:rPr lang="en-US" sz="1400" dirty="0"/>
+              <a:t>r</a:t>
+            </a:r>
+            <a:r>
+              <a:rPr lang="en-US" sz="1400" baseline="-25000" dirty="0"/>
+              <a:t>b</a:t>
+            </a:r>
+            <a:endParaRPr lang="en-US" sz="1400" dirty="0"/>
+          </a:p>
+        </p:txBody>
+      </p:sp>
+      <p:sp>
+        <p:nvSpPr>
+          <p:cNvPr id="16" name="TextBox 15">
+            <a:extLst>
+              <a:ext uri="{FF2B5EF4-FFF2-40B4-BE49-F238E27FC236}">
+                <a16:creationId xmlns:a16="http://schemas.microsoft.com/office/drawing/2014/main" id="{44FDFD56-88C1-C84C-D01F-B85EA5FD2B15}"/>
+              </a:ext>
+            </a:extLst>
+          </p:cNvPr>
+          <p:cNvSpPr txBox="1"/>
+          <p:nvPr/>
+        </p:nvSpPr>
+        <p:spPr>
+          <a:xfrm>
+            <a:off x="5171209" y="3760860"/>
+            <a:ext cx="415833" cy="307777"/>
+          </a:xfrm>
+          <a:prstGeom prst="rect">
+            <a:avLst/>
+          </a:prstGeom>
+          <a:noFill/>
+        </p:spPr>
+        <p:txBody>
+          <a:bodyPr wrap="square" rtlCol="0">
+            <a:spAutoFit/>
+          </a:bodyPr>
+          <a:lstStyle/>
+          <a:p>
+            <a:r>
+              <a:rPr lang="en-US" sz="1400" dirty="0"/>
+              <a:t>r</a:t>
+            </a:r>
+            <a:r>
+              <a:rPr lang="en-US" sz="1400" baseline="-25000" dirty="0"/>
+              <a:t>a</a:t>
+            </a:r>
+            <a:endParaRPr lang="en-US" sz="1400" dirty="0"/>
+          </a:p>
+        </p:txBody>
+      </p:sp>
+      <p:cxnSp>
+        <p:nvCxnSpPr>
+          <p:cNvPr id="18" name="Straight Arrow Connector 17">
+            <a:extLst>
+              <a:ext uri="{FF2B5EF4-FFF2-40B4-BE49-F238E27FC236}">
+                <a16:creationId xmlns:a16="http://schemas.microsoft.com/office/drawing/2014/main" id="{54980B91-232E-AE50-0E9D-6C2CA3A2C392}"/>
+              </a:ext>
+            </a:extLst>
+          </p:cNvPr>
+          <p:cNvCxnSpPr>
+            <a:cxnSpLocks/>
+          </p:cNvCxnSpPr>
+          <p:nvPr/>
+        </p:nvCxnSpPr>
+        <p:spPr>
+          <a:xfrm flipV="1">
+            <a:off x="5670462" y="3328607"/>
+            <a:ext cx="502824" cy="328042"/>
+          </a:xfrm>
+          <a:prstGeom prst="straightConnector1">
+            <a:avLst/>
+          </a:prstGeom>
+          <a:ln>
+            <a:solidFill>
+              <a:srgbClr val="1D86EE"/>
+            </a:solidFill>
+            <a:tailEnd type="triangle"/>
+          </a:ln>
+        </p:spPr>
+        <p:style>
+          <a:lnRef idx="2">
+            <a:schemeClr val="accent1"/>
+          </a:lnRef>
+          <a:fillRef idx="0">
+            <a:schemeClr val="accent1"/>
+          </a:fillRef>
+          <a:effectRef idx="1">
+            <a:schemeClr val="accent1"/>
+          </a:effectRef>
+          <a:fontRef idx="minor">
+            <a:schemeClr val="tx1"/>
+          </a:fontRef>
+        </p:style>
+      </p:cxnSp>
+      <mc:AlternateContent xmlns:mc="http://schemas.openxmlformats.org/markup-compatibility/2006" xmlns:a14="http://schemas.microsoft.com/office/drawing/2010/main">
+        <mc:Choice Requires="a14">
+          <p:sp>
+            <p:nvSpPr>
+              <p:cNvPr id="19" name="TextBox 18">
+                <a:extLst>
+                  <a:ext uri="{FF2B5EF4-FFF2-40B4-BE49-F238E27FC236}">
+                    <a16:creationId xmlns:a16="http://schemas.microsoft.com/office/drawing/2014/main" id="{6D07C209-1B60-0389-353E-3AC7CA0959B8}"/>
+                  </a:ext>
+                </a:extLst>
+              </p:cNvPr>
+              <p:cNvSpPr txBox="1"/>
+              <p:nvPr/>
+            </p:nvSpPr>
+            <p:spPr>
+              <a:xfrm>
+                <a:off x="5801885" y="3492628"/>
+                <a:ext cx="588229" cy="300210"/>
+              </a:xfrm>
+              <a:prstGeom prst="rect">
+                <a:avLst/>
+              </a:prstGeom>
+              <a:noFill/>
+            </p:spPr>
+            <p:txBody>
+              <a:bodyPr wrap="square" rtlCol="0">
+                <a:spAutoFit/>
+              </a:bodyPr>
+              <a:lstStyle/>
+              <a:p>
+                <a:pPr/>
+                <a14:m>
+                  <m:oMathPara xmlns:m="http://schemas.openxmlformats.org/officeDocument/2006/math">
+                    <m:oMathParaPr>
+                      <m:jc m:val="centerGroup"/>
+                    </m:oMathParaPr>
+                    <m:oMath xmlns:m="http://schemas.openxmlformats.org/officeDocument/2006/math">
+                      <m:sSub>
+                        <m:sSubPr>
+                          <m:ctrlPr>
+                            <a:rPr lang="en-US" sz="1200" i="1" smtClean="0">
+                              <a:latin typeface="Cambria Math" panose="02040503050406030204" pitchFamily="18" charset="0"/>
+                            </a:rPr>
+                          </m:ctrlPr>
+                        </m:sSubPr>
+                        <m:e>
+                          <m:r>
+                            <m:rPr>
+                              <m:sty m:val="p"/>
+                            </m:rPr>
+                            <a:rPr lang="en-CA" sz="1200" b="0" i="0" smtClean="0">
+                              <a:latin typeface="Cambria Math" panose="02040503050406030204" pitchFamily="18" charset="0"/>
+                            </a:rPr>
+                            <m:t>E</m:t>
+                          </m:r>
+                        </m:e>
+                        <m:sub>
+                          <m:sSub>
+                            <m:sSubPr>
+                              <m:ctrlPr>
+                                <a:rPr lang="en-US" sz="1200" i="1" smtClean="0">
+                                  <a:latin typeface="Cambria Math" panose="02040503050406030204" pitchFamily="18" charset="0"/>
+                                </a:rPr>
+                              </m:ctrlPr>
+                            </m:sSubPr>
+                            <m:e>
+                              <m:r>
+                                <m:rPr>
+                                  <m:sty m:val="p"/>
+                                </m:rPr>
+                                <a:rPr lang="en-CA" sz="1200" b="0" i="0" smtClean="0">
+                                  <a:latin typeface="Cambria Math" panose="02040503050406030204" pitchFamily="18" charset="0"/>
+                                </a:rPr>
+                                <m:t>r</m:t>
+                              </m:r>
+                            </m:e>
+                            <m:sub>
+                              <m:r>
+                                <m:rPr>
+                                  <m:sty m:val="p"/>
+                                </m:rPr>
+                                <a:rPr lang="en-CA" sz="1200" b="0" i="0" smtClean="0">
+                                  <a:latin typeface="Cambria Math" panose="02040503050406030204" pitchFamily="18" charset="0"/>
+                                </a:rPr>
+                                <m:t>a</m:t>
+                              </m:r>
+                            </m:sub>
+                          </m:sSub>
+                        </m:sub>
+                      </m:sSub>
+                    </m:oMath>
+                  </m:oMathPara>
+                </a14:m>
+                <a:endParaRPr lang="en-US" sz="1200" dirty="0"/>
+              </a:p>
+            </p:txBody>
+          </p:sp>
+        </mc:Choice>
+        <mc:Fallback xmlns="">
+          <p:sp>
+            <p:nvSpPr>
+              <p:cNvPr id="19" name="TextBox 18">
+                <a:extLst>
+                  <a:ext uri="{FF2B5EF4-FFF2-40B4-BE49-F238E27FC236}">
+                    <a16:creationId xmlns:a16="http://schemas.microsoft.com/office/drawing/2014/main" id="{6D07C209-1B60-0389-353E-3AC7CA0959B8}"/>
+                  </a:ext>
+                </a:extLst>
+              </p:cNvPr>
+              <p:cNvSpPr txBox="1">
+                <a:spLocks noRot="1" noChangeAspect="1" noMove="1" noResize="1" noEditPoints="1" noAdjustHandles="1" noChangeArrowheads="1" noChangeShapeType="1" noTextEdit="1"/>
+              </p:cNvSpPr>
+              <p:nvPr/>
+            </p:nvSpPr>
+            <p:spPr>
+              <a:xfrm>
+                <a:off x="5801885" y="3492628"/>
+                <a:ext cx="588229" cy="300210"/>
+              </a:xfrm>
+              <a:prstGeom prst="rect">
+                <a:avLst/>
+              </a:prstGeom>
+              <a:blipFill>
+                <a:blip r:embed="rId7"/>
+                <a:stretch>
+                  <a:fillRect/>
+                </a:stretch>
+              </a:blipFill>
+            </p:spPr>
+            <p:txBody>
+              <a:bodyPr/>
+              <a:lstStyle/>
+              <a:p>
+                <a:r>
+                  <a:rPr lang="en-US">
+                    <a:noFill/>
+                  </a:rPr>
+                  <a:t> </a:t>
+                </a:r>
+              </a:p>
+            </p:txBody>
+          </p:sp>
+        </mc:Fallback>
+      </mc:AlternateContent>
+      <p:cxnSp>
+        <p:nvCxnSpPr>
+          <p:cNvPr id="21" name="Straight Arrow Connector 20">
+            <a:extLst>
+              <a:ext uri="{FF2B5EF4-FFF2-40B4-BE49-F238E27FC236}">
+                <a16:creationId xmlns:a16="http://schemas.microsoft.com/office/drawing/2014/main" id="{01E19F28-2AFC-D3BD-997D-F851A5AB766C}"/>
+              </a:ext>
+            </a:extLst>
+          </p:cNvPr>
+          <p:cNvCxnSpPr>
+            <a:cxnSpLocks/>
+          </p:cNvCxnSpPr>
+          <p:nvPr/>
+        </p:nvCxnSpPr>
+        <p:spPr>
+          <a:xfrm flipV="1">
+            <a:off x="5647343" y="3003468"/>
+            <a:ext cx="588229" cy="268383"/>
+          </a:xfrm>
+          <a:prstGeom prst="straightConnector1">
+            <a:avLst/>
+          </a:prstGeom>
+          <a:ln>
+            <a:solidFill>
+              <a:srgbClr val="003D88"/>
+            </a:solidFill>
+            <a:tailEnd type="triangle"/>
+          </a:ln>
+        </p:spPr>
+        <p:style>
+          <a:lnRef idx="2">
+            <a:schemeClr val="accent1"/>
+          </a:lnRef>
+          <a:fillRef idx="0">
+            <a:schemeClr val="accent1"/>
+          </a:fillRef>
+          <a:effectRef idx="1">
+            <a:schemeClr val="accent1"/>
+          </a:effectRef>
+          <a:fontRef idx="minor">
+            <a:schemeClr val="tx1"/>
+          </a:fontRef>
+        </p:style>
+      </p:cxnSp>
+      <mc:AlternateContent xmlns:mc="http://schemas.openxmlformats.org/markup-compatibility/2006" xmlns:a14="http://schemas.microsoft.com/office/drawing/2010/main">
+        <mc:Choice Requires="a14">
+          <p:sp>
+            <p:nvSpPr>
+              <p:cNvPr id="23" name="TextBox 22">
+                <a:extLst>
+                  <a:ext uri="{FF2B5EF4-FFF2-40B4-BE49-F238E27FC236}">
+                    <a16:creationId xmlns:a16="http://schemas.microsoft.com/office/drawing/2014/main" id="{3A951EE5-37DC-DEB2-A846-F3F39C5E38C3}"/>
+                  </a:ext>
+                </a:extLst>
+              </p:cNvPr>
+              <p:cNvSpPr txBox="1"/>
+              <p:nvPr/>
+            </p:nvSpPr>
+            <p:spPr>
+              <a:xfrm>
+                <a:off x="5571993" y="2837449"/>
+                <a:ext cx="588229" cy="300210"/>
+              </a:xfrm>
+              <a:prstGeom prst="rect">
+                <a:avLst/>
+              </a:prstGeom>
+              <a:noFill/>
+            </p:spPr>
+            <p:txBody>
+              <a:bodyPr wrap="square" rtlCol="0">
+                <a:spAutoFit/>
+              </a:bodyPr>
+              <a:lstStyle/>
+              <a:p>
+                <a:pPr/>
+                <a14:m>
+                  <m:oMathPara xmlns:m="http://schemas.openxmlformats.org/officeDocument/2006/math">
+                    <m:oMathParaPr>
+                      <m:jc m:val="centerGroup"/>
+                    </m:oMathParaPr>
+                    <m:oMath xmlns:m="http://schemas.openxmlformats.org/officeDocument/2006/math">
+                      <m:sSub>
+                        <m:sSubPr>
+                          <m:ctrlPr>
+                            <a:rPr lang="en-US" sz="1200" i="1" smtClean="0">
+                              <a:latin typeface="Cambria Math" panose="02040503050406030204" pitchFamily="18" charset="0"/>
+                            </a:rPr>
+                          </m:ctrlPr>
+                        </m:sSubPr>
+                        <m:e>
+                          <m:r>
+                            <m:rPr>
+                              <m:sty m:val="p"/>
+                            </m:rPr>
+                            <a:rPr lang="en-CA" sz="1200" b="0" i="0" smtClean="0">
+                              <a:latin typeface="Cambria Math" panose="02040503050406030204" pitchFamily="18" charset="0"/>
+                            </a:rPr>
+                            <m:t>E</m:t>
+                          </m:r>
+                        </m:e>
+                        <m:sub>
+                          <m:sSub>
+                            <m:sSubPr>
+                              <m:ctrlPr>
+                                <a:rPr lang="en-US" sz="1200" i="1" smtClean="0">
+                                  <a:latin typeface="Cambria Math" panose="02040503050406030204" pitchFamily="18" charset="0"/>
+                                </a:rPr>
+                              </m:ctrlPr>
+                            </m:sSubPr>
+                            <m:e>
+                              <m:r>
+                                <m:rPr>
+                                  <m:sty m:val="p"/>
+                                </m:rPr>
+                                <a:rPr lang="en-CA" sz="1200" b="0" i="0" smtClean="0">
+                                  <a:latin typeface="Cambria Math" panose="02040503050406030204" pitchFamily="18" charset="0"/>
+                                </a:rPr>
+                                <m:t>r</m:t>
+                              </m:r>
+                            </m:e>
+                            <m:sub>
+                              <m:r>
+                                <m:rPr>
+                                  <m:sty m:val="p"/>
+                                </m:rPr>
+                                <a:rPr lang="en-CA" sz="1200" b="0" i="0" smtClean="0">
+                                  <a:latin typeface="Cambria Math" panose="02040503050406030204" pitchFamily="18" charset="0"/>
+                                </a:rPr>
+                                <m:t>b</m:t>
+                              </m:r>
+                            </m:sub>
+                          </m:sSub>
+                        </m:sub>
+                      </m:sSub>
+                    </m:oMath>
+                  </m:oMathPara>
+                </a14:m>
+                <a:endParaRPr lang="en-US" sz="1200" dirty="0"/>
+              </a:p>
+            </p:txBody>
+          </p:sp>
+        </mc:Choice>
+        <mc:Fallback xmlns="">
           <p:sp>
             <p:nvSpPr>
               <p:cNvPr id="23" name="TextBox 22">
@@ -10166,6 +12201,1880 @@
     <p:extLst>
       <p:ext uri="{BB962C8B-B14F-4D97-AF65-F5344CB8AC3E}">
         <p14:creationId xmlns:p14="http://schemas.microsoft.com/office/powerpoint/2010/main" val="1742207764"/>
+      </p:ext>
+    </p:extLst>
+  </p:cSld>
+  <p:clrMapOvr>
+    <a:masterClrMapping/>
+  </p:clrMapOvr>
+</p:sld>
+</file>
+
+<file path=ppt/slides/slide9.xml><?xml version="1.0" encoding="utf-8"?>
+<p:sld xmlns:a="http://schemas.openxmlformats.org/drawingml/2006/main" xmlns:r="http://schemas.openxmlformats.org/officeDocument/2006/relationships" xmlns:p="http://schemas.openxmlformats.org/presentationml/2006/main">
+  <p:cSld>
+    <p:spTree>
+      <p:nvGrpSpPr>
+        <p:cNvPr id="1" name="">
+          <a:extLst>
+            <a:ext uri="{FF2B5EF4-FFF2-40B4-BE49-F238E27FC236}">
+              <a16:creationId xmlns:a16="http://schemas.microsoft.com/office/drawing/2014/main" id="{9F4648AA-2A98-E046-FA76-C1A4DF2AA725}"/>
+            </a:ext>
+          </a:extLst>
+        </p:cNvPr>
+        <p:cNvGrpSpPr/>
+        <p:nvPr/>
+      </p:nvGrpSpPr>
+      <p:grpSpPr>
+        <a:xfrm>
+          <a:off x="0" y="0"/>
+          <a:ext cx="0" cy="0"/>
+          <a:chOff x="0" y="0"/>
+          <a:chExt cx="0" cy="0"/>
+        </a:xfrm>
+      </p:grpSpPr>
+      <p:pic>
+        <p:nvPicPr>
+          <p:cNvPr id="5" name="Picture 4">
+            <a:extLst>
+              <a:ext uri="{FF2B5EF4-FFF2-40B4-BE49-F238E27FC236}">
+                <a16:creationId xmlns:a16="http://schemas.microsoft.com/office/drawing/2014/main" id="{8B70BAAF-34E0-F7AB-13CD-5DC6AF8ED271}"/>
+              </a:ext>
+            </a:extLst>
+          </p:cNvPr>
+          <p:cNvPicPr>
+            <a:picLocks noChangeAspect="1"/>
+          </p:cNvPicPr>
+          <p:nvPr/>
+        </p:nvPicPr>
+        <p:blipFill>
+          <a:blip r:embed="rId2"/>
+          <a:srcRect l="2125" r="2125"/>
+          <a:stretch/>
+        </p:blipFill>
+        <p:spPr>
+          <a:xfrm>
+            <a:off x="157163" y="1499919"/>
+            <a:ext cx="4411971" cy="3512280"/>
+          </a:xfrm>
+          <a:prstGeom prst="rect">
+            <a:avLst/>
+          </a:prstGeom>
+        </p:spPr>
+      </p:pic>
+      <p:pic>
+        <p:nvPicPr>
+          <p:cNvPr id="6" name="Picture 5">
+            <a:extLst>
+              <a:ext uri="{FF2B5EF4-FFF2-40B4-BE49-F238E27FC236}">
+                <a16:creationId xmlns:a16="http://schemas.microsoft.com/office/drawing/2014/main" id="{8476C064-050B-0575-3754-1FD51C97F2C6}"/>
+              </a:ext>
+            </a:extLst>
+          </p:cNvPr>
+          <p:cNvPicPr>
+            <a:picLocks noChangeAspect="1"/>
+          </p:cNvPicPr>
+          <p:nvPr/>
+        </p:nvPicPr>
+        <p:blipFill>
+          <a:blip r:embed="rId3"/>
+          <a:srcRect l="3388" r="3388"/>
+          <a:stretch/>
+        </p:blipFill>
+        <p:spPr>
+          <a:xfrm>
+            <a:off x="8512563" y="1604328"/>
+            <a:ext cx="3397539" cy="3604280"/>
+          </a:xfrm>
+          <a:prstGeom prst="rect">
+            <a:avLst/>
+          </a:prstGeom>
+        </p:spPr>
+      </p:pic>
+      <p:sp>
+        <p:nvSpPr>
+          <p:cNvPr id="7" name="TextBox 6">
+            <a:extLst>
+              <a:ext uri="{FF2B5EF4-FFF2-40B4-BE49-F238E27FC236}">
+                <a16:creationId xmlns:a16="http://schemas.microsoft.com/office/drawing/2014/main" id="{93A82A41-1DFF-7B72-3736-C1DFEE42AC51}"/>
+              </a:ext>
+            </a:extLst>
+          </p:cNvPr>
+          <p:cNvSpPr txBox="1"/>
+          <p:nvPr/>
+        </p:nvSpPr>
+        <p:spPr>
+          <a:xfrm>
+            <a:off x="3275084" y="495827"/>
+            <a:ext cx="4714369" cy="461665"/>
+          </a:xfrm>
+          <a:prstGeom prst="rect">
+            <a:avLst/>
+          </a:prstGeom>
+          <a:noFill/>
+        </p:spPr>
+        <p:txBody>
+          <a:bodyPr wrap="square" rtlCol="0">
+            <a:spAutoFit/>
+          </a:bodyPr>
+          <a:lstStyle/>
+          <a:p>
+            <a:r>
+              <a:rPr lang="en-US" sz="2400" dirty="0"/>
+              <a:t>Intra-process thermal asymmetry</a:t>
+            </a:r>
+          </a:p>
+        </p:txBody>
+      </p:sp>
+      <p:pic>
+        <p:nvPicPr>
+          <p:cNvPr id="9" name="Picture 8">
+            <a:extLst>
+              <a:ext uri="{FF2B5EF4-FFF2-40B4-BE49-F238E27FC236}">
+                <a16:creationId xmlns:a16="http://schemas.microsoft.com/office/drawing/2014/main" id="{C0B4F4B3-E8B2-A8D3-3C32-1AA9C9F9EC57}"/>
+              </a:ext>
+            </a:extLst>
+          </p:cNvPr>
+          <p:cNvPicPr>
+            <a:picLocks noChangeAspect="1"/>
+          </p:cNvPicPr>
+          <p:nvPr/>
+        </p:nvPicPr>
+        <p:blipFill>
+          <a:blip r:embed="rId4"/>
+          <a:srcRect t="3185" b="3185"/>
+          <a:stretch/>
+        </p:blipFill>
+        <p:spPr>
+          <a:xfrm>
+            <a:off x="4726777" y="1650887"/>
+            <a:ext cx="3397539" cy="3181114"/>
+          </a:xfrm>
+          <a:prstGeom prst="rect">
+            <a:avLst/>
+          </a:prstGeom>
+        </p:spPr>
+      </p:pic>
+      <mc:AlternateContent xmlns:mc="http://schemas.openxmlformats.org/markup-compatibility/2006">
+        <mc:Choice xmlns:a14="http://schemas.microsoft.com/office/drawing/2010/main" Requires="a14">
+          <p:sp>
+            <p:nvSpPr>
+              <p:cNvPr id="19" name="TextBox 18">
+                <a:extLst>
+                  <a:ext uri="{FF2B5EF4-FFF2-40B4-BE49-F238E27FC236}">
+                    <a16:creationId xmlns:a16="http://schemas.microsoft.com/office/drawing/2014/main" id="{286E70B0-4B88-3F58-2365-576FE8138E55}"/>
+                  </a:ext>
+                </a:extLst>
+              </p:cNvPr>
+              <p:cNvSpPr txBox="1"/>
+              <p:nvPr/>
+            </p:nvSpPr>
+            <p:spPr>
+              <a:xfrm>
+                <a:off x="5793887" y="3627103"/>
+                <a:ext cx="588229" cy="360676"/>
+              </a:xfrm>
+              <a:prstGeom prst="rect">
+                <a:avLst/>
+              </a:prstGeom>
+              <a:noFill/>
+            </p:spPr>
+            <p:txBody>
+              <a:bodyPr wrap="square" rtlCol="0">
+                <a:spAutoFit/>
+              </a:bodyPr>
+              <a:lstStyle/>
+              <a:p>
+                <a:pPr/>
+                <a14:m>
+                  <m:oMathPara xmlns:m="http://schemas.openxmlformats.org/officeDocument/2006/math">
+                    <m:oMathParaPr>
+                      <m:jc m:val="centerGroup"/>
+                    </m:oMathParaPr>
+                    <m:oMath xmlns:m="http://schemas.openxmlformats.org/officeDocument/2006/math">
+                      <m:sSub>
+                        <m:sSubPr>
+                          <m:ctrlPr>
+                            <a:rPr lang="en-US" sz="1600" i="1" smtClean="0">
+                              <a:solidFill>
+                                <a:srgbClr val="1D86EE"/>
+                              </a:solidFill>
+                            </a:rPr>
+                          </m:ctrlPr>
+                        </m:sSubPr>
+                        <m:e>
+                          <m:r>
+                            <m:rPr>
+                              <m:sty m:val="p"/>
+                            </m:rPr>
+                            <a:rPr lang="en-CA" sz="1600" b="0" i="0" smtClean="0">
+                              <a:solidFill>
+                                <a:srgbClr val="1D86EE"/>
+                              </a:solidFill>
+                            </a:rPr>
+                            <m:t>E</m:t>
+                          </m:r>
+                        </m:e>
+                        <m:sub>
+                          <m:sSub>
+                            <m:sSubPr>
+                              <m:ctrlPr>
+                                <a:rPr lang="en-US" sz="1600" i="1" smtClean="0">
+                                  <a:solidFill>
+                                    <a:srgbClr val="1D86EE"/>
+                                  </a:solidFill>
+                                </a:rPr>
+                              </m:ctrlPr>
+                            </m:sSubPr>
+                            <m:e>
+                              <m:r>
+                                <m:rPr>
+                                  <m:sty m:val="p"/>
+                                </m:rPr>
+                                <a:rPr lang="en-CA" sz="1600" b="0" i="0" smtClean="0">
+                                  <a:solidFill>
+                                    <a:srgbClr val="1D86EE"/>
+                                  </a:solidFill>
+                                </a:rPr>
+                                <m:t>r</m:t>
+                              </m:r>
+                            </m:e>
+                            <m:sub>
+                              <m:r>
+                                <m:rPr>
+                                  <m:sty m:val="p"/>
+                                </m:rPr>
+                                <a:rPr lang="en-CA" sz="1600" b="0" i="0" smtClean="0">
+                                  <a:solidFill>
+                                    <a:srgbClr val="1D86EE"/>
+                                  </a:solidFill>
+                                </a:rPr>
+                                <m:t>a</m:t>
+                              </m:r>
+                            </m:sub>
+                          </m:sSub>
+                        </m:sub>
+                      </m:sSub>
+                    </m:oMath>
+                  </m:oMathPara>
+                </a14:m>
+                <a:endParaRPr lang="en-US" sz="1600" dirty="0">
+                  <a:solidFill>
+                    <a:srgbClr val="1D86EE"/>
+                  </a:solidFill>
+                </a:endParaRPr>
+              </a:p>
+            </p:txBody>
+          </p:sp>
+        </mc:Choice>
+        <mc:Fallback>
+          <p:sp>
+            <p:nvSpPr>
+              <p:cNvPr id="19" name="TextBox 18">
+                <a:extLst>
+                  <a:ext uri="{FF2B5EF4-FFF2-40B4-BE49-F238E27FC236}">
+                    <a16:creationId xmlns:a16="http://schemas.microsoft.com/office/drawing/2014/main" id="{286E70B0-4B88-3F58-2365-576FE8138E55}"/>
+                  </a:ext>
+                </a:extLst>
+              </p:cNvPr>
+              <p:cNvSpPr txBox="1">
+                <a:spLocks noRot="1" noChangeAspect="1" noMove="1" noResize="1" noEditPoints="1" noAdjustHandles="1" noChangeArrowheads="1" noChangeShapeType="1" noTextEdit="1"/>
+              </p:cNvSpPr>
+              <p:nvPr/>
+            </p:nvSpPr>
+            <p:spPr>
+              <a:xfrm>
+                <a:off x="5793887" y="3627103"/>
+                <a:ext cx="588229" cy="360676"/>
+              </a:xfrm>
+              <a:prstGeom prst="rect">
+                <a:avLst/>
+              </a:prstGeom>
+              <a:blipFill>
+                <a:blip r:embed="rId5"/>
+                <a:stretch>
+                  <a:fillRect/>
+                </a:stretch>
+              </a:blipFill>
+            </p:spPr>
+            <p:txBody>
+              <a:bodyPr/>
+              <a:lstStyle/>
+              <a:p>
+                <a:r>
+                  <a:rPr lang="en-US">
+                    <a:noFill/>
+                  </a:rPr>
+                  <a:t> </a:t>
+                </a:r>
+              </a:p>
+            </p:txBody>
+          </p:sp>
+        </mc:Fallback>
+      </mc:AlternateContent>
+      <mc:AlternateContent xmlns:mc="http://schemas.openxmlformats.org/markup-compatibility/2006">
+        <mc:Choice xmlns:a14="http://schemas.microsoft.com/office/drawing/2010/main" Requires="a14">
+          <p:sp>
+            <p:nvSpPr>
+              <p:cNvPr id="23" name="TextBox 22">
+                <a:extLst>
+                  <a:ext uri="{FF2B5EF4-FFF2-40B4-BE49-F238E27FC236}">
+                    <a16:creationId xmlns:a16="http://schemas.microsoft.com/office/drawing/2014/main" id="{998323C8-00E0-E7EC-1738-D1E45E197E43}"/>
+                  </a:ext>
+                </a:extLst>
+              </p:cNvPr>
+              <p:cNvSpPr txBox="1"/>
+              <p:nvPr/>
+            </p:nvSpPr>
+            <p:spPr>
+              <a:xfrm>
+                <a:off x="5507771" y="2985725"/>
+                <a:ext cx="588229" cy="360740"/>
+              </a:xfrm>
+              <a:prstGeom prst="rect">
+                <a:avLst/>
+              </a:prstGeom>
+              <a:noFill/>
+            </p:spPr>
+            <p:txBody>
+              <a:bodyPr wrap="square" rtlCol="0">
+                <a:spAutoFit/>
+              </a:bodyPr>
+              <a:lstStyle/>
+              <a:p>
+                <a:pPr/>
+                <a14:m>
+                  <m:oMathPara xmlns:m="http://schemas.openxmlformats.org/officeDocument/2006/math">
+                    <m:oMathParaPr>
+                      <m:jc m:val="centerGroup"/>
+                    </m:oMathParaPr>
+                    <m:oMath xmlns:m="http://schemas.openxmlformats.org/officeDocument/2006/math">
+                      <m:sSub>
+                        <m:sSubPr>
+                          <m:ctrlPr>
+                            <a:rPr lang="en-US" sz="1600" i="1" smtClean="0">
+                              <a:solidFill>
+                                <a:srgbClr val="003D88"/>
+                              </a:solidFill>
+                            </a:rPr>
+                          </m:ctrlPr>
+                        </m:sSubPr>
+                        <m:e>
+                          <m:r>
+                            <m:rPr>
+                              <m:sty m:val="p"/>
+                            </m:rPr>
+                            <a:rPr lang="en-CA" sz="1600" b="0" i="0" smtClean="0">
+                              <a:solidFill>
+                                <a:srgbClr val="003D88"/>
+                              </a:solidFill>
+                            </a:rPr>
+                            <m:t>E</m:t>
+                          </m:r>
+                        </m:e>
+                        <m:sub>
+                          <m:sSub>
+                            <m:sSubPr>
+                              <m:ctrlPr>
+                                <a:rPr lang="en-US" sz="1600" i="1" smtClean="0">
+                                  <a:solidFill>
+                                    <a:srgbClr val="003D88"/>
+                                  </a:solidFill>
+                                </a:rPr>
+                              </m:ctrlPr>
+                            </m:sSubPr>
+                            <m:e>
+                              <m:r>
+                                <m:rPr>
+                                  <m:sty m:val="p"/>
+                                </m:rPr>
+                                <a:rPr lang="en-CA" sz="1600" b="0" i="0" smtClean="0">
+                                  <a:solidFill>
+                                    <a:srgbClr val="003D88"/>
+                                  </a:solidFill>
+                                </a:rPr>
+                                <m:t>r</m:t>
+                              </m:r>
+                            </m:e>
+                            <m:sub>
+                              <m:r>
+                                <m:rPr>
+                                  <m:sty m:val="p"/>
+                                </m:rPr>
+                                <a:rPr lang="en-CA" sz="1600" b="0" i="0" smtClean="0">
+                                  <a:solidFill>
+                                    <a:srgbClr val="003D88"/>
+                                  </a:solidFill>
+                                </a:rPr>
+                                <m:t>b</m:t>
+                              </m:r>
+                            </m:sub>
+                          </m:sSub>
+                        </m:sub>
+                      </m:sSub>
+                    </m:oMath>
+                  </m:oMathPara>
+                </a14:m>
+                <a:endParaRPr lang="en-US" sz="1600" dirty="0">
+                  <a:solidFill>
+                    <a:srgbClr val="003D88"/>
+                  </a:solidFill>
+                </a:endParaRPr>
+              </a:p>
+            </p:txBody>
+          </p:sp>
+        </mc:Choice>
+        <mc:Fallback>
+          <p:sp>
+            <p:nvSpPr>
+              <p:cNvPr id="23" name="TextBox 22">
+                <a:extLst>
+                  <a:ext uri="{FF2B5EF4-FFF2-40B4-BE49-F238E27FC236}">
+                    <a16:creationId xmlns:a16="http://schemas.microsoft.com/office/drawing/2014/main" id="{998323C8-00E0-E7EC-1738-D1E45E197E43}"/>
+                  </a:ext>
+                </a:extLst>
+              </p:cNvPr>
+              <p:cNvSpPr txBox="1">
+                <a:spLocks noRot="1" noChangeAspect="1" noMove="1" noResize="1" noEditPoints="1" noAdjustHandles="1" noChangeArrowheads="1" noChangeShapeType="1" noTextEdit="1"/>
+              </p:cNvSpPr>
+              <p:nvPr/>
+            </p:nvSpPr>
+            <p:spPr>
+              <a:xfrm>
+                <a:off x="5507771" y="2985725"/>
+                <a:ext cx="588229" cy="360740"/>
+              </a:xfrm>
+              <a:prstGeom prst="rect">
+                <a:avLst/>
+              </a:prstGeom>
+              <a:blipFill>
+                <a:blip r:embed="rId6"/>
+                <a:stretch>
+                  <a:fillRect/>
+                </a:stretch>
+              </a:blipFill>
+            </p:spPr>
+            <p:txBody>
+              <a:bodyPr/>
+              <a:lstStyle/>
+              <a:p>
+                <a:r>
+                  <a:rPr lang="en-US">
+                    <a:noFill/>
+                  </a:rPr>
+                  <a:t> </a:t>
+                </a:r>
+              </a:p>
+            </p:txBody>
+          </p:sp>
+        </mc:Fallback>
+      </mc:AlternateContent>
+      <p:sp>
+        <p:nvSpPr>
+          <p:cNvPr id="2" name="TextBox 1">
+            <a:extLst>
+              <a:ext uri="{FF2B5EF4-FFF2-40B4-BE49-F238E27FC236}">
+                <a16:creationId xmlns:a16="http://schemas.microsoft.com/office/drawing/2014/main" id="{B48E20EE-CF38-9C75-F21B-0C4161891824}"/>
+              </a:ext>
+            </a:extLst>
+          </p:cNvPr>
+          <p:cNvSpPr txBox="1"/>
+          <p:nvPr/>
+        </p:nvSpPr>
+        <p:spPr>
+          <a:xfrm rot="16200000">
+            <a:off x="4429290" y="2939395"/>
+            <a:ext cx="792502" cy="400110"/>
+          </a:xfrm>
+          <a:prstGeom prst="rect">
+            <a:avLst/>
+          </a:prstGeom>
+          <a:solidFill>
+            <a:schemeClr val="bg1"/>
+          </a:solidFill>
+        </p:spPr>
+        <p:txBody>
+          <a:bodyPr wrap="square" rtlCol="0">
+            <a:spAutoFit/>
+          </a:bodyPr>
+          <a:lstStyle/>
+          <a:p>
+            <a:r>
+              <a:rPr lang="en-US" sz="2000" dirty="0"/>
+              <a:t>Rate</a:t>
+            </a:r>
+          </a:p>
+        </p:txBody>
+      </p:sp>
+      <p:sp>
+        <p:nvSpPr>
+          <p:cNvPr id="3" name="TextBox 2">
+            <a:extLst>
+              <a:ext uri="{FF2B5EF4-FFF2-40B4-BE49-F238E27FC236}">
+                <a16:creationId xmlns:a16="http://schemas.microsoft.com/office/drawing/2014/main" id="{047A564B-36CD-114D-B221-A3C6D5D71C14}"/>
+              </a:ext>
+            </a:extLst>
+          </p:cNvPr>
+          <p:cNvSpPr txBox="1"/>
+          <p:nvPr/>
+        </p:nvSpPr>
+        <p:spPr>
+          <a:xfrm>
+            <a:off x="5541818" y="4657204"/>
+            <a:ext cx="2053364" cy="369332"/>
+          </a:xfrm>
+          <a:prstGeom prst="rect">
+            <a:avLst/>
+          </a:prstGeom>
+          <a:solidFill>
+            <a:schemeClr val="bg1"/>
+          </a:solidFill>
+        </p:spPr>
+        <p:txBody>
+          <a:bodyPr wrap="square" rtlCol="0">
+            <a:spAutoFit/>
+          </a:bodyPr>
+          <a:lstStyle/>
+          <a:p>
+            <a:r>
+              <a:rPr lang="en-US" dirty="0"/>
+              <a:t>Temperature (°C)</a:t>
+            </a:r>
+          </a:p>
+        </p:txBody>
+      </p:sp>
+      <mc:AlternateContent xmlns:mc="http://schemas.openxmlformats.org/markup-compatibility/2006">
+        <mc:Choice xmlns:a14="http://schemas.microsoft.com/office/drawing/2010/main" Requires="a14">
+          <p:sp>
+            <p:nvSpPr>
+              <p:cNvPr id="4" name="TextBox 3">
+                <a:extLst>
+                  <a:ext uri="{FF2B5EF4-FFF2-40B4-BE49-F238E27FC236}">
+                    <a16:creationId xmlns:a16="http://schemas.microsoft.com/office/drawing/2014/main" id="{5FEE968E-BB8F-7159-F2DA-A26C68D9500A}"/>
+                  </a:ext>
+                </a:extLst>
+              </p:cNvPr>
+              <p:cNvSpPr txBox="1"/>
+              <p:nvPr/>
+            </p:nvSpPr>
+            <p:spPr>
+              <a:xfrm>
+                <a:off x="4998813" y="3200866"/>
+                <a:ext cx="588229" cy="360676"/>
+              </a:xfrm>
+              <a:prstGeom prst="rect">
+                <a:avLst/>
+              </a:prstGeom>
+              <a:noFill/>
+            </p:spPr>
+            <p:txBody>
+              <a:bodyPr wrap="square" rtlCol="0">
+                <a:spAutoFit/>
+              </a:bodyPr>
+              <a:lstStyle/>
+              <a:p>
+                <a14:m>
+                  <m:oMathPara xmlns:m="http://schemas.openxmlformats.org/officeDocument/2006/math">
+                    <m:oMathParaPr>
+                      <m:jc m:val="centerGroup"/>
+                    </m:oMathParaPr>
+                    <m:oMath xmlns:m="http://schemas.openxmlformats.org/officeDocument/2006/math">
+                      <m:sSub>
+                        <m:sSubPr>
+                          <m:ctrlPr>
+                            <a:rPr lang="en-US" sz="1600" i="1" dirty="0" smtClean="0">
+                              <a:solidFill>
+                                <a:srgbClr val="003D88"/>
+                              </a:solidFill>
+                            </a:rPr>
+                          </m:ctrlPr>
+                        </m:sSubPr>
+                        <m:e>
+                          <m:r>
+                            <a:rPr lang="en-CA" sz="1600" b="0" i="1" dirty="0" smtClean="0">
+                              <a:solidFill>
+                                <a:srgbClr val="003D88"/>
+                              </a:solidFill>
+                            </a:rPr>
+                            <m:t>𝑌</m:t>
+                          </m:r>
+                        </m:e>
+                        <m:sub>
+                          <m:sSub>
+                            <m:sSubPr>
+                              <m:ctrlPr>
+                                <a:rPr lang="en-US" sz="1600" i="1" dirty="0" smtClean="0">
+                                  <a:solidFill>
+                                    <a:srgbClr val="003D88"/>
+                                  </a:solidFill>
+                                </a:rPr>
+                              </m:ctrlPr>
+                            </m:sSubPr>
+                            <m:e>
+                              <m:r>
+                                <a:rPr lang="en-CA" sz="1600" b="0" i="1" dirty="0" smtClean="0">
+                                  <a:solidFill>
+                                    <a:srgbClr val="003D88"/>
+                                  </a:solidFill>
+                                </a:rPr>
+                                <m:t>𝑟</m:t>
+                              </m:r>
+                            </m:e>
+                            <m:sub>
+                              <m:r>
+                                <a:rPr lang="en-CA" sz="1600" b="0" i="1" dirty="0" smtClean="0">
+                                  <a:solidFill>
+                                    <a:srgbClr val="003D88"/>
+                                  </a:solidFill>
+                                </a:rPr>
+                                <m:t>𝑏</m:t>
+                              </m:r>
+                            </m:sub>
+                          </m:sSub>
+                        </m:sub>
+                      </m:sSub>
+                    </m:oMath>
+                  </m:oMathPara>
+                </a14:m>
+                <a:endParaRPr lang="en-US" sz="1600" baseline="-25000" dirty="0">
+                  <a:solidFill>
+                    <a:srgbClr val="003D88"/>
+                  </a:solidFill>
+                </a:endParaRPr>
+              </a:p>
+            </p:txBody>
+          </p:sp>
+        </mc:Choice>
+        <mc:Fallback>
+          <p:sp>
+            <p:nvSpPr>
+              <p:cNvPr id="4" name="TextBox 3">
+                <a:extLst>
+                  <a:ext uri="{FF2B5EF4-FFF2-40B4-BE49-F238E27FC236}">
+                    <a16:creationId xmlns:a16="http://schemas.microsoft.com/office/drawing/2014/main" id="{5FEE968E-BB8F-7159-F2DA-A26C68D9500A}"/>
+                  </a:ext>
+                </a:extLst>
+              </p:cNvPr>
+              <p:cNvSpPr txBox="1">
+                <a:spLocks noRot="1" noChangeAspect="1" noMove="1" noResize="1" noEditPoints="1" noAdjustHandles="1" noChangeArrowheads="1" noChangeShapeType="1" noTextEdit="1"/>
+              </p:cNvSpPr>
+              <p:nvPr/>
+            </p:nvSpPr>
+            <p:spPr>
+              <a:xfrm>
+                <a:off x="4998813" y="3200866"/>
+                <a:ext cx="588229" cy="360676"/>
+              </a:xfrm>
+              <a:prstGeom prst="rect">
+                <a:avLst/>
+              </a:prstGeom>
+              <a:blipFill>
+                <a:blip r:embed="rId7"/>
+                <a:stretch>
+                  <a:fillRect/>
+                </a:stretch>
+              </a:blipFill>
+            </p:spPr>
+            <p:txBody>
+              <a:bodyPr/>
+              <a:lstStyle/>
+              <a:p>
+                <a:r>
+                  <a:rPr lang="en-US">
+                    <a:noFill/>
+                  </a:rPr>
+                  <a:t> </a:t>
+                </a:r>
+              </a:p>
+            </p:txBody>
+          </p:sp>
+        </mc:Fallback>
+      </mc:AlternateContent>
+      <mc:AlternateContent xmlns:mc="http://schemas.openxmlformats.org/markup-compatibility/2006">
+        <mc:Choice xmlns:a14="http://schemas.microsoft.com/office/drawing/2010/main" Requires="a14">
+          <p:sp>
+            <p:nvSpPr>
+              <p:cNvPr id="14" name="TextBox 13">
+                <a:extLst>
+                  <a:ext uri="{FF2B5EF4-FFF2-40B4-BE49-F238E27FC236}">
+                    <a16:creationId xmlns:a16="http://schemas.microsoft.com/office/drawing/2014/main" id="{1B531015-B915-C7C6-6590-1797862F2328}"/>
+                  </a:ext>
+                </a:extLst>
+              </p:cNvPr>
+              <p:cNvSpPr txBox="1"/>
+              <p:nvPr/>
+            </p:nvSpPr>
+            <p:spPr>
+              <a:xfrm>
+                <a:off x="5246364" y="4021141"/>
+                <a:ext cx="588229" cy="360676"/>
+              </a:xfrm>
+              <a:prstGeom prst="rect">
+                <a:avLst/>
+              </a:prstGeom>
+              <a:noFill/>
+            </p:spPr>
+            <p:txBody>
+              <a:bodyPr wrap="square" rtlCol="0">
+                <a:spAutoFit/>
+              </a:bodyPr>
+              <a:lstStyle/>
+              <a:p>
+                <a14:m>
+                  <m:oMathPara xmlns:m="http://schemas.openxmlformats.org/officeDocument/2006/math">
+                    <m:oMathParaPr>
+                      <m:jc m:val="centerGroup"/>
+                    </m:oMathParaPr>
+                    <m:oMath xmlns:m="http://schemas.openxmlformats.org/officeDocument/2006/math">
+                      <m:sSub>
+                        <m:sSubPr>
+                          <m:ctrlPr>
+                            <a:rPr lang="en-US" sz="1600" i="1" dirty="0" smtClean="0">
+                              <a:solidFill>
+                                <a:srgbClr val="1D86EE"/>
+                              </a:solidFill>
+                            </a:rPr>
+                          </m:ctrlPr>
+                        </m:sSubPr>
+                        <m:e>
+                          <m:r>
+                            <a:rPr lang="en-CA" sz="1600" b="0" i="1" dirty="0" smtClean="0">
+                              <a:solidFill>
+                                <a:srgbClr val="1D86EE"/>
+                              </a:solidFill>
+                            </a:rPr>
+                            <m:t>𝑌</m:t>
+                          </m:r>
+                        </m:e>
+                        <m:sub>
+                          <m:sSub>
+                            <m:sSubPr>
+                              <m:ctrlPr>
+                                <a:rPr lang="en-US" sz="1600" i="1" dirty="0" smtClean="0">
+                                  <a:solidFill>
+                                    <a:srgbClr val="1D86EE"/>
+                                  </a:solidFill>
+                                </a:rPr>
+                              </m:ctrlPr>
+                            </m:sSubPr>
+                            <m:e>
+                              <m:r>
+                                <a:rPr lang="en-CA" sz="1600" b="0" i="1" dirty="0" smtClean="0">
+                                  <a:solidFill>
+                                    <a:srgbClr val="1D86EE"/>
+                                  </a:solidFill>
+                                </a:rPr>
+                                <m:t>𝑟</m:t>
+                              </m:r>
+                            </m:e>
+                            <m:sub>
+                              <m:r>
+                                <a:rPr lang="en-CA" sz="1600" b="0" i="1" dirty="0" smtClean="0">
+                                  <a:solidFill>
+                                    <a:srgbClr val="1D86EE"/>
+                                  </a:solidFill>
+                                </a:rPr>
+                                <m:t>𝑎</m:t>
+                              </m:r>
+                            </m:sub>
+                          </m:sSub>
+                        </m:sub>
+                      </m:sSub>
+                    </m:oMath>
+                  </m:oMathPara>
+                </a14:m>
+                <a:endParaRPr lang="en-US" sz="1600" baseline="-25000" dirty="0">
+                  <a:solidFill>
+                    <a:srgbClr val="003D88"/>
+                  </a:solidFill>
+                </a:endParaRPr>
+              </a:p>
+            </p:txBody>
+          </p:sp>
+        </mc:Choice>
+        <mc:Fallback>
+          <p:sp>
+            <p:nvSpPr>
+              <p:cNvPr id="14" name="TextBox 13">
+                <a:extLst>
+                  <a:ext uri="{FF2B5EF4-FFF2-40B4-BE49-F238E27FC236}">
+                    <a16:creationId xmlns:a16="http://schemas.microsoft.com/office/drawing/2014/main" id="{1B531015-B915-C7C6-6590-1797862F2328}"/>
+                  </a:ext>
+                </a:extLst>
+              </p:cNvPr>
+              <p:cNvSpPr txBox="1">
+                <a:spLocks noRot="1" noChangeAspect="1" noMove="1" noResize="1" noEditPoints="1" noAdjustHandles="1" noChangeArrowheads="1" noChangeShapeType="1" noTextEdit="1"/>
+              </p:cNvSpPr>
+              <p:nvPr/>
+            </p:nvSpPr>
+            <p:spPr>
+              <a:xfrm>
+                <a:off x="5246364" y="4021141"/>
+                <a:ext cx="588229" cy="360676"/>
+              </a:xfrm>
+              <a:prstGeom prst="rect">
+                <a:avLst/>
+              </a:prstGeom>
+              <a:blipFill>
+                <a:blip r:embed="rId8"/>
+                <a:stretch>
+                  <a:fillRect/>
+                </a:stretch>
+              </a:blipFill>
+            </p:spPr>
+            <p:txBody>
+              <a:bodyPr/>
+              <a:lstStyle/>
+              <a:p>
+                <a:r>
+                  <a:rPr lang="en-US">
+                    <a:noFill/>
+                  </a:rPr>
+                  <a:t> </a:t>
+                </a:r>
+              </a:p>
+            </p:txBody>
+          </p:sp>
+        </mc:Fallback>
+      </mc:AlternateContent>
+      <p:cxnSp>
+        <p:nvCxnSpPr>
+          <p:cNvPr id="20" name="Straight Connector 19">
+            <a:extLst>
+              <a:ext uri="{FF2B5EF4-FFF2-40B4-BE49-F238E27FC236}">
+                <a16:creationId xmlns:a16="http://schemas.microsoft.com/office/drawing/2014/main" id="{70ECFD05-E736-7C46-A4BE-CD84262FA3BB}"/>
+              </a:ext>
+            </a:extLst>
+          </p:cNvPr>
+          <p:cNvCxnSpPr>
+            <a:cxnSpLocks/>
+          </p:cNvCxnSpPr>
+          <p:nvPr/>
+        </p:nvCxnSpPr>
+        <p:spPr>
+          <a:xfrm>
+            <a:off x="5252951" y="3727554"/>
+            <a:ext cx="0" cy="845217"/>
+          </a:xfrm>
+          <a:prstGeom prst="line">
+            <a:avLst/>
+          </a:prstGeom>
+          <a:ln>
+            <a:solidFill>
+              <a:schemeClr val="tx1"/>
+            </a:solidFill>
+            <a:prstDash val="sysDot"/>
+          </a:ln>
+        </p:spPr>
+        <p:style>
+          <a:lnRef idx="2">
+            <a:schemeClr val="accent1"/>
+          </a:lnRef>
+          <a:fillRef idx="0">
+            <a:schemeClr val="accent1"/>
+          </a:fillRef>
+          <a:effectRef idx="1">
+            <a:schemeClr val="accent1"/>
+          </a:effectRef>
+          <a:fontRef idx="minor">
+            <a:schemeClr val="tx1"/>
+          </a:fontRef>
+        </p:style>
+      </p:cxnSp>
+      <p:sp>
+        <p:nvSpPr>
+          <p:cNvPr id="22" name="TextBox 21">
+            <a:extLst>
+              <a:ext uri="{FF2B5EF4-FFF2-40B4-BE49-F238E27FC236}">
+                <a16:creationId xmlns:a16="http://schemas.microsoft.com/office/drawing/2014/main" id="{5AE4B88D-2E94-7887-6FB8-F4BC2276213F}"/>
+              </a:ext>
+            </a:extLst>
+          </p:cNvPr>
+          <p:cNvSpPr txBox="1"/>
+          <p:nvPr/>
+        </p:nvSpPr>
+        <p:spPr>
+          <a:xfrm>
+            <a:off x="5036885" y="4508312"/>
+            <a:ext cx="585389" cy="307777"/>
+          </a:xfrm>
+          <a:prstGeom prst="rect">
+            <a:avLst/>
+          </a:prstGeom>
+          <a:noFill/>
+        </p:spPr>
+        <p:txBody>
+          <a:bodyPr wrap="square" rtlCol="0">
+            <a:spAutoFit/>
+          </a:bodyPr>
+          <a:lstStyle/>
+          <a:p>
+            <a:r>
+              <a:rPr lang="en-US" sz="1400" dirty="0"/>
+              <a:t>T</a:t>
+            </a:r>
+            <a:r>
+              <a:rPr lang="en-US" sz="1400" baseline="-25000" dirty="0"/>
+              <a:t>amb</a:t>
+            </a:r>
+            <a:endParaRPr lang="en-US" sz="1400" dirty="0"/>
+          </a:p>
+        </p:txBody>
+      </p:sp>
+      <p:cxnSp>
+        <p:nvCxnSpPr>
+          <p:cNvPr id="25" name="Straight Arrow Connector 24">
+            <a:extLst>
+              <a:ext uri="{FF2B5EF4-FFF2-40B4-BE49-F238E27FC236}">
+                <a16:creationId xmlns:a16="http://schemas.microsoft.com/office/drawing/2014/main" id="{F4639EDB-5770-3406-0A19-40063C60F1FC}"/>
+              </a:ext>
+            </a:extLst>
+          </p:cNvPr>
+          <p:cNvCxnSpPr>
+            <a:cxnSpLocks/>
+          </p:cNvCxnSpPr>
+          <p:nvPr/>
+        </p:nvCxnSpPr>
+        <p:spPr>
+          <a:xfrm>
+            <a:off x="5246364" y="3500284"/>
+            <a:ext cx="0" cy="183055"/>
+          </a:xfrm>
+          <a:prstGeom prst="straightConnector1">
+            <a:avLst/>
+          </a:prstGeom>
+          <a:ln>
+            <a:solidFill>
+              <a:schemeClr val="tx1"/>
+            </a:solidFill>
+            <a:tailEnd type="triangle"/>
+          </a:ln>
+        </p:spPr>
+        <p:style>
+          <a:lnRef idx="2">
+            <a:schemeClr val="accent1"/>
+          </a:lnRef>
+          <a:fillRef idx="0">
+            <a:schemeClr val="accent1"/>
+          </a:fillRef>
+          <a:effectRef idx="1">
+            <a:schemeClr val="accent1"/>
+          </a:effectRef>
+          <a:fontRef idx="minor">
+            <a:schemeClr val="tx1"/>
+          </a:fontRef>
+        </p:style>
+      </p:cxnSp>
+      <p:cxnSp>
+        <p:nvCxnSpPr>
+          <p:cNvPr id="26" name="Straight Arrow Connector 25">
+            <a:extLst>
+              <a:ext uri="{FF2B5EF4-FFF2-40B4-BE49-F238E27FC236}">
+                <a16:creationId xmlns:a16="http://schemas.microsoft.com/office/drawing/2014/main" id="{784166AF-77C4-D0A2-D24C-8ECA215388E2}"/>
+              </a:ext>
+            </a:extLst>
+          </p:cNvPr>
+          <p:cNvCxnSpPr>
+            <a:cxnSpLocks/>
+          </p:cNvCxnSpPr>
+          <p:nvPr/>
+        </p:nvCxnSpPr>
+        <p:spPr>
+          <a:xfrm flipH="1" flipV="1">
+            <a:off x="5295530" y="3932128"/>
+            <a:ext cx="115065" cy="218034"/>
+          </a:xfrm>
+          <a:prstGeom prst="straightConnector1">
+            <a:avLst/>
+          </a:prstGeom>
+          <a:ln>
+            <a:solidFill>
+              <a:schemeClr val="tx1"/>
+            </a:solidFill>
+            <a:tailEnd type="triangle"/>
+          </a:ln>
+        </p:spPr>
+        <p:style>
+          <a:lnRef idx="2">
+            <a:schemeClr val="accent1"/>
+          </a:lnRef>
+          <a:fillRef idx="0">
+            <a:schemeClr val="accent1"/>
+          </a:fillRef>
+          <a:effectRef idx="1">
+            <a:schemeClr val="accent1"/>
+          </a:effectRef>
+          <a:fontRef idx="minor">
+            <a:schemeClr val="tx1"/>
+          </a:fontRef>
+        </p:style>
+      </p:cxnSp>
+      <p:sp>
+        <p:nvSpPr>
+          <p:cNvPr id="31" name="Freeform 30">
+            <a:extLst>
+              <a:ext uri="{FF2B5EF4-FFF2-40B4-BE49-F238E27FC236}">
+                <a16:creationId xmlns:a16="http://schemas.microsoft.com/office/drawing/2014/main" id="{6C6A0E77-E070-BAC5-73F0-1AEB2FD6F861}"/>
+              </a:ext>
+            </a:extLst>
+          </p:cNvPr>
+          <p:cNvSpPr/>
+          <p:nvPr/>
+        </p:nvSpPr>
+        <p:spPr>
+          <a:xfrm>
+            <a:off x="5619750" y="3131428"/>
+            <a:ext cx="633893" cy="329321"/>
+          </a:xfrm>
+          <a:custGeom>
+            <a:avLst/>
+            <a:gdLst>
+              <a:gd name="connsiteX0" fmla="*/ 0 w 695325"/>
+              <a:gd name="connsiteY0" fmla="*/ 361950 h 361950"/>
+              <a:gd name="connsiteX1" fmla="*/ 139700 w 695325"/>
+              <a:gd name="connsiteY1" fmla="*/ 304800 h 361950"/>
+              <a:gd name="connsiteX2" fmla="*/ 285750 w 695325"/>
+              <a:gd name="connsiteY2" fmla="*/ 231775 h 361950"/>
+              <a:gd name="connsiteX3" fmla="*/ 425450 w 695325"/>
+              <a:gd name="connsiteY3" fmla="*/ 155575 h 361950"/>
+              <a:gd name="connsiteX4" fmla="*/ 552450 w 695325"/>
+              <a:gd name="connsiteY4" fmla="*/ 88900 h 361950"/>
+              <a:gd name="connsiteX5" fmla="*/ 695325 w 695325"/>
+              <a:gd name="connsiteY5" fmla="*/ 0 h 361950"/>
+              <a:gd name="connsiteX6" fmla="*/ 695325 w 695325"/>
+              <a:gd name="connsiteY6" fmla="*/ 0 h 361950"/>
+            </a:gdLst>
+            <a:ahLst/>
+            <a:cxnLst>
+              <a:cxn ang="0">
+                <a:pos x="connsiteX0" y="connsiteY0"/>
+              </a:cxn>
+              <a:cxn ang="0">
+                <a:pos x="connsiteX1" y="connsiteY1"/>
+              </a:cxn>
+              <a:cxn ang="0">
+                <a:pos x="connsiteX2" y="connsiteY2"/>
+              </a:cxn>
+              <a:cxn ang="0">
+                <a:pos x="connsiteX3" y="connsiteY3"/>
+              </a:cxn>
+              <a:cxn ang="0">
+                <a:pos x="connsiteX4" y="connsiteY4"/>
+              </a:cxn>
+              <a:cxn ang="0">
+                <a:pos x="connsiteX5" y="connsiteY5"/>
+              </a:cxn>
+              <a:cxn ang="0">
+                <a:pos x="connsiteX6" y="connsiteY6"/>
+              </a:cxn>
+            </a:cxnLst>
+            <a:rect l="l" t="t" r="r" b="b"/>
+            <a:pathLst>
+              <a:path w="695325" h="361950">
+                <a:moveTo>
+                  <a:pt x="0" y="361950"/>
+                </a:moveTo>
+                <a:cubicBezTo>
+                  <a:pt x="46037" y="344223"/>
+                  <a:pt x="92075" y="326496"/>
+                  <a:pt x="139700" y="304800"/>
+                </a:cubicBezTo>
+                <a:cubicBezTo>
+                  <a:pt x="187325" y="283104"/>
+                  <a:pt x="238125" y="256646"/>
+                  <a:pt x="285750" y="231775"/>
+                </a:cubicBezTo>
+                <a:cubicBezTo>
+                  <a:pt x="333375" y="206904"/>
+                  <a:pt x="381000" y="179387"/>
+                  <a:pt x="425450" y="155575"/>
+                </a:cubicBezTo>
+                <a:cubicBezTo>
+                  <a:pt x="469900" y="131763"/>
+                  <a:pt x="507471" y="114829"/>
+                  <a:pt x="552450" y="88900"/>
+                </a:cubicBezTo>
+                <a:cubicBezTo>
+                  <a:pt x="597429" y="62971"/>
+                  <a:pt x="695325" y="0"/>
+                  <a:pt x="695325" y="0"/>
+                </a:cubicBezTo>
+                <a:lnTo>
+                  <a:pt x="695325" y="0"/>
+                </a:lnTo>
+              </a:path>
+            </a:pathLst>
+          </a:custGeom>
+          <a:noFill/>
+          <a:ln w="28575">
+            <a:solidFill>
+              <a:srgbClr val="003D88"/>
+            </a:solidFill>
+            <a:headEnd type="none" w="med" len="med"/>
+            <a:tailEnd type="triangle" w="med" len="med"/>
+          </a:ln>
+        </p:spPr>
+        <p:style>
+          <a:lnRef idx="2">
+            <a:schemeClr val="accent1">
+              <a:shade val="15000"/>
+            </a:schemeClr>
+          </a:lnRef>
+          <a:fillRef idx="1">
+            <a:schemeClr val="accent1"/>
+          </a:fillRef>
+          <a:effectRef idx="0">
+            <a:schemeClr val="accent1"/>
+          </a:effectRef>
+          <a:fontRef idx="minor">
+            <a:schemeClr val="lt1"/>
+          </a:fontRef>
+        </p:style>
+        <p:txBody>
+          <a:bodyPr rtlCol="0" anchor="ctr"/>
+          <a:lstStyle/>
+          <a:p>
+            <a:pPr algn="ctr"/>
+            <a:endParaRPr lang="en-US"/>
+          </a:p>
+        </p:txBody>
+      </p:sp>
+      <p:sp>
+        <p:nvSpPr>
+          <p:cNvPr id="33" name="Freeform 32">
+            <a:extLst>
+              <a:ext uri="{FF2B5EF4-FFF2-40B4-BE49-F238E27FC236}">
+                <a16:creationId xmlns:a16="http://schemas.microsoft.com/office/drawing/2014/main" id="{BBD4D17B-6176-D851-E2AB-5318FA418302}"/>
+              </a:ext>
+            </a:extLst>
+          </p:cNvPr>
+          <p:cNvSpPr/>
+          <p:nvPr/>
+        </p:nvSpPr>
+        <p:spPr>
+          <a:xfrm>
+            <a:off x="5772650" y="3352970"/>
+            <a:ext cx="577850" cy="406400"/>
+          </a:xfrm>
+          <a:custGeom>
+            <a:avLst/>
+            <a:gdLst>
+              <a:gd name="connsiteX0" fmla="*/ 0 w 577850"/>
+              <a:gd name="connsiteY0" fmla="*/ 406400 h 406400"/>
+              <a:gd name="connsiteX1" fmla="*/ 130175 w 577850"/>
+              <a:gd name="connsiteY1" fmla="*/ 333375 h 406400"/>
+              <a:gd name="connsiteX2" fmla="*/ 250825 w 577850"/>
+              <a:gd name="connsiteY2" fmla="*/ 254000 h 406400"/>
+              <a:gd name="connsiteX3" fmla="*/ 330200 w 577850"/>
+              <a:gd name="connsiteY3" fmla="*/ 200025 h 406400"/>
+              <a:gd name="connsiteX4" fmla="*/ 431800 w 577850"/>
+              <a:gd name="connsiteY4" fmla="*/ 120650 h 406400"/>
+              <a:gd name="connsiteX5" fmla="*/ 527050 w 577850"/>
+              <a:gd name="connsiteY5" fmla="*/ 50800 h 406400"/>
+              <a:gd name="connsiteX6" fmla="*/ 577850 w 577850"/>
+              <a:gd name="connsiteY6" fmla="*/ 0 h 406400"/>
+            </a:gdLst>
+            <a:ahLst/>
+            <a:cxnLst>
+              <a:cxn ang="0">
+                <a:pos x="connsiteX0" y="connsiteY0"/>
+              </a:cxn>
+              <a:cxn ang="0">
+                <a:pos x="connsiteX1" y="connsiteY1"/>
+              </a:cxn>
+              <a:cxn ang="0">
+                <a:pos x="connsiteX2" y="connsiteY2"/>
+              </a:cxn>
+              <a:cxn ang="0">
+                <a:pos x="connsiteX3" y="connsiteY3"/>
+              </a:cxn>
+              <a:cxn ang="0">
+                <a:pos x="connsiteX4" y="connsiteY4"/>
+              </a:cxn>
+              <a:cxn ang="0">
+                <a:pos x="connsiteX5" y="connsiteY5"/>
+              </a:cxn>
+              <a:cxn ang="0">
+                <a:pos x="connsiteX6" y="connsiteY6"/>
+              </a:cxn>
+            </a:cxnLst>
+            <a:rect l="l" t="t" r="r" b="b"/>
+            <a:pathLst>
+              <a:path w="577850" h="406400">
+                <a:moveTo>
+                  <a:pt x="0" y="406400"/>
+                </a:moveTo>
+                <a:cubicBezTo>
+                  <a:pt x="44185" y="382587"/>
+                  <a:pt x="88371" y="358775"/>
+                  <a:pt x="130175" y="333375"/>
+                </a:cubicBezTo>
+                <a:cubicBezTo>
+                  <a:pt x="171979" y="307975"/>
+                  <a:pt x="217488" y="276225"/>
+                  <a:pt x="250825" y="254000"/>
+                </a:cubicBezTo>
+                <a:cubicBezTo>
+                  <a:pt x="284162" y="231775"/>
+                  <a:pt x="300038" y="222250"/>
+                  <a:pt x="330200" y="200025"/>
+                </a:cubicBezTo>
+                <a:cubicBezTo>
+                  <a:pt x="360362" y="177800"/>
+                  <a:pt x="398992" y="145521"/>
+                  <a:pt x="431800" y="120650"/>
+                </a:cubicBezTo>
+                <a:cubicBezTo>
+                  <a:pt x="464608" y="95779"/>
+                  <a:pt x="502708" y="70908"/>
+                  <a:pt x="527050" y="50800"/>
+                </a:cubicBezTo>
+                <a:cubicBezTo>
+                  <a:pt x="551392" y="30692"/>
+                  <a:pt x="564621" y="15346"/>
+                  <a:pt x="577850" y="0"/>
+                </a:cubicBezTo>
+              </a:path>
+            </a:pathLst>
+          </a:custGeom>
+          <a:noFill/>
+          <a:ln w="28575">
+            <a:solidFill>
+              <a:srgbClr val="1D86EE"/>
+            </a:solidFill>
+            <a:headEnd type="none" w="med" len="med"/>
+            <a:tailEnd type="triangle" w="med" len="med"/>
+          </a:ln>
+        </p:spPr>
+        <p:style>
+          <a:lnRef idx="2">
+            <a:schemeClr val="accent1">
+              <a:shade val="15000"/>
+            </a:schemeClr>
+          </a:lnRef>
+          <a:fillRef idx="1">
+            <a:schemeClr val="accent1"/>
+          </a:fillRef>
+          <a:effectRef idx="0">
+            <a:schemeClr val="accent1"/>
+          </a:effectRef>
+          <a:fontRef idx="minor">
+            <a:schemeClr val="lt1"/>
+          </a:fontRef>
+        </p:style>
+        <p:txBody>
+          <a:bodyPr rtlCol="0" anchor="ctr"/>
+          <a:lstStyle/>
+          <a:p>
+            <a:pPr algn="ctr"/>
+            <a:endParaRPr lang="en-US"/>
+          </a:p>
+        </p:txBody>
+      </p:sp>
+      <p:sp>
+        <p:nvSpPr>
+          <p:cNvPr id="36" name="Rectangle 35">
+            <a:extLst>
+              <a:ext uri="{FF2B5EF4-FFF2-40B4-BE49-F238E27FC236}">
+                <a16:creationId xmlns:a16="http://schemas.microsoft.com/office/drawing/2014/main" id="{5EAE11E9-2D51-4308-9BAC-56926D196ABD}"/>
+              </a:ext>
+            </a:extLst>
+          </p:cNvPr>
+          <p:cNvSpPr/>
+          <p:nvPr/>
+        </p:nvSpPr>
+        <p:spPr>
+          <a:xfrm>
+            <a:off x="9778022" y="4563297"/>
+            <a:ext cx="335610" cy="208420"/>
+          </a:xfrm>
+          <a:prstGeom prst="rect">
+            <a:avLst/>
+          </a:prstGeom>
+          <a:solidFill>
+            <a:schemeClr val="bg1"/>
+          </a:solidFill>
+          <a:ln>
+            <a:noFill/>
+          </a:ln>
+        </p:spPr>
+        <p:style>
+          <a:lnRef idx="2">
+            <a:schemeClr val="accent1">
+              <a:shade val="15000"/>
+            </a:schemeClr>
+          </a:lnRef>
+          <a:fillRef idx="1">
+            <a:schemeClr val="accent1"/>
+          </a:fillRef>
+          <a:effectRef idx="0">
+            <a:schemeClr val="accent1"/>
+          </a:effectRef>
+          <a:fontRef idx="minor">
+            <a:schemeClr val="lt1"/>
+          </a:fontRef>
+        </p:style>
+        <p:txBody>
+          <a:bodyPr rtlCol="0" anchor="ctr"/>
+          <a:lstStyle/>
+          <a:p>
+            <a:pPr algn="ctr"/>
+            <a:endParaRPr lang="en-US"/>
+          </a:p>
+        </p:txBody>
+      </p:sp>
+      <p:sp>
+        <p:nvSpPr>
+          <p:cNvPr id="37" name="Rectangle 36">
+            <a:extLst>
+              <a:ext uri="{FF2B5EF4-FFF2-40B4-BE49-F238E27FC236}">
+                <a16:creationId xmlns:a16="http://schemas.microsoft.com/office/drawing/2014/main" id="{A7484CEE-E214-F2F7-DBBF-B24EAA12BF56}"/>
+              </a:ext>
+            </a:extLst>
+          </p:cNvPr>
+          <p:cNvSpPr/>
+          <p:nvPr/>
+        </p:nvSpPr>
+        <p:spPr>
+          <a:xfrm>
+            <a:off x="10415238" y="4552993"/>
+            <a:ext cx="335610" cy="263095"/>
+          </a:xfrm>
+          <a:prstGeom prst="rect">
+            <a:avLst/>
+          </a:prstGeom>
+          <a:solidFill>
+            <a:schemeClr val="bg1"/>
+          </a:solidFill>
+          <a:ln>
+            <a:noFill/>
+          </a:ln>
+        </p:spPr>
+        <p:style>
+          <a:lnRef idx="2">
+            <a:schemeClr val="accent1">
+              <a:shade val="15000"/>
+            </a:schemeClr>
+          </a:lnRef>
+          <a:fillRef idx="1">
+            <a:schemeClr val="accent1"/>
+          </a:fillRef>
+          <a:effectRef idx="0">
+            <a:schemeClr val="accent1"/>
+          </a:effectRef>
+          <a:fontRef idx="minor">
+            <a:schemeClr val="lt1"/>
+          </a:fontRef>
+        </p:style>
+        <p:txBody>
+          <a:bodyPr rtlCol="0" anchor="ctr"/>
+          <a:lstStyle/>
+          <a:p>
+            <a:pPr algn="ctr"/>
+            <a:endParaRPr lang="en-US"/>
+          </a:p>
+        </p:txBody>
+      </p:sp>
+      <mc:AlternateContent xmlns:mc="http://schemas.openxmlformats.org/markup-compatibility/2006">
+        <mc:Choice xmlns:a14="http://schemas.microsoft.com/office/drawing/2010/main" Requires="a14">
+          <p:sp>
+            <p:nvSpPr>
+              <p:cNvPr id="34" name="TextBox 33">
+                <a:extLst>
+                  <a:ext uri="{FF2B5EF4-FFF2-40B4-BE49-F238E27FC236}">
+                    <a16:creationId xmlns:a16="http://schemas.microsoft.com/office/drawing/2014/main" id="{D58E16BA-0C65-9632-A2D9-0638717AEFEE}"/>
+                  </a:ext>
+                </a:extLst>
+              </p:cNvPr>
+              <p:cNvSpPr txBox="1"/>
+              <p:nvPr/>
+            </p:nvSpPr>
+            <p:spPr>
+              <a:xfrm>
+                <a:off x="10207764" y="4451681"/>
+                <a:ext cx="588229" cy="394210"/>
+              </a:xfrm>
+              <a:prstGeom prst="rect">
+                <a:avLst/>
+              </a:prstGeom>
+              <a:noFill/>
+            </p:spPr>
+            <p:txBody>
+              <a:bodyPr wrap="square" rtlCol="0">
+                <a:spAutoFit/>
+              </a:bodyPr>
+              <a:lstStyle/>
+              <a:p>
+                <a:pPr/>
+                <a14:m>
+                  <m:oMathPara xmlns:m="http://schemas.openxmlformats.org/officeDocument/2006/math">
+                    <m:oMathParaPr>
+                      <m:jc m:val="centerGroup"/>
+                    </m:oMathParaPr>
+                    <m:oMath xmlns:m="http://schemas.openxmlformats.org/officeDocument/2006/math">
+                      <m:sSub>
+                        <m:sSubPr>
+                          <m:ctrlPr>
+                            <a:rPr lang="en-US" i="1" smtClean="0">
+                              <a:solidFill>
+                                <a:srgbClr val="1D86EE"/>
+                              </a:solidFill>
+                            </a:rPr>
+                          </m:ctrlPr>
+                        </m:sSubPr>
+                        <m:e>
+                          <m:r>
+                            <m:rPr>
+                              <m:sty m:val="p"/>
+                            </m:rPr>
+                            <a:rPr lang="en-CA" b="0" i="0" smtClean="0">
+                              <a:solidFill>
+                                <a:srgbClr val="1D86EE"/>
+                              </a:solidFill>
+                            </a:rPr>
+                            <m:t>E</m:t>
+                          </m:r>
+                        </m:e>
+                        <m:sub>
+                          <m:sSub>
+                            <m:sSubPr>
+                              <m:ctrlPr>
+                                <a:rPr lang="en-US" i="1" smtClean="0">
+                                  <a:solidFill>
+                                    <a:srgbClr val="1D86EE"/>
+                                  </a:solidFill>
+                                </a:rPr>
+                              </m:ctrlPr>
+                            </m:sSubPr>
+                            <m:e>
+                              <m:r>
+                                <m:rPr>
+                                  <m:sty m:val="p"/>
+                                </m:rPr>
+                                <a:rPr lang="en-CA" b="0" i="0" smtClean="0">
+                                  <a:solidFill>
+                                    <a:srgbClr val="1D86EE"/>
+                                  </a:solidFill>
+                                </a:rPr>
+                                <m:t>r</m:t>
+                              </m:r>
+                            </m:e>
+                            <m:sub>
+                              <m:r>
+                                <m:rPr>
+                                  <m:sty m:val="p"/>
+                                </m:rPr>
+                                <a:rPr lang="en-CA" b="0" i="0" smtClean="0">
+                                  <a:solidFill>
+                                    <a:srgbClr val="1D86EE"/>
+                                  </a:solidFill>
+                                </a:rPr>
+                                <m:t>a</m:t>
+                              </m:r>
+                            </m:sub>
+                          </m:sSub>
+                        </m:sub>
+                      </m:sSub>
+                    </m:oMath>
+                  </m:oMathPara>
+                </a14:m>
+                <a:endParaRPr lang="en-US" dirty="0">
+                  <a:solidFill>
+                    <a:srgbClr val="1D86EE"/>
+                  </a:solidFill>
+                </a:endParaRPr>
+              </a:p>
+            </p:txBody>
+          </p:sp>
+        </mc:Choice>
+        <mc:Fallback>
+          <p:sp>
+            <p:nvSpPr>
+              <p:cNvPr id="34" name="TextBox 33">
+                <a:extLst>
+                  <a:ext uri="{FF2B5EF4-FFF2-40B4-BE49-F238E27FC236}">
+                    <a16:creationId xmlns:a16="http://schemas.microsoft.com/office/drawing/2014/main" id="{D58E16BA-0C65-9632-A2D9-0638717AEFEE}"/>
+                  </a:ext>
+                </a:extLst>
+              </p:cNvPr>
+              <p:cNvSpPr txBox="1">
+                <a:spLocks noRot="1" noChangeAspect="1" noMove="1" noResize="1" noEditPoints="1" noAdjustHandles="1" noChangeArrowheads="1" noChangeShapeType="1" noTextEdit="1"/>
+              </p:cNvSpPr>
+              <p:nvPr/>
+            </p:nvSpPr>
+            <p:spPr>
+              <a:xfrm>
+                <a:off x="10207764" y="4451681"/>
+                <a:ext cx="588229" cy="394210"/>
+              </a:xfrm>
+              <a:prstGeom prst="rect">
+                <a:avLst/>
+              </a:prstGeom>
+              <a:blipFill>
+                <a:blip r:embed="rId9"/>
+                <a:stretch>
+                  <a:fillRect/>
+                </a:stretch>
+              </a:blipFill>
+            </p:spPr>
+            <p:txBody>
+              <a:bodyPr/>
+              <a:lstStyle/>
+              <a:p>
+                <a:r>
+                  <a:rPr lang="en-US">
+                    <a:noFill/>
+                  </a:rPr>
+                  <a:t> </a:t>
+                </a:r>
+              </a:p>
+            </p:txBody>
+          </p:sp>
+        </mc:Fallback>
+      </mc:AlternateContent>
+      <mc:AlternateContent xmlns:mc="http://schemas.openxmlformats.org/markup-compatibility/2006">
+        <mc:Choice xmlns:a14="http://schemas.microsoft.com/office/drawing/2010/main" Requires="a14">
+          <p:sp>
+            <p:nvSpPr>
+              <p:cNvPr id="35" name="TextBox 34">
+                <a:extLst>
+                  <a:ext uri="{FF2B5EF4-FFF2-40B4-BE49-F238E27FC236}">
+                    <a16:creationId xmlns:a16="http://schemas.microsoft.com/office/drawing/2014/main" id="{80A5ED4B-CB06-ACEC-8EC2-2B77291529DC}"/>
+                  </a:ext>
+                </a:extLst>
+              </p:cNvPr>
+              <p:cNvSpPr txBox="1"/>
+              <p:nvPr/>
+            </p:nvSpPr>
+            <p:spPr>
+              <a:xfrm>
+                <a:off x="9602525" y="4451617"/>
+                <a:ext cx="588229" cy="394339"/>
+              </a:xfrm>
+              <a:prstGeom prst="rect">
+                <a:avLst/>
+              </a:prstGeom>
+              <a:noFill/>
+            </p:spPr>
+            <p:txBody>
+              <a:bodyPr wrap="square" rtlCol="0">
+                <a:spAutoFit/>
+              </a:bodyPr>
+              <a:lstStyle/>
+              <a:p>
+                <a:pPr/>
+                <a14:m>
+                  <m:oMathPara xmlns:m="http://schemas.openxmlformats.org/officeDocument/2006/math">
+                    <m:oMathParaPr>
+                      <m:jc m:val="centerGroup"/>
+                    </m:oMathParaPr>
+                    <m:oMath xmlns:m="http://schemas.openxmlformats.org/officeDocument/2006/math">
+                      <m:sSub>
+                        <m:sSubPr>
+                          <m:ctrlPr>
+                            <a:rPr lang="en-US" i="1" smtClean="0">
+                              <a:solidFill>
+                                <a:srgbClr val="003D88"/>
+                              </a:solidFill>
+                            </a:rPr>
+                          </m:ctrlPr>
+                        </m:sSubPr>
+                        <m:e>
+                          <m:r>
+                            <m:rPr>
+                              <m:sty m:val="p"/>
+                            </m:rPr>
+                            <a:rPr lang="en-CA" b="0" i="0" smtClean="0">
+                              <a:solidFill>
+                                <a:srgbClr val="003D88"/>
+                              </a:solidFill>
+                            </a:rPr>
+                            <m:t>E</m:t>
+                          </m:r>
+                        </m:e>
+                        <m:sub>
+                          <m:sSub>
+                            <m:sSubPr>
+                              <m:ctrlPr>
+                                <a:rPr lang="en-US" i="1" smtClean="0">
+                                  <a:solidFill>
+                                    <a:srgbClr val="003D88"/>
+                                  </a:solidFill>
+                                </a:rPr>
+                              </m:ctrlPr>
+                            </m:sSubPr>
+                            <m:e>
+                              <m:r>
+                                <m:rPr>
+                                  <m:sty m:val="p"/>
+                                </m:rPr>
+                                <a:rPr lang="en-CA" b="0" i="0" smtClean="0">
+                                  <a:solidFill>
+                                    <a:srgbClr val="003D88"/>
+                                  </a:solidFill>
+                                </a:rPr>
+                                <m:t>r</m:t>
+                              </m:r>
+                            </m:e>
+                            <m:sub>
+                              <m:r>
+                                <m:rPr>
+                                  <m:sty m:val="p"/>
+                                </m:rPr>
+                                <a:rPr lang="en-CA" b="0" i="0" smtClean="0">
+                                  <a:solidFill>
+                                    <a:srgbClr val="003D88"/>
+                                  </a:solidFill>
+                                </a:rPr>
+                                <m:t>b</m:t>
+                              </m:r>
+                            </m:sub>
+                          </m:sSub>
+                        </m:sub>
+                      </m:sSub>
+                    </m:oMath>
+                  </m:oMathPara>
+                </a14:m>
+                <a:endParaRPr lang="en-US" dirty="0">
+                  <a:solidFill>
+                    <a:srgbClr val="003D88"/>
+                  </a:solidFill>
+                </a:endParaRPr>
+              </a:p>
+            </p:txBody>
+          </p:sp>
+        </mc:Choice>
+        <mc:Fallback>
+          <p:sp>
+            <p:nvSpPr>
+              <p:cNvPr id="35" name="TextBox 34">
+                <a:extLst>
+                  <a:ext uri="{FF2B5EF4-FFF2-40B4-BE49-F238E27FC236}">
+                    <a16:creationId xmlns:a16="http://schemas.microsoft.com/office/drawing/2014/main" id="{80A5ED4B-CB06-ACEC-8EC2-2B77291529DC}"/>
+                  </a:ext>
+                </a:extLst>
+              </p:cNvPr>
+              <p:cNvSpPr txBox="1">
+                <a:spLocks noRot="1" noChangeAspect="1" noMove="1" noResize="1" noEditPoints="1" noAdjustHandles="1" noChangeArrowheads="1" noChangeShapeType="1" noTextEdit="1"/>
+              </p:cNvSpPr>
+              <p:nvPr/>
+            </p:nvSpPr>
+            <p:spPr>
+              <a:xfrm>
+                <a:off x="9602525" y="4451617"/>
+                <a:ext cx="588229" cy="394339"/>
+              </a:xfrm>
+              <a:prstGeom prst="rect">
+                <a:avLst/>
+              </a:prstGeom>
+              <a:blipFill>
+                <a:blip r:embed="rId10"/>
+                <a:stretch>
+                  <a:fillRect/>
+                </a:stretch>
+              </a:blipFill>
+            </p:spPr>
+            <p:txBody>
+              <a:bodyPr/>
+              <a:lstStyle/>
+              <a:p>
+                <a:r>
+                  <a:rPr lang="en-US">
+                    <a:noFill/>
+                  </a:rPr>
+                  <a:t> </a:t>
+                </a:r>
+              </a:p>
+            </p:txBody>
+          </p:sp>
+        </mc:Fallback>
+      </mc:AlternateContent>
+      <p:sp>
+        <p:nvSpPr>
+          <p:cNvPr id="40" name="Rectangle 39">
+            <a:extLst>
+              <a:ext uri="{FF2B5EF4-FFF2-40B4-BE49-F238E27FC236}">
+                <a16:creationId xmlns:a16="http://schemas.microsoft.com/office/drawing/2014/main" id="{9A22D473-C069-40BD-54AD-0086F2DC2A3A}"/>
+              </a:ext>
+            </a:extLst>
+          </p:cNvPr>
+          <p:cNvSpPr/>
+          <p:nvPr/>
+        </p:nvSpPr>
+        <p:spPr>
+          <a:xfrm>
+            <a:off x="822626" y="4324735"/>
+            <a:ext cx="194938" cy="197122"/>
+          </a:xfrm>
+          <a:prstGeom prst="rect">
+            <a:avLst/>
+          </a:prstGeom>
+          <a:solidFill>
+            <a:schemeClr val="bg1"/>
+          </a:solidFill>
+          <a:ln>
+            <a:noFill/>
+          </a:ln>
+        </p:spPr>
+        <p:style>
+          <a:lnRef idx="2">
+            <a:schemeClr val="accent1">
+              <a:shade val="15000"/>
+            </a:schemeClr>
+          </a:lnRef>
+          <a:fillRef idx="1">
+            <a:schemeClr val="accent1"/>
+          </a:fillRef>
+          <a:effectRef idx="0">
+            <a:schemeClr val="accent1"/>
+          </a:effectRef>
+          <a:fontRef idx="minor">
+            <a:schemeClr val="lt1"/>
+          </a:fontRef>
+        </p:style>
+        <p:txBody>
+          <a:bodyPr rtlCol="0" anchor="ctr"/>
+          <a:lstStyle/>
+          <a:p>
+            <a:pPr algn="ctr"/>
+            <a:endParaRPr lang="en-US" dirty="0"/>
+          </a:p>
+        </p:txBody>
+      </p:sp>
+      <p:sp>
+        <p:nvSpPr>
+          <p:cNvPr id="38" name="TextBox 37">
+            <a:extLst>
+              <a:ext uri="{FF2B5EF4-FFF2-40B4-BE49-F238E27FC236}">
+                <a16:creationId xmlns:a16="http://schemas.microsoft.com/office/drawing/2014/main" id="{8D1E2034-E037-A747-11BA-0DEE79F9DBE8}"/>
+              </a:ext>
+            </a:extLst>
+          </p:cNvPr>
+          <p:cNvSpPr txBox="1"/>
+          <p:nvPr/>
+        </p:nvSpPr>
+        <p:spPr>
+          <a:xfrm>
+            <a:off x="763108" y="4187121"/>
+            <a:ext cx="945756" cy="461665"/>
+          </a:xfrm>
+          <a:prstGeom prst="rect">
+            <a:avLst/>
+          </a:prstGeom>
+          <a:noFill/>
+        </p:spPr>
+        <p:txBody>
+          <a:bodyPr wrap="square" rtlCol="0">
+            <a:spAutoFit/>
+          </a:bodyPr>
+          <a:lstStyle/>
+          <a:p>
+            <a:r>
+              <a:rPr lang="en-US" sz="2400" dirty="0"/>
+              <a:t>r</a:t>
+            </a:r>
+            <a:r>
+              <a:rPr lang="en-US" sz="2400" baseline="-25000" dirty="0"/>
+              <a:t>a</a:t>
+            </a:r>
+          </a:p>
+        </p:txBody>
+      </p:sp>
+      <p:sp>
+        <p:nvSpPr>
+          <p:cNvPr id="42" name="Rectangle 41">
+            <a:extLst>
+              <a:ext uri="{FF2B5EF4-FFF2-40B4-BE49-F238E27FC236}">
+                <a16:creationId xmlns:a16="http://schemas.microsoft.com/office/drawing/2014/main" id="{E2093B13-1B82-AF7D-DB6E-87B8C6F5475A}"/>
+              </a:ext>
+            </a:extLst>
+          </p:cNvPr>
+          <p:cNvSpPr/>
+          <p:nvPr/>
+        </p:nvSpPr>
+        <p:spPr>
+          <a:xfrm>
+            <a:off x="3686756" y="4370126"/>
+            <a:ext cx="153851" cy="154044"/>
+          </a:xfrm>
+          <a:prstGeom prst="rect">
+            <a:avLst/>
+          </a:prstGeom>
+          <a:solidFill>
+            <a:schemeClr val="bg1"/>
+          </a:solidFill>
+          <a:ln>
+            <a:noFill/>
+          </a:ln>
+        </p:spPr>
+        <p:style>
+          <a:lnRef idx="2">
+            <a:schemeClr val="accent1">
+              <a:shade val="15000"/>
+            </a:schemeClr>
+          </a:lnRef>
+          <a:fillRef idx="1">
+            <a:schemeClr val="accent1"/>
+          </a:fillRef>
+          <a:effectRef idx="0">
+            <a:schemeClr val="accent1"/>
+          </a:effectRef>
+          <a:fontRef idx="minor">
+            <a:schemeClr val="lt1"/>
+          </a:fontRef>
+        </p:style>
+        <p:txBody>
+          <a:bodyPr rtlCol="0" anchor="ctr"/>
+          <a:lstStyle/>
+          <a:p>
+            <a:pPr algn="ctr"/>
+            <a:endParaRPr lang="en-US"/>
+          </a:p>
+        </p:txBody>
+      </p:sp>
+      <p:sp>
+        <p:nvSpPr>
+          <p:cNvPr id="39" name="TextBox 38">
+            <a:extLst>
+              <a:ext uri="{FF2B5EF4-FFF2-40B4-BE49-F238E27FC236}">
+                <a16:creationId xmlns:a16="http://schemas.microsoft.com/office/drawing/2014/main" id="{B49CF66A-9D69-44AF-193E-006FFC51F9E8}"/>
+              </a:ext>
+            </a:extLst>
+          </p:cNvPr>
+          <p:cNvSpPr txBox="1"/>
+          <p:nvPr/>
+        </p:nvSpPr>
+        <p:spPr>
+          <a:xfrm>
+            <a:off x="3609569" y="4139293"/>
+            <a:ext cx="914399" cy="461665"/>
+          </a:xfrm>
+          <a:prstGeom prst="rect">
+            <a:avLst/>
+          </a:prstGeom>
+          <a:noFill/>
+        </p:spPr>
+        <p:txBody>
+          <a:bodyPr wrap="square" rtlCol="0">
+            <a:spAutoFit/>
+          </a:bodyPr>
+          <a:lstStyle/>
+          <a:p>
+            <a:r>
+              <a:rPr lang="en-US" sz="2400" dirty="0"/>
+              <a:t>r</a:t>
+            </a:r>
+            <a:r>
+              <a:rPr lang="en-US" sz="2400" baseline="-25000" dirty="0"/>
+              <a:t>b</a:t>
+            </a:r>
+          </a:p>
+        </p:txBody>
+      </p:sp>
+    </p:spTree>
+    <p:extLst>
+      <p:ext uri="{BB962C8B-B14F-4D97-AF65-F5344CB8AC3E}">
+        <p14:creationId xmlns:p14="http://schemas.microsoft.com/office/powerpoint/2010/main" val="3125919258"/>
       </p:ext>
     </p:extLst>
   </p:cSld>
